--- a/docs/Shilatech_Corporate_Presentation.pptx
+++ b/docs/Shilatech_Corporate_Presentation.pptx
@@ -4292,16 +4292,13 @@
               <a:spcAft>
                 <a:spcPts val="0"/>
               </a:spcAft>
-              <a:defRPr sz="1200" b="1">
-                <a:solidFill>
-                  <a:srgbClr val="FFFFFF"/>
-                </a:solidFill>
-                <a:latin typeface="Aptos"/>
-              </a:defRPr>
-            </a:pPr>
-            <a:r>
-              <a:rPr>
-                <a:solidFill/>
+            </a:pPr>
+            <a:r>
+              <a:rPr sz="1200" b="1">
+                <a:solidFill>
+                  <a:srgbClr val="F6F7F5"/>
+                </a:solidFill>
+                <a:latin typeface="Arial"/>
               </a:rPr>
               <a:t>SHILATECH  /  AUTO SPARES</a:t>
             </a:r>
@@ -4337,16 +4334,13 @@
               <a:spcAft>
                 <a:spcPts val="0"/>
               </a:spcAft>
-              <a:defRPr sz="900" b="1">
-                <a:solidFill>
-                  <a:srgbClr val="C5EB68"/>
-                </a:solidFill>
-                <a:latin typeface="Aptos"/>
-              </a:defRPr>
-            </a:pPr>
-            <a:r>
-              <a:rPr>
-                <a:solidFill/>
+            </a:pPr>
+            <a:r>
+              <a:rPr sz="900" b="1">
+                <a:solidFill>
+                  <a:srgbClr val="9AE367"/>
+                </a:solidFill>
+                <a:latin typeface="Arial"/>
               </a:rPr>
               <a:t>THE PLATFORM</a:t>
             </a:r>
@@ -4468,16 +4462,13 @@
               <a:spcAft>
                 <a:spcPts val="0"/>
               </a:spcAft>
-              <a:defRPr sz="900" b="0">
-                <a:solidFill>
-                  <a:srgbClr val="8FA39C"/>
-                </a:solidFill>
-                <a:latin typeface="Aptos"/>
-              </a:defRPr>
-            </a:pPr>
-            <a:r>
-              <a:rPr>
-                <a:solidFill/>
+            </a:pPr>
+            <a:r>
+              <a:rPr sz="900" b="0">
+                <a:solidFill>
+                  <a:srgbClr val="A6B5A7"/>
+                </a:solidFill>
+                <a:latin typeface="Arial"/>
               </a:rPr>
               <a:t>CORPORATE PLATFORM OVERVIEW  •  OCT 2026</a:t>
             </a:r>
@@ -4513,16 +4504,13 @@
               <a:spcAft>
                 <a:spcPts val="0"/>
               </a:spcAft>
-              <a:defRPr sz="900" b="1">
-                <a:solidFill>
-                  <a:srgbClr val="C5EB68"/>
-                </a:solidFill>
-                <a:latin typeface="Aptos"/>
-              </a:defRPr>
-            </a:pPr>
-            <a:r>
-              <a:rPr>
-                <a:solidFill/>
+            </a:pPr>
+            <a:r>
+              <a:rPr sz="900" b="1">
+                <a:solidFill>
+                  <a:srgbClr val="9AE367"/>
+                </a:solidFill>
+                <a:latin typeface="Arial"/>
               </a:rPr>
               <a:t>01 / 13</a:t>
             </a:r>
@@ -4601,16 +4589,13 @@
               <a:spcAft>
                 <a:spcPts val="0"/>
               </a:spcAft>
-              <a:defRPr sz="900" b="1">
-                <a:solidFill>
-                  <a:srgbClr val="C5EB68"/>
-                </a:solidFill>
-                <a:latin typeface="Aptos"/>
-              </a:defRPr>
-            </a:pPr>
-            <a:r>
-              <a:rPr>
-                <a:solidFill/>
+            </a:pPr>
+            <a:r>
+              <a:rPr sz="900" b="1">
+                <a:solidFill>
+                  <a:srgbClr val="9AE367"/>
+                </a:solidFill>
+                <a:latin typeface="Arial"/>
               </a:rPr>
               <a:t>DIGITAL COMMERCE  /  OPERATIONS  /  GROWTH</a:t>
             </a:r>
@@ -4646,16 +4631,13 @@
               <a:spcAft>
                 <a:spcPts val="0"/>
               </a:spcAft>
-              <a:defRPr sz="4200" b="1">
-                <a:solidFill>
-                  <a:srgbClr val="FFFFFF"/>
-                </a:solidFill>
-                <a:latin typeface="Aptos"/>
-              </a:defRPr>
-            </a:pPr>
-            <a:r>
-              <a:rPr>
-                <a:solidFill/>
+            </a:pPr>
+            <a:r>
+              <a:rPr sz="4200" b="1">
+                <a:solidFill>
+                  <a:srgbClr val="F6F7F5"/>
+                </a:solidFill>
+                <a:latin typeface="Arial"/>
               </a:rPr>
               <a:t>One platform.</a:t>
             </a:r>
@@ -4665,16 +4647,13 @@
               <a:spcAft>
                 <a:spcPts val="0"/>
               </a:spcAft>
-              <a:defRPr sz="4200" b="1">
-                <a:solidFill>
-                  <a:srgbClr val="FFFFFF"/>
-                </a:solidFill>
-                <a:latin typeface="Aptos"/>
-              </a:defRPr>
-            </a:pPr>
-            <a:r>
-              <a:rPr>
-                <a:solidFill/>
+            </a:pPr>
+            <a:r>
+              <a:rPr sz="4200" b="1">
+                <a:solidFill>
+                  <a:srgbClr val="F6F7F5"/>
+                </a:solidFill>
+                <a:latin typeface="Arial"/>
               </a:rPr>
               <a:t>Every part of</a:t>
             </a:r>
@@ -4684,16 +4663,13 @@
               <a:spcAft>
                 <a:spcPts val="0"/>
               </a:spcAft>
-              <a:defRPr sz="4200" b="1">
-                <a:solidFill>
-                  <a:srgbClr val="FFFFFF"/>
-                </a:solidFill>
-                <a:latin typeface="Aptos"/>
-              </a:defRPr>
-            </a:pPr>
-            <a:r>
-              <a:rPr>
-                <a:solidFill/>
+            </a:pPr>
+            <a:r>
+              <a:rPr sz="4200" b="1">
+                <a:solidFill>
+                  <a:srgbClr val="F6F7F5"/>
+                </a:solidFill>
+                <a:latin typeface="Arial"/>
               </a:rPr>
               <a:t>the operation.</a:t>
             </a:r>
@@ -4729,16 +4705,13 @@
               <a:spcAft>
                 <a:spcPts val="0"/>
               </a:spcAft>
-              <a:defRPr sz="1700" b="0">
-                <a:solidFill>
-                  <a:srgbClr val="C7D8CF"/>
-                </a:solidFill>
-                <a:latin typeface="Aptos"/>
-              </a:defRPr>
-            </a:pPr>
-            <a:r>
-              <a:rPr>
-                <a:solidFill/>
+            </a:pPr>
+            <a:r>
+              <a:rPr sz="1700" b="0">
+                <a:solidFill>
+                  <a:srgbClr val="CFDCD2"/>
+                </a:solidFill>
+                <a:latin typeface="Arial"/>
               </a:rPr>
               <a:t>A connected digital foundation for Shilatech Auto Spares</a:t>
             </a:r>
@@ -4821,16 +4794,13 @@
               <a:spcAft>
                 <a:spcPts val="0"/>
               </a:spcAft>
-              <a:defRPr sz="900" b="1">
-                <a:solidFill>
-                  <a:srgbClr val="C5EB68"/>
-                </a:solidFill>
-                <a:latin typeface="Aptos"/>
-              </a:defRPr>
-            </a:pPr>
-            <a:r>
-              <a:rPr>
-                <a:solidFill/>
+            </a:pPr>
+            <a:r>
+              <a:rPr sz="900" b="1">
+                <a:solidFill>
+                  <a:srgbClr val="9AE367"/>
+                </a:solidFill>
+                <a:latin typeface="Arial"/>
               </a:rPr>
               <a:t>THE SHILATECH WEBSITE LOOK</a:t>
             </a:r>
@@ -4938,16 +4908,13 @@
               <a:spcAft>
                 <a:spcPts val="0"/>
               </a:spcAft>
-              <a:defRPr sz="1300" b="1">
-                <a:solidFill>
-                  <a:srgbClr val="FFFFFF"/>
-                </a:solidFill>
-                <a:latin typeface="Aptos"/>
-              </a:defRPr>
-            </a:pPr>
-            <a:r>
-              <a:rPr>
-                <a:solidFill/>
+            </a:pPr>
+            <a:r>
+              <a:rPr sz="1300" b="1">
+                <a:solidFill>
+                  <a:srgbClr val="F6F7F5"/>
+                </a:solidFill>
+                <a:latin typeface="Arial"/>
               </a:rPr>
               <a:t>BLACK  /  GREEN  /  WHITE</a:t>
             </a:r>
@@ -5114,16 +5081,13 @@
               <a:spcAft>
                 <a:spcPts val="0"/>
               </a:spcAft>
-              <a:defRPr sz="1200" b="1">
-                <a:solidFill>
-                  <a:srgbClr val="133B36"/>
-                </a:solidFill>
-                <a:latin typeface="Aptos"/>
-              </a:defRPr>
-            </a:pPr>
-            <a:r>
-              <a:rPr>
-                <a:solidFill/>
+            </a:pPr>
+            <a:r>
+              <a:rPr sz="1200" b="1">
+                <a:solidFill>
+                  <a:srgbClr val="9DDD71"/>
+                </a:solidFill>
+                <a:latin typeface="Arial"/>
               </a:rPr>
               <a:t>SHILATECH  /  AUTO SPARES</a:t>
             </a:r>
@@ -5159,16 +5123,13 @@
               <a:spcAft>
                 <a:spcPts val="0"/>
               </a:spcAft>
-              <a:defRPr sz="900" b="1">
-                <a:solidFill>
-                  <a:srgbClr val="1A4C42"/>
-                </a:solidFill>
-                <a:latin typeface="Aptos"/>
-              </a:defRPr>
-            </a:pPr>
-            <a:r>
-              <a:rPr>
-                <a:solidFill/>
+            </a:pPr>
+            <a:r>
+              <a:rPr sz="900" b="1">
+                <a:solidFill>
+                  <a:srgbClr val="96DD62"/>
+                </a:solidFill>
+                <a:latin typeface="Arial"/>
               </a:rPr>
               <a:t>ROLLOUT PLAN</a:t>
             </a:r>
@@ -5290,16 +5251,13 @@
               <a:spcAft>
                 <a:spcPts val="0"/>
               </a:spcAft>
-              <a:defRPr sz="900" b="0">
-                <a:solidFill>
-                  <a:srgbClr val="667978"/>
-                </a:solidFill>
-                <a:latin typeface="Aptos"/>
-              </a:defRPr>
-            </a:pPr>
-            <a:r>
-              <a:rPr>
-                <a:solidFill/>
+            </a:pPr>
+            <a:r>
+              <a:rPr sz="900" b="0">
+                <a:solidFill>
+                  <a:srgbClr val="B7C1B3"/>
+                </a:solidFill>
+                <a:latin typeface="Arial"/>
               </a:rPr>
               <a:t>CORPORATE PLATFORM OVERVIEW  •  OCT 2026</a:t>
             </a:r>
@@ -5335,16 +5293,13 @@
               <a:spcAft>
                 <a:spcPts val="0"/>
               </a:spcAft>
-              <a:defRPr sz="900" b="1">
-                <a:solidFill>
-                  <a:srgbClr val="133B36"/>
-                </a:solidFill>
-                <a:latin typeface="Aptos"/>
-              </a:defRPr>
-            </a:pPr>
-            <a:r>
-              <a:rPr>
-                <a:solidFill/>
+            </a:pPr>
+            <a:r>
+              <a:rPr sz="900" b="1">
+                <a:solidFill>
+                  <a:srgbClr val="9DDD71"/>
+                </a:solidFill>
+                <a:latin typeface="Arial"/>
               </a:rPr>
               <a:t>10 / 13</a:t>
             </a:r>
@@ -5380,16 +5335,13 @@
               <a:spcAft>
                 <a:spcPts val="0"/>
               </a:spcAft>
-              <a:defRPr sz="900" b="1">
-                <a:solidFill>
-                  <a:srgbClr val="1A4C42"/>
-                </a:solidFill>
-                <a:latin typeface="Aptos"/>
-              </a:defRPr>
-            </a:pPr>
-            <a:r>
-              <a:rPr>
-                <a:solidFill/>
+            </a:pPr>
+            <a:r>
+              <a:rPr sz="900" b="1">
+                <a:solidFill>
+                  <a:srgbClr val="96DD62"/>
+                </a:solidFill>
+                <a:latin typeface="Arial"/>
               </a:rPr>
               <a:t>A CONTROLLED LAUNCH</a:t>
             </a:r>
@@ -5425,16 +5377,13 @@
               <a:spcAft>
                 <a:spcPts val="0"/>
               </a:spcAft>
-              <a:defRPr sz="2900" b="1">
-                <a:solidFill>
-                  <a:srgbClr val="172A2B"/>
-                </a:solidFill>
-                <a:latin typeface="Aptos"/>
-              </a:defRPr>
-            </a:pPr>
-            <a:r>
-              <a:rPr>
-                <a:solidFill/>
+            </a:pPr>
+            <a:r>
+              <a:rPr sz="2900" b="1">
+                <a:solidFill>
+                  <a:srgbClr val="F6F7F5"/>
+                </a:solidFill>
+                <a:latin typeface="Arial"/>
               </a:rPr>
               <a:t>Four gates before “go live”</a:t>
             </a:r>
@@ -5470,16 +5419,13 @@
               <a:spcAft>
                 <a:spcPts val="0"/>
               </a:spcAft>
-              <a:defRPr sz="1300" b="0">
-                <a:solidFill>
-                  <a:srgbClr val="667978"/>
-                </a:solidFill>
-                <a:latin typeface="Aptos"/>
-              </a:defRPr>
-            </a:pPr>
-            <a:r>
-              <a:rPr>
-                <a:solidFill/>
+            </a:pPr>
+            <a:r>
+              <a:rPr sz="1300" b="0">
+                <a:solidFill>
+                  <a:srgbClr val="B7C1B3"/>
+                </a:solidFill>
+                <a:latin typeface="Arial"/>
               </a:rPr>
               <a:t>Sequence infrastructure, data validation and operational rehearsal instead of switching everything on at once.</a:t>
             </a:r>
@@ -5648,16 +5594,13 @@
               <a:spcAft>
                 <a:spcPts val="0"/>
               </a:spcAft>
-              <a:defRPr sz="2800" b="1">
-                <a:solidFill>
-                  <a:srgbClr val="1A4C42"/>
-                </a:solidFill>
-                <a:latin typeface="Aptos"/>
-              </a:defRPr>
-            </a:pPr>
-            <a:r>
-              <a:rPr>
-                <a:solidFill/>
+            </a:pPr>
+            <a:r>
+              <a:rPr sz="2800" b="1">
+                <a:solidFill>
+                  <a:srgbClr val="96DD62"/>
+                </a:solidFill>
+                <a:latin typeface="Arial"/>
               </a:rPr>
               <a:t>01</a:t>
             </a:r>
@@ -5693,16 +5636,13 @@
               <a:spcAft>
                 <a:spcPts val="0"/>
               </a:spcAft>
-              <a:defRPr sz="900" b="1">
-                <a:solidFill>
-                  <a:srgbClr val="1A4C42"/>
-                </a:solidFill>
-                <a:latin typeface="Aptos"/>
-              </a:defRPr>
-            </a:pPr>
-            <a:r>
-              <a:rPr>
-                <a:solidFill/>
+            </a:pPr>
+            <a:r>
+              <a:rPr sz="900" b="1">
+                <a:solidFill>
+                  <a:srgbClr val="96DD62"/>
+                </a:solidFill>
+                <a:latin typeface="Arial"/>
               </a:rPr>
               <a:t>PREPARE</a:t>
             </a:r>
@@ -5738,16 +5678,13 @@
               <a:spcAft>
                 <a:spcPts val="0"/>
               </a:spcAft>
-              <a:defRPr sz="1300" b="0">
-                <a:solidFill>
-                  <a:srgbClr val="172A2B"/>
-                </a:solidFill>
-                <a:latin typeface="Aptos"/>
-              </a:defRPr>
-            </a:pPr>
-            <a:r>
-              <a:rPr>
-                <a:solidFill/>
+            </a:pPr>
+            <a:r>
+              <a:rPr sz="1300" b="0">
+                <a:solidFill>
+                  <a:srgbClr val="F6F7F5"/>
+                </a:solidFill>
+                <a:latin typeface="Arial"/>
               </a:rPr>
               <a:t>Confirm domains, provider accounts, roles and production secrets.</a:t>
             </a:r>
@@ -5873,16 +5810,13 @@
               <a:spcAft>
                 <a:spcPts val="0"/>
               </a:spcAft>
-              <a:defRPr sz="2800" b="1">
-                <a:solidFill>
-                  <a:srgbClr val="1A4C42"/>
-                </a:solidFill>
-                <a:latin typeface="Aptos"/>
-              </a:defRPr>
-            </a:pPr>
-            <a:r>
-              <a:rPr>
-                <a:solidFill/>
+            </a:pPr>
+            <a:r>
+              <a:rPr sz="2800" b="1">
+                <a:solidFill>
+                  <a:srgbClr val="96DD62"/>
+                </a:solidFill>
+                <a:latin typeface="Arial"/>
               </a:rPr>
               <a:t>02</a:t>
             </a:r>
@@ -5918,16 +5852,13 @@
               <a:spcAft>
                 <a:spcPts val="0"/>
               </a:spcAft>
-              <a:defRPr sz="900" b="1">
-                <a:solidFill>
-                  <a:srgbClr val="1A4C42"/>
-                </a:solidFill>
-                <a:latin typeface="Aptos"/>
-              </a:defRPr>
-            </a:pPr>
-            <a:r>
-              <a:rPr>
-                <a:solidFill/>
+            </a:pPr>
+            <a:r>
+              <a:rPr sz="900" b="1">
+                <a:solidFill>
+                  <a:srgbClr val="96DD62"/>
+                </a:solidFill>
+                <a:latin typeface="Arial"/>
               </a:rPr>
               <a:t>STAGE</a:t>
             </a:r>
@@ -5963,16 +5894,13 @@
               <a:spcAft>
                 <a:spcPts val="0"/>
               </a:spcAft>
-              <a:defRPr sz="1300" b="0">
-                <a:solidFill>
-                  <a:srgbClr val="172A2B"/>
-                </a:solidFill>
-                <a:latin typeface="Aptos"/>
-              </a:defRPr>
-            </a:pPr>
-            <a:r>
-              <a:rPr>
-                <a:solidFill/>
+            </a:pPr>
+            <a:r>
+              <a:rPr sz="1300" b="0">
+                <a:solidFill>
+                  <a:srgbClr val="F6F7F5"/>
+                </a:solidFill>
+                <a:latin typeface="Arial"/>
               </a:rPr>
               <a:t>Migrate a copy, reconcile stock and test simultaneous workflows.</a:t>
             </a:r>
@@ -6098,16 +6026,13 @@
               <a:spcAft>
                 <a:spcPts val="0"/>
               </a:spcAft>
-              <a:defRPr sz="2800" b="1">
-                <a:solidFill>
-                  <a:srgbClr val="1A4C42"/>
-                </a:solidFill>
-                <a:latin typeface="Aptos"/>
-              </a:defRPr>
-            </a:pPr>
-            <a:r>
-              <a:rPr>
-                <a:solidFill/>
+            </a:pPr>
+            <a:r>
+              <a:rPr sz="2800" b="1">
+                <a:solidFill>
+                  <a:srgbClr val="96DD62"/>
+                </a:solidFill>
+                <a:latin typeface="Arial"/>
               </a:rPr>
               <a:t>03</a:t>
             </a:r>
@@ -6143,16 +6068,13 @@
               <a:spcAft>
                 <a:spcPts val="0"/>
               </a:spcAft>
-              <a:defRPr sz="900" b="1">
-                <a:solidFill>
-                  <a:srgbClr val="1A4C42"/>
-                </a:solidFill>
-                <a:latin typeface="Aptos"/>
-              </a:defRPr>
-            </a:pPr>
-            <a:r>
-              <a:rPr>
-                <a:solidFill/>
+            </a:pPr>
+            <a:r>
+              <a:rPr sz="900" b="1">
+                <a:solidFill>
+                  <a:srgbClr val="96DD62"/>
+                </a:solidFill>
+                <a:latin typeface="Arial"/>
               </a:rPr>
               <a:t>REHEARSE</a:t>
             </a:r>
@@ -6188,16 +6110,13 @@
               <a:spcAft>
                 <a:spcPts val="0"/>
               </a:spcAft>
-              <a:defRPr sz="1300" b="0">
-                <a:solidFill>
-                  <a:srgbClr val="172A2B"/>
-                </a:solidFill>
-                <a:latin typeface="Aptos"/>
-              </a:defRPr>
-            </a:pPr>
-            <a:r>
-              <a:rPr>
-                <a:solidFill/>
+            </a:pPr>
+            <a:r>
+              <a:rPr sz="1300" b="0">
+                <a:solidFill>
+                  <a:srgbClr val="F6F7F5"/>
+                </a:solidFill>
+                <a:latin typeface="Arial"/>
               </a:rPr>
               <a:t>Restore a backup; run a controlled order, POS sale and delivery.</a:t>
             </a:r>
@@ -6323,16 +6242,13 @@
               <a:spcAft>
                 <a:spcPts val="0"/>
               </a:spcAft>
-              <a:defRPr sz="2800" b="1">
-                <a:solidFill>
-                  <a:srgbClr val="1A4C42"/>
-                </a:solidFill>
-                <a:latin typeface="Aptos"/>
-              </a:defRPr>
-            </a:pPr>
-            <a:r>
-              <a:rPr>
-                <a:solidFill/>
+            </a:pPr>
+            <a:r>
+              <a:rPr sz="2800" b="1">
+                <a:solidFill>
+                  <a:srgbClr val="96DD62"/>
+                </a:solidFill>
+                <a:latin typeface="Arial"/>
               </a:rPr>
               <a:t>04</a:t>
             </a:r>
@@ -6368,16 +6284,13 @@
               <a:spcAft>
                 <a:spcPts val="0"/>
               </a:spcAft>
-              <a:defRPr sz="900" b="1">
-                <a:solidFill>
-                  <a:srgbClr val="1A4C42"/>
-                </a:solidFill>
-                <a:latin typeface="Aptos"/>
-              </a:defRPr>
-            </a:pPr>
-            <a:r>
-              <a:rPr>
-                <a:solidFill/>
+            </a:pPr>
+            <a:r>
+              <a:rPr sz="900" b="1">
+                <a:solidFill>
+                  <a:srgbClr val="96DD62"/>
+                </a:solidFill>
+                <a:latin typeface="Arial"/>
               </a:rPr>
               <a:t>LAUNCH</a:t>
             </a:r>
@@ -6413,16 +6326,13 @@
               <a:spcAft>
                 <a:spcPts val="0"/>
               </a:spcAft>
-              <a:defRPr sz="1300" b="0">
-                <a:solidFill>
-                  <a:srgbClr val="172A2B"/>
-                </a:solidFill>
-                <a:latin typeface="Aptos"/>
-              </a:defRPr>
-            </a:pPr>
-            <a:r>
-              <a:rPr>
-                <a:solidFill/>
+            </a:pPr>
+            <a:r>
+              <a:rPr sz="1300" b="0">
+                <a:solidFill>
+                  <a:srgbClr val="F6F7F5"/>
+                </a:solidFill>
+                <a:latin typeface="Arial"/>
               </a:rPr>
               <a:t>Deploy together, monitor transactions and keep a rollback plan.</a:t>
             </a:r>
@@ -6589,16 +6499,13 @@
               <a:spcAft>
                 <a:spcPts val="0"/>
               </a:spcAft>
-              <a:defRPr sz="1200" b="1">
-                <a:solidFill>
-                  <a:srgbClr val="133B36"/>
-                </a:solidFill>
-                <a:latin typeface="Aptos"/>
-              </a:defRPr>
-            </a:pPr>
-            <a:r>
-              <a:rPr>
-                <a:solidFill/>
+            </a:pPr>
+            <a:r>
+              <a:rPr sz="1200" b="1">
+                <a:solidFill>
+                  <a:srgbClr val="9DDD71"/>
+                </a:solidFill>
+                <a:latin typeface="Arial"/>
               </a:rPr>
               <a:t>SHILATECH  /  AUTO SPARES</a:t>
             </a:r>
@@ -6634,16 +6541,13 @@
               <a:spcAft>
                 <a:spcPts val="0"/>
               </a:spcAft>
-              <a:defRPr sz="900" b="1">
-                <a:solidFill>
-                  <a:srgbClr val="1A4C42"/>
-                </a:solidFill>
-                <a:latin typeface="Aptos"/>
-              </a:defRPr>
-            </a:pPr>
-            <a:r>
-              <a:rPr>
-                <a:solidFill/>
+            </a:pPr>
+            <a:r>
+              <a:rPr sz="900" b="1">
+                <a:solidFill>
+                  <a:srgbClr val="96DD62"/>
+                </a:solidFill>
+                <a:latin typeface="Arial"/>
               </a:rPr>
               <a:t>ONLINE COST  /  01</a:t>
             </a:r>
@@ -6765,16 +6669,13 @@
               <a:spcAft>
                 <a:spcPts val="0"/>
               </a:spcAft>
-              <a:defRPr sz="900" b="0">
-                <a:solidFill>
-                  <a:srgbClr val="667978"/>
-                </a:solidFill>
-                <a:latin typeface="Aptos"/>
-              </a:defRPr>
-            </a:pPr>
-            <a:r>
-              <a:rPr>
-                <a:solidFill/>
+            </a:pPr>
+            <a:r>
+              <a:rPr sz="900" b="0">
+                <a:solidFill>
+                  <a:srgbClr val="B7C1B3"/>
+                </a:solidFill>
+                <a:latin typeface="Arial"/>
               </a:rPr>
               <a:t>CORPORATE PLATFORM OVERVIEW  •  OCT 2026</a:t>
             </a:r>
@@ -6810,16 +6711,13 @@
               <a:spcAft>
                 <a:spcPts val="0"/>
               </a:spcAft>
-              <a:defRPr sz="900" b="1">
-                <a:solidFill>
-                  <a:srgbClr val="133B36"/>
-                </a:solidFill>
-                <a:latin typeface="Aptos"/>
-              </a:defRPr>
-            </a:pPr>
-            <a:r>
-              <a:rPr>
-                <a:solidFill/>
+            </a:pPr>
+            <a:r>
+              <a:rPr sz="900" b="1">
+                <a:solidFill>
+                  <a:srgbClr val="9DDD71"/>
+                </a:solidFill>
+                <a:latin typeface="Arial"/>
               </a:rPr>
               <a:t>11 / 13</a:t>
             </a:r>
@@ -6855,16 +6753,13 @@
               <a:spcAft>
                 <a:spcPts val="0"/>
               </a:spcAft>
-              <a:defRPr sz="900" b="1">
-                <a:solidFill>
-                  <a:srgbClr val="1A4C42"/>
-                </a:solidFill>
-                <a:latin typeface="Aptos"/>
-              </a:defRPr>
-            </a:pPr>
-            <a:r>
-              <a:rPr>
-                <a:solidFill/>
+            </a:pPr>
+            <a:r>
+              <a:rPr sz="900" b="1">
+                <a:solidFill>
+                  <a:srgbClr val="96DD62"/>
+                </a:solidFill>
+                <a:latin typeface="Arial"/>
               </a:rPr>
               <a:t>MONTHLY COMPONENTS</a:t>
             </a:r>
@@ -6900,16 +6795,13 @@
               <a:spcAft>
                 <a:spcPts val="0"/>
               </a:spcAft>
-              <a:defRPr sz="2900" b="1">
-                <a:solidFill>
-                  <a:srgbClr val="172A2B"/>
-                </a:solidFill>
-                <a:latin typeface="Aptos"/>
-              </a:defRPr>
-            </a:pPr>
-            <a:r>
-              <a:rPr>
-                <a:solidFill/>
+            </a:pPr>
+            <a:r>
+              <a:rPr sz="2900" b="1">
+                <a:solidFill>
+                  <a:srgbClr val="F6F7F5"/>
+                </a:solidFill>
+                <a:latin typeface="Arial"/>
               </a:rPr>
               <a:t>Cost of putting the system online</a:t>
             </a:r>
@@ -6945,16 +6837,13 @@
               <a:spcAft>
                 <a:spcPts val="0"/>
               </a:spcAft>
-              <a:defRPr sz="1300" b="0">
-                <a:solidFill>
-                  <a:srgbClr val="667978"/>
-                </a:solidFill>
-                <a:latin typeface="Aptos"/>
-              </a:defRPr>
-            </a:pPr>
-            <a:r>
-              <a:rPr>
-                <a:solidFill/>
+            </a:pPr>
+            <a:r>
+              <a:rPr sz="1300" b="0">
+                <a:solidFill>
+                  <a:srgbClr val="B7C1B3"/>
+                </a:solidFill>
+                <a:latin typeface="Arial"/>
               </a:rPr>
               <a:t>Indicative monthly planning estimates in KES  •  based on stakeholder-supplied assumptions.</a:t>
             </a:r>
@@ -7076,16 +6965,13 @@
               <a:spcAft>
                 <a:spcPts val="0"/>
               </a:spcAft>
-              <a:defRPr sz="1000" b="1">
-                <a:solidFill>
-                  <a:srgbClr val="FFFFFF"/>
-                </a:solidFill>
-                <a:latin typeface="Aptos"/>
-              </a:defRPr>
-            </a:pPr>
-            <a:r>
-              <a:rPr>
-                <a:solidFill/>
+            </a:pPr>
+            <a:r>
+              <a:rPr sz="1000" b="1">
+                <a:solidFill>
+                  <a:srgbClr val="F6F7F5"/>
+                </a:solidFill>
+                <a:latin typeface="Arial"/>
               </a:rPr>
               <a:t>COST ITEM</a:t>
             </a:r>
@@ -7164,16 +7050,13 @@
               <a:spcAft>
                 <a:spcPts val="0"/>
               </a:spcAft>
-              <a:defRPr sz="1000" b="1">
-                <a:solidFill>
-                  <a:srgbClr val="FFFFFF"/>
-                </a:solidFill>
-                <a:latin typeface="Aptos"/>
-              </a:defRPr>
-            </a:pPr>
-            <a:r>
-              <a:rPr>
-                <a:solidFill/>
+            </a:pPr>
+            <a:r>
+              <a:rPr sz="1000" b="1">
+                <a:solidFill>
+                  <a:srgbClr val="F6F7F5"/>
+                </a:solidFill>
+                <a:latin typeface="Arial"/>
               </a:rPr>
               <a:t>TIER 1  /  PILOT</a:t>
             </a:r>
@@ -7252,16 +7135,13 @@
               <a:spcAft>
                 <a:spcPts val="0"/>
               </a:spcAft>
-              <a:defRPr sz="1000" b="1">
-                <a:solidFill>
-                  <a:srgbClr val="C5EB68"/>
-                </a:solidFill>
-                <a:latin typeface="Aptos"/>
-              </a:defRPr>
-            </a:pPr>
-            <a:r>
-              <a:rPr>
-                <a:solidFill/>
+            </a:pPr>
+            <a:r>
+              <a:rPr sz="1000" b="1">
+                <a:solidFill>
+                  <a:srgbClr val="9AE367"/>
+                </a:solidFill>
+                <a:latin typeface="Arial"/>
               </a:rPr>
               <a:t>TIER 2  /  RECOMMENDED</a:t>
             </a:r>
@@ -7340,16 +7220,13 @@
               <a:spcAft>
                 <a:spcPts val="0"/>
               </a:spcAft>
-              <a:defRPr sz="1000" b="1">
-                <a:solidFill>
-                  <a:srgbClr val="FFFFFF"/>
-                </a:solidFill>
-                <a:latin typeface="Aptos"/>
-              </a:defRPr>
-            </a:pPr>
-            <a:r>
-              <a:rPr>
-                <a:solidFill/>
+            </a:pPr>
+            <a:r>
+              <a:rPr sz="1000" b="1">
+                <a:solidFill>
+                  <a:srgbClr val="F6F7F5"/>
+                </a:solidFill>
+                <a:latin typeface="Arial"/>
               </a:rPr>
               <a:t>TIER 3  /  VOLUME</a:t>
             </a:r>
@@ -7557,16 +7434,13 @@
               <a:spcAft>
                 <a:spcPts val="0"/>
               </a:spcAft>
-              <a:defRPr sz="1200" b="1">
-                <a:solidFill>
-                  <a:srgbClr val="172A2B"/>
-                </a:solidFill>
-                <a:latin typeface="Aptos"/>
-              </a:defRPr>
-            </a:pPr>
-            <a:r>
-              <a:rPr>
-                <a:solidFill/>
+            </a:pPr>
+            <a:r>
+              <a:rPr sz="1200" b="1">
+                <a:solidFill>
+                  <a:srgbClr val="F6F7F5"/>
+                </a:solidFill>
+                <a:latin typeface="Arial"/>
               </a:rPr>
               <a:t>Domain + SSL</a:t>
             </a:r>
@@ -7602,16 +7476,13 @@
               <a:spcAft>
                 <a:spcPts val="0"/>
               </a:spcAft>
-              <a:defRPr sz="1300" b="1">
-                <a:solidFill>
-                  <a:srgbClr val="1A4C42"/>
-                </a:solidFill>
-                <a:latin typeface="Aptos"/>
-              </a:defRPr>
-            </a:pPr>
-            <a:r>
-              <a:rPr>
-                <a:solidFill/>
+            </a:pPr>
+            <a:r>
+              <a:rPr sz="1300" b="1">
+                <a:solidFill>
+                  <a:srgbClr val="96DD62"/>
+                </a:solidFill>
+                <a:latin typeface="Arial"/>
               </a:rPr>
               <a:t>KES 150–250</a:t>
             </a:r>
@@ -7647,16 +7518,13 @@
               <a:spcAft>
                 <a:spcPts val="0"/>
               </a:spcAft>
-              <a:defRPr sz="1300" b="1">
-                <a:solidFill>
-                  <a:srgbClr val="1A4C42"/>
-                </a:solidFill>
-                <a:latin typeface="Aptos"/>
-              </a:defRPr>
-            </a:pPr>
-            <a:r>
-              <a:rPr>
-                <a:solidFill/>
+            </a:pPr>
+            <a:r>
+              <a:rPr sz="1300" b="1">
+                <a:solidFill>
+                  <a:srgbClr val="96DD62"/>
+                </a:solidFill>
+                <a:latin typeface="Arial"/>
               </a:rPr>
               <a:t>KES 300</a:t>
             </a:r>
@@ -7692,16 +7560,13 @@
               <a:spcAft>
                 <a:spcPts val="0"/>
               </a:spcAft>
-              <a:defRPr sz="1300" b="1">
-                <a:solidFill>
-                  <a:srgbClr val="1A4C42"/>
-                </a:solidFill>
-                <a:latin typeface="Aptos"/>
-              </a:defRPr>
-            </a:pPr>
-            <a:r>
-              <a:rPr>
-                <a:solidFill/>
+            </a:pPr>
+            <a:r>
+              <a:rPr sz="1300" b="1">
+                <a:solidFill>
+                  <a:srgbClr val="96DD62"/>
+                </a:solidFill>
+                <a:latin typeface="Arial"/>
               </a:rPr>
               <a:t>KES 500</a:t>
             </a:r>
@@ -7909,16 +7774,13 @@
               <a:spcAft>
                 <a:spcPts val="0"/>
               </a:spcAft>
-              <a:defRPr sz="1200" b="0">
-                <a:solidFill>
-                  <a:srgbClr val="172A2B"/>
-                </a:solidFill>
-                <a:latin typeface="Aptos"/>
-              </a:defRPr>
-            </a:pPr>
-            <a:r>
-              <a:rPr>
-                <a:solidFill/>
+            </a:pPr>
+            <a:r>
+              <a:rPr sz="1200" b="0">
+                <a:solidFill>
+                  <a:srgbClr val="F6F7F5"/>
+                </a:solidFill>
+                <a:latin typeface="Arial"/>
               </a:rPr>
               <a:t>Web app hosting</a:t>
             </a:r>
@@ -7954,16 +7816,13 @@
               <a:spcAft>
                 <a:spcPts val="0"/>
               </a:spcAft>
-              <a:defRPr sz="1300" b="1">
-                <a:solidFill>
-                  <a:srgbClr val="1A4C42"/>
-                </a:solidFill>
-                <a:latin typeface="Aptos"/>
-              </a:defRPr>
-            </a:pPr>
-            <a:r>
-              <a:rPr>
-                <a:solidFill/>
+            </a:pPr>
+            <a:r>
+              <a:rPr sz="1300" b="1">
+                <a:solidFill>
+                  <a:srgbClr val="96DD62"/>
+                </a:solidFill>
+                <a:latin typeface="Arial"/>
               </a:rPr>
               <a:t>KES 0–650</a:t>
             </a:r>
@@ -7999,16 +7858,13 @@
               <a:spcAft>
                 <a:spcPts val="0"/>
               </a:spcAft>
-              <a:defRPr sz="1300" b="1">
-                <a:solidFill>
-                  <a:srgbClr val="1A4C42"/>
-                </a:solidFill>
-                <a:latin typeface="Aptos"/>
-              </a:defRPr>
-            </a:pPr>
-            <a:r>
-              <a:rPr>
-                <a:solidFill/>
+            </a:pPr>
+            <a:r>
+              <a:rPr sz="1300" b="1">
+                <a:solidFill>
+                  <a:srgbClr val="96DD62"/>
+                </a:solidFill>
+                <a:latin typeface="Arial"/>
               </a:rPr>
               <a:t>KES 2,600</a:t>
             </a:r>
@@ -8044,16 +7900,13 @@
               <a:spcAft>
                 <a:spcPts val="0"/>
               </a:spcAft>
-              <a:defRPr sz="1300" b="1">
-                <a:solidFill>
-                  <a:srgbClr val="1A4C42"/>
-                </a:solidFill>
-                <a:latin typeface="Aptos"/>
-              </a:defRPr>
-            </a:pPr>
-            <a:r>
-              <a:rPr>
-                <a:solidFill/>
+            </a:pPr>
+            <a:r>
+              <a:rPr sz="1300" b="1">
+                <a:solidFill>
+                  <a:srgbClr val="96DD62"/>
+                </a:solidFill>
+                <a:latin typeface="Arial"/>
               </a:rPr>
               <a:t>KES 6,500–11,000</a:t>
             </a:r>
@@ -8261,16 +8114,13 @@
               <a:spcAft>
                 <a:spcPts val="0"/>
               </a:spcAft>
-              <a:defRPr sz="1200" b="0">
-                <a:solidFill>
-                  <a:srgbClr val="172A2B"/>
-                </a:solidFill>
-                <a:latin typeface="Aptos"/>
-              </a:defRPr>
-            </a:pPr>
-            <a:r>
-              <a:rPr>
-                <a:solidFill/>
+            </a:pPr>
+            <a:r>
+              <a:rPr sz="1200" b="0">
+                <a:solidFill>
+                  <a:srgbClr val="F6F7F5"/>
+                </a:solidFill>
+                <a:latin typeface="Arial"/>
               </a:rPr>
               <a:t>Managed PostgreSQL</a:t>
             </a:r>
@@ -8306,16 +8156,13 @@
               <a:spcAft>
                 <a:spcPts val="0"/>
               </a:spcAft>
-              <a:defRPr sz="1300" b="1">
-                <a:solidFill>
-                  <a:srgbClr val="1A4C42"/>
-                </a:solidFill>
-                <a:latin typeface="Aptos"/>
-              </a:defRPr>
-            </a:pPr>
-            <a:r>
-              <a:rPr>
-                <a:solidFill/>
+            </a:pPr>
+            <a:r>
+              <a:rPr sz="1300" b="1">
+                <a:solidFill>
+                  <a:srgbClr val="96DD62"/>
+                </a:solidFill>
+                <a:latin typeface="Arial"/>
               </a:rPr>
               <a:t>KES 0–1,950</a:t>
             </a:r>
@@ -8351,16 +8198,13 @@
               <a:spcAft>
                 <a:spcPts val="0"/>
               </a:spcAft>
-              <a:defRPr sz="1300" b="1">
-                <a:solidFill>
-                  <a:srgbClr val="1A4C42"/>
-                </a:solidFill>
-                <a:latin typeface="Aptos"/>
-              </a:defRPr>
-            </a:pPr>
-            <a:r>
-              <a:rPr>
-                <a:solidFill/>
+            </a:pPr>
+            <a:r>
+              <a:rPr sz="1300" b="1">
+                <a:solidFill>
+                  <a:srgbClr val="96DD62"/>
+                </a:solidFill>
+                <a:latin typeface="Arial"/>
               </a:rPr>
               <a:t>KES 3,250</a:t>
             </a:r>
@@ -8396,16 +8240,13 @@
               <a:spcAft>
                 <a:spcPts val="0"/>
               </a:spcAft>
-              <a:defRPr sz="1300" b="1">
-                <a:solidFill>
-                  <a:srgbClr val="1A4C42"/>
-                </a:solidFill>
-                <a:latin typeface="Aptos"/>
-              </a:defRPr>
-            </a:pPr>
-            <a:r>
-              <a:rPr>
-                <a:solidFill/>
+            </a:pPr>
+            <a:r>
+              <a:rPr sz="1300" b="1">
+                <a:solidFill>
+                  <a:srgbClr val="96DD62"/>
+                </a:solidFill>
+                <a:latin typeface="Arial"/>
               </a:rPr>
               <a:t>KES 9,750–15,000</a:t>
             </a:r>
@@ -8613,16 +8454,13 @@
               <a:spcAft>
                 <a:spcPts val="0"/>
               </a:spcAft>
-              <a:defRPr sz="1200" b="0">
-                <a:solidFill>
-                  <a:srgbClr val="172A2B"/>
-                </a:solidFill>
-                <a:latin typeface="Aptos"/>
-              </a:defRPr>
-            </a:pPr>
-            <a:r>
-              <a:rPr>
-                <a:solidFill/>
+            </a:pPr>
+            <a:r>
+              <a:rPr sz="1200" b="0">
+                <a:solidFill>
+                  <a:srgbClr val="F6F7F5"/>
+                </a:solidFill>
+                <a:latin typeface="Arial"/>
               </a:rPr>
               <a:t>Staff email + alerts</a:t>
             </a:r>
@@ -8658,16 +8496,13 @@
               <a:spcAft>
                 <a:spcPts val="0"/>
               </a:spcAft>
-              <a:defRPr sz="1300" b="1">
-                <a:solidFill>
-                  <a:srgbClr val="1A4C42"/>
-                </a:solidFill>
-                <a:latin typeface="Aptos"/>
-              </a:defRPr>
-            </a:pPr>
-            <a:r>
-              <a:rPr>
-                <a:solidFill/>
+            </a:pPr>
+            <a:r>
+              <a:rPr sz="1300" b="1">
+                <a:solidFill>
+                  <a:srgbClr val="96DD62"/>
+                </a:solidFill>
+                <a:latin typeface="Arial"/>
               </a:rPr>
               <a:t>KES 1,000–1,500</a:t>
             </a:r>
@@ -8703,16 +8538,13 @@
               <a:spcAft>
                 <a:spcPts val="0"/>
               </a:spcAft>
-              <a:defRPr sz="1300" b="1">
-                <a:solidFill>
-                  <a:srgbClr val="1A4C42"/>
-                </a:solidFill>
-                <a:latin typeface="Aptos"/>
-              </a:defRPr>
-            </a:pPr>
-            <a:r>
-              <a:rPr>
-                <a:solidFill/>
+            </a:pPr>
+            <a:r>
+              <a:rPr sz="1300" b="1">
+                <a:solidFill>
+                  <a:srgbClr val="96DD62"/>
+                </a:solidFill>
+                <a:latin typeface="Arial"/>
               </a:rPr>
               <a:t>KES 2,500–4,500</a:t>
             </a:r>
@@ -8748,16 +8580,13 @@
               <a:spcAft>
                 <a:spcPts val="0"/>
               </a:spcAft>
-              <a:defRPr sz="1300" b="1">
-                <a:solidFill>
-                  <a:srgbClr val="1A4C42"/>
-                </a:solidFill>
-                <a:latin typeface="Aptos"/>
-              </a:defRPr>
-            </a:pPr>
-            <a:r>
-              <a:rPr>
-                <a:solidFill/>
+            </a:pPr>
+            <a:r>
+              <a:rPr sz="1300" b="1">
+                <a:solidFill>
+                  <a:srgbClr val="96DD62"/>
+                </a:solidFill>
+                <a:latin typeface="Arial"/>
               </a:rPr>
               <a:t>KES 6,000–9,000</a:t>
             </a:r>
@@ -8965,16 +8794,13 @@
               <a:spcAft>
                 <a:spcPts val="0"/>
               </a:spcAft>
-              <a:defRPr sz="1200" b="0">
-                <a:solidFill>
-                  <a:srgbClr val="172A2B"/>
-                </a:solidFill>
-                <a:latin typeface="Aptos"/>
-              </a:defRPr>
-            </a:pPr>
-            <a:r>
-              <a:rPr>
-                <a:solidFill/>
+            </a:pPr>
+            <a:r>
+              <a:rPr sz="1200" b="0">
+                <a:solidFill>
+                  <a:srgbClr val="F6F7F5"/>
+                </a:solidFill>
+                <a:latin typeface="Arial"/>
               </a:rPr>
               <a:t>Encrypted off-site backup</a:t>
             </a:r>
@@ -9010,16 +8836,13 @@
               <a:spcAft>
                 <a:spcPts val="0"/>
               </a:spcAft>
-              <a:defRPr sz="1300" b="1">
-                <a:solidFill>
-                  <a:srgbClr val="1A4C42"/>
-                </a:solidFill>
-                <a:latin typeface="Aptos"/>
-              </a:defRPr>
-            </a:pPr>
-            <a:r>
-              <a:rPr>
-                <a:solidFill/>
+            </a:pPr>
+            <a:r>
+              <a:rPr sz="1300" b="1">
+                <a:solidFill>
+                  <a:srgbClr val="96DD62"/>
+                </a:solidFill>
+                <a:latin typeface="Arial"/>
               </a:rPr>
               <a:t>KES 0</a:t>
             </a:r>
@@ -9055,16 +8878,13 @@
               <a:spcAft>
                 <a:spcPts val="0"/>
               </a:spcAft>
-              <a:defRPr sz="1300" b="1">
-                <a:solidFill>
-                  <a:srgbClr val="1A4C42"/>
-                </a:solidFill>
-                <a:latin typeface="Aptos"/>
-              </a:defRPr>
-            </a:pPr>
-            <a:r>
-              <a:rPr>
-                <a:solidFill/>
+            </a:pPr>
+            <a:r>
+              <a:rPr sz="1300" b="1">
+                <a:solidFill>
+                  <a:srgbClr val="96DD62"/>
+                </a:solidFill>
+                <a:latin typeface="Arial"/>
               </a:rPr>
               <a:t>KES 650</a:t>
             </a:r>
@@ -9100,16 +8920,13 @@
               <a:spcAft>
                 <a:spcPts val="0"/>
               </a:spcAft>
-              <a:defRPr sz="1300" b="1">
-                <a:solidFill>
-                  <a:srgbClr val="1A4C42"/>
-                </a:solidFill>
-                <a:latin typeface="Aptos"/>
-              </a:defRPr>
-            </a:pPr>
-            <a:r>
-              <a:rPr>
-                <a:solidFill/>
+            </a:pPr>
+            <a:r>
+              <a:rPr sz="1300" b="1">
+                <a:solidFill>
+                  <a:srgbClr val="96DD62"/>
+                </a:solidFill>
+                <a:latin typeface="Arial"/>
               </a:rPr>
               <a:t>KES 1,950</a:t>
             </a:r>
@@ -9188,16 +9005,13 @@
               <a:spcAft>
                 <a:spcPts val="0"/>
               </a:spcAft>
-              <a:defRPr sz="1200" b="1">
-                <a:solidFill>
-                  <a:srgbClr val="FFFFFF"/>
-                </a:solidFill>
-                <a:latin typeface="Aptos"/>
-              </a:defRPr>
-            </a:pPr>
-            <a:r>
-              <a:rPr>
-                <a:solidFill/>
+            </a:pPr>
+            <a:r>
+              <a:rPr sz="1200" b="1">
+                <a:solidFill>
+                  <a:srgbClr val="F6F7F5"/>
+                </a:solidFill>
+                <a:latin typeface="Arial"/>
               </a:rPr>
               <a:t>MONTHLY TOTAL</a:t>
             </a:r>
@@ -9233,16 +9047,13 @@
               <a:spcAft>
                 <a:spcPts val="0"/>
               </a:spcAft>
-              <a:defRPr sz="1400" b="1">
-                <a:solidFill>
-                  <a:srgbClr val="C5EB68"/>
-                </a:solidFill>
-                <a:latin typeface="Aptos"/>
-              </a:defRPr>
-            </a:pPr>
-            <a:r>
-              <a:rPr>
-                <a:solidFill/>
+            </a:pPr>
+            <a:r>
+              <a:rPr sz="1400" b="1">
+                <a:solidFill>
+                  <a:srgbClr val="9AE367"/>
+                </a:solidFill>
+                <a:latin typeface="Arial"/>
               </a:rPr>
               <a:t>KES 1,150–4,350</a:t>
             </a:r>
@@ -9278,16 +9089,13 @@
               <a:spcAft>
                 <a:spcPts val="0"/>
               </a:spcAft>
-              <a:defRPr sz="1400" b="1">
-                <a:solidFill>
-                  <a:srgbClr val="C5EB68"/>
-                </a:solidFill>
-                <a:latin typeface="Aptos"/>
-              </a:defRPr>
-            </a:pPr>
-            <a:r>
-              <a:rPr>
-                <a:solidFill/>
+            </a:pPr>
+            <a:r>
+              <a:rPr sz="1400" b="1">
+                <a:solidFill>
+                  <a:srgbClr val="9AE367"/>
+                </a:solidFill>
+                <a:latin typeface="Arial"/>
               </a:rPr>
               <a:t>KES 9,300–11,300</a:t>
             </a:r>
@@ -9323,16 +9131,13 @@
               <a:spcAft>
                 <a:spcPts val="0"/>
               </a:spcAft>
-              <a:defRPr sz="1400" b="1">
-                <a:solidFill>
-                  <a:srgbClr val="C5EB68"/>
-                </a:solidFill>
-                <a:latin typeface="Aptos"/>
-              </a:defRPr>
-            </a:pPr>
-            <a:r>
-              <a:rPr>
-                <a:solidFill/>
+            </a:pPr>
+            <a:r>
+              <a:rPr sz="1400" b="1">
+                <a:solidFill>
+                  <a:srgbClr val="9AE367"/>
+                </a:solidFill>
+                <a:latin typeface="Arial"/>
               </a:rPr>
               <a:t>KES 24,700–37,450</a:t>
             </a:r>
@@ -9368,16 +9173,13 @@
               <a:spcAft>
                 <a:spcPts val="0"/>
               </a:spcAft>
-              <a:defRPr sz="1100" b="0">
-                <a:solidFill>
-                  <a:srgbClr val="667978"/>
-                </a:solidFill>
-                <a:latin typeface="Aptos"/>
-              </a:defRPr>
-            </a:pPr>
-            <a:r>
-              <a:rPr>
-                <a:solidFill/>
+            </a:pPr>
+            <a:r>
+              <a:rPr sz="1100" b="0">
+                <a:solidFill>
+                  <a:srgbClr val="B7C1B3"/>
+                </a:solidFill>
+                <a:latin typeface="Arial"/>
               </a:rPr>
               <a:t>Totals are sums of the listed ranges; Tier 3 upper bound corrected from KES 38,450 to KES 37,450.</a:t>
             </a:r>
@@ -9544,16 +9346,13 @@
               <a:spcAft>
                 <a:spcPts val="0"/>
               </a:spcAft>
-              <a:defRPr sz="1200" b="1">
-                <a:solidFill>
-                  <a:srgbClr val="133B36"/>
-                </a:solidFill>
-                <a:latin typeface="Aptos"/>
-              </a:defRPr>
-            </a:pPr>
-            <a:r>
-              <a:rPr>
-                <a:solidFill/>
+            </a:pPr>
+            <a:r>
+              <a:rPr sz="1200" b="1">
+                <a:solidFill>
+                  <a:srgbClr val="9DDD71"/>
+                </a:solidFill>
+                <a:latin typeface="Arial"/>
               </a:rPr>
               <a:t>SHILATECH  /  AUTO SPARES</a:t>
             </a:r>
@@ -9589,16 +9388,13 @@
               <a:spcAft>
                 <a:spcPts val="0"/>
               </a:spcAft>
-              <a:defRPr sz="900" b="1">
-                <a:solidFill>
-                  <a:srgbClr val="1A4C42"/>
-                </a:solidFill>
-                <a:latin typeface="Aptos"/>
-              </a:defRPr>
-            </a:pPr>
-            <a:r>
-              <a:rPr>
-                <a:solidFill/>
+            </a:pPr>
+            <a:r>
+              <a:rPr sz="900" b="1">
+                <a:solidFill>
+                  <a:srgbClr val="96DD62"/>
+                </a:solidFill>
+                <a:latin typeface="Arial"/>
               </a:rPr>
               <a:t>ONLINE COST  /  02</a:t>
             </a:r>
@@ -9720,16 +9516,13 @@
               <a:spcAft>
                 <a:spcPts val="0"/>
               </a:spcAft>
-              <a:defRPr sz="900" b="0">
-                <a:solidFill>
-                  <a:srgbClr val="667978"/>
-                </a:solidFill>
-                <a:latin typeface="Aptos"/>
-              </a:defRPr>
-            </a:pPr>
-            <a:r>
-              <a:rPr>
-                <a:solidFill/>
+            </a:pPr>
+            <a:r>
+              <a:rPr sz="900" b="0">
+                <a:solidFill>
+                  <a:srgbClr val="B7C1B3"/>
+                </a:solidFill>
+                <a:latin typeface="Arial"/>
               </a:rPr>
               <a:t>CORPORATE PLATFORM OVERVIEW  •  OCT 2026</a:t>
             </a:r>
@@ -9765,16 +9558,13 @@
               <a:spcAft>
                 <a:spcPts val="0"/>
               </a:spcAft>
-              <a:defRPr sz="900" b="1">
-                <a:solidFill>
-                  <a:srgbClr val="133B36"/>
-                </a:solidFill>
-                <a:latin typeface="Aptos"/>
-              </a:defRPr>
-            </a:pPr>
-            <a:r>
-              <a:rPr>
-                <a:solidFill/>
+            </a:pPr>
+            <a:r>
+              <a:rPr sz="900" b="1">
+                <a:solidFill>
+                  <a:srgbClr val="9DDD71"/>
+                </a:solidFill>
+                <a:latin typeface="Arial"/>
               </a:rPr>
               <a:t>12 / 13</a:t>
             </a:r>
@@ -9810,16 +9600,13 @@
               <a:spcAft>
                 <a:spcPts val="0"/>
               </a:spcAft>
-              <a:defRPr sz="900" b="1">
-                <a:solidFill>
-                  <a:srgbClr val="1A4C42"/>
-                </a:solidFill>
-                <a:latin typeface="Aptos"/>
-              </a:defRPr>
-            </a:pPr>
-            <a:r>
-              <a:rPr>
-                <a:solidFill/>
+            </a:pPr>
+            <a:r>
+              <a:rPr sz="900" b="1">
+                <a:solidFill>
+                  <a:srgbClr val="96DD62"/>
+                </a:solidFill>
+                <a:latin typeface="Arial"/>
               </a:rPr>
               <a:t>YEARLY COMPONENTS</a:t>
             </a:r>
@@ -9855,16 +9642,13 @@
               <a:spcAft>
                 <a:spcPts val="0"/>
               </a:spcAft>
-              <a:defRPr sz="2900" b="1">
-                <a:solidFill>
-                  <a:srgbClr val="172A2B"/>
-                </a:solidFill>
-                <a:latin typeface="Aptos"/>
-              </a:defRPr>
-            </a:pPr>
-            <a:r>
-              <a:rPr>
-                <a:solidFill/>
+            </a:pPr>
+            <a:r>
+              <a:rPr sz="2900" b="1">
+                <a:solidFill>
+                  <a:srgbClr val="F6F7F5"/>
+                </a:solidFill>
+                <a:latin typeface="Arial"/>
               </a:rPr>
               <a:t>The annual cost, item by item</a:t>
             </a:r>
@@ -9900,16 +9684,13 @@
               <a:spcAft>
                 <a:spcPts val="0"/>
               </a:spcAft>
-              <a:defRPr sz="1300" b="0">
-                <a:solidFill>
-                  <a:srgbClr val="667978"/>
-                </a:solidFill>
-                <a:latin typeface="Aptos"/>
-              </a:defRPr>
-            </a:pPr>
-            <a:r>
-              <a:rPr>
-                <a:solidFill/>
+            </a:pPr>
+            <a:r>
+              <a:rPr sz="1300" b="0">
+                <a:solidFill>
+                  <a:srgbClr val="B7C1B3"/>
+                </a:solidFill>
+                <a:latin typeface="Arial"/>
               </a:rPr>
               <a:t>Annualised from the monthly planning ranges: 12 × each listed component, in KES.</a:t>
             </a:r>
@@ -10031,16 +9812,13 @@
               <a:spcAft>
                 <a:spcPts val="0"/>
               </a:spcAft>
-              <a:defRPr sz="1000" b="1">
-                <a:solidFill>
-                  <a:srgbClr val="FFFFFF"/>
-                </a:solidFill>
-                <a:latin typeface="Aptos"/>
-              </a:defRPr>
-            </a:pPr>
-            <a:r>
-              <a:rPr>
-                <a:solidFill/>
+            </a:pPr>
+            <a:r>
+              <a:rPr sz="1000" b="1">
+                <a:solidFill>
+                  <a:srgbClr val="F6F7F5"/>
+                </a:solidFill>
+                <a:latin typeface="Arial"/>
               </a:rPr>
               <a:t>COST ITEM</a:t>
             </a:r>
@@ -10119,16 +9897,13 @@
               <a:spcAft>
                 <a:spcPts val="0"/>
               </a:spcAft>
-              <a:defRPr sz="1000" b="1">
-                <a:solidFill>
-                  <a:srgbClr val="FFFFFF"/>
-                </a:solidFill>
-                <a:latin typeface="Aptos"/>
-              </a:defRPr>
-            </a:pPr>
-            <a:r>
-              <a:rPr>
-                <a:solidFill/>
+            </a:pPr>
+            <a:r>
+              <a:rPr sz="1000" b="1">
+                <a:solidFill>
+                  <a:srgbClr val="F6F7F5"/>
+                </a:solidFill>
+                <a:latin typeface="Arial"/>
               </a:rPr>
               <a:t>TIER 1  /  PILOT</a:t>
             </a:r>
@@ -10207,16 +9982,13 @@
               <a:spcAft>
                 <a:spcPts val="0"/>
               </a:spcAft>
-              <a:defRPr sz="1000" b="1">
-                <a:solidFill>
-                  <a:srgbClr val="C5EB68"/>
-                </a:solidFill>
-                <a:latin typeface="Aptos"/>
-              </a:defRPr>
-            </a:pPr>
-            <a:r>
-              <a:rPr>
-                <a:solidFill/>
+            </a:pPr>
+            <a:r>
+              <a:rPr sz="1000" b="1">
+                <a:solidFill>
+                  <a:srgbClr val="9AE367"/>
+                </a:solidFill>
+                <a:latin typeface="Arial"/>
               </a:rPr>
               <a:t>TIER 2  /  RECOMMENDED</a:t>
             </a:r>
@@ -10295,16 +10067,13 @@
               <a:spcAft>
                 <a:spcPts val="0"/>
               </a:spcAft>
-              <a:defRPr sz="1000" b="1">
-                <a:solidFill>
-                  <a:srgbClr val="FFFFFF"/>
-                </a:solidFill>
-                <a:latin typeface="Aptos"/>
-              </a:defRPr>
-            </a:pPr>
-            <a:r>
-              <a:rPr>
-                <a:solidFill/>
+            </a:pPr>
+            <a:r>
+              <a:rPr sz="1000" b="1">
+                <a:solidFill>
+                  <a:srgbClr val="F6F7F5"/>
+                </a:solidFill>
+                <a:latin typeface="Arial"/>
               </a:rPr>
               <a:t>TIER 3  /  VOLUME</a:t>
             </a:r>
@@ -10512,16 +10281,13 @@
               <a:spcAft>
                 <a:spcPts val="0"/>
               </a:spcAft>
-              <a:defRPr sz="1200" b="0">
-                <a:solidFill>
-                  <a:srgbClr val="172A2B"/>
-                </a:solidFill>
-                <a:latin typeface="Aptos"/>
-              </a:defRPr>
-            </a:pPr>
-            <a:r>
-              <a:rPr>
-                <a:solidFill/>
+            </a:pPr>
+            <a:r>
+              <a:rPr sz="1200" b="0">
+                <a:solidFill>
+                  <a:srgbClr val="F6F7F5"/>
+                </a:solidFill>
+                <a:latin typeface="Arial"/>
               </a:rPr>
               <a:t>Domain + SSL</a:t>
             </a:r>
@@ -10557,16 +10323,13 @@
               <a:spcAft>
                 <a:spcPts val="0"/>
               </a:spcAft>
-              <a:defRPr sz="1200" b="1">
-                <a:solidFill>
-                  <a:srgbClr val="1A4C42"/>
-                </a:solidFill>
-                <a:latin typeface="Aptos"/>
-              </a:defRPr>
-            </a:pPr>
-            <a:r>
-              <a:rPr>
-                <a:solidFill/>
+            </a:pPr>
+            <a:r>
+              <a:rPr sz="1200" b="1">
+                <a:solidFill>
+                  <a:srgbClr val="96DD62"/>
+                </a:solidFill>
+                <a:latin typeface="Arial"/>
               </a:rPr>
               <a:t>KES 1,800–3,000</a:t>
             </a:r>
@@ -10602,16 +10365,13 @@
               <a:spcAft>
                 <a:spcPts val="0"/>
               </a:spcAft>
-              <a:defRPr sz="1200" b="1">
-                <a:solidFill>
-                  <a:srgbClr val="1A4C42"/>
-                </a:solidFill>
-                <a:latin typeface="Aptos"/>
-              </a:defRPr>
-            </a:pPr>
-            <a:r>
-              <a:rPr>
-                <a:solidFill/>
+            </a:pPr>
+            <a:r>
+              <a:rPr sz="1200" b="1">
+                <a:solidFill>
+                  <a:srgbClr val="96DD62"/>
+                </a:solidFill>
+                <a:latin typeface="Arial"/>
               </a:rPr>
               <a:t>KES 3,600</a:t>
             </a:r>
@@ -10647,16 +10407,13 @@
               <a:spcAft>
                 <a:spcPts val="0"/>
               </a:spcAft>
-              <a:defRPr sz="1200" b="1">
-                <a:solidFill>
-                  <a:srgbClr val="1A4C42"/>
-                </a:solidFill>
-                <a:latin typeface="Aptos"/>
-              </a:defRPr>
-            </a:pPr>
-            <a:r>
-              <a:rPr>
-                <a:solidFill/>
+            </a:pPr>
+            <a:r>
+              <a:rPr sz="1200" b="1">
+                <a:solidFill>
+                  <a:srgbClr val="96DD62"/>
+                </a:solidFill>
+                <a:latin typeface="Arial"/>
               </a:rPr>
               <a:t>KES 6,000</a:t>
             </a:r>
@@ -10864,16 +10621,13 @@
               <a:spcAft>
                 <a:spcPts val="0"/>
               </a:spcAft>
-              <a:defRPr sz="1200" b="0">
-                <a:solidFill>
-                  <a:srgbClr val="172A2B"/>
-                </a:solidFill>
-                <a:latin typeface="Aptos"/>
-              </a:defRPr>
-            </a:pPr>
-            <a:r>
-              <a:rPr>
-                <a:solidFill/>
+            </a:pPr>
+            <a:r>
+              <a:rPr sz="1200" b="0">
+                <a:solidFill>
+                  <a:srgbClr val="F6F7F5"/>
+                </a:solidFill>
+                <a:latin typeface="Arial"/>
               </a:rPr>
               <a:t>Web app hosting</a:t>
             </a:r>
@@ -10909,16 +10663,13 @@
               <a:spcAft>
                 <a:spcPts val="0"/>
               </a:spcAft>
-              <a:defRPr sz="1200" b="1">
-                <a:solidFill>
-                  <a:srgbClr val="1A4C42"/>
-                </a:solidFill>
-                <a:latin typeface="Aptos"/>
-              </a:defRPr>
-            </a:pPr>
-            <a:r>
-              <a:rPr>
-                <a:solidFill/>
+            </a:pPr>
+            <a:r>
+              <a:rPr sz="1200" b="1">
+                <a:solidFill>
+                  <a:srgbClr val="96DD62"/>
+                </a:solidFill>
+                <a:latin typeface="Arial"/>
               </a:rPr>
               <a:t>KES 0–7,800</a:t>
             </a:r>
@@ -10954,16 +10705,13 @@
               <a:spcAft>
                 <a:spcPts val="0"/>
               </a:spcAft>
-              <a:defRPr sz="1200" b="1">
-                <a:solidFill>
-                  <a:srgbClr val="1A4C42"/>
-                </a:solidFill>
-                <a:latin typeface="Aptos"/>
-              </a:defRPr>
-            </a:pPr>
-            <a:r>
-              <a:rPr>
-                <a:solidFill/>
+            </a:pPr>
+            <a:r>
+              <a:rPr sz="1200" b="1">
+                <a:solidFill>
+                  <a:srgbClr val="96DD62"/>
+                </a:solidFill>
+                <a:latin typeface="Arial"/>
               </a:rPr>
               <a:t>KES 31,200</a:t>
             </a:r>
@@ -10999,16 +10747,13 @@
               <a:spcAft>
                 <a:spcPts val="0"/>
               </a:spcAft>
-              <a:defRPr sz="1200" b="1">
-                <a:solidFill>
-                  <a:srgbClr val="1A4C42"/>
-                </a:solidFill>
-                <a:latin typeface="Aptos"/>
-              </a:defRPr>
-            </a:pPr>
-            <a:r>
-              <a:rPr>
-                <a:solidFill/>
+            </a:pPr>
+            <a:r>
+              <a:rPr sz="1200" b="1">
+                <a:solidFill>
+                  <a:srgbClr val="96DD62"/>
+                </a:solidFill>
+                <a:latin typeface="Arial"/>
               </a:rPr>
               <a:t>KES 78,000–132,000</a:t>
             </a:r>
@@ -11216,16 +10961,13 @@
               <a:spcAft>
                 <a:spcPts val="0"/>
               </a:spcAft>
-              <a:defRPr sz="1200" b="0">
-                <a:solidFill>
-                  <a:srgbClr val="172A2B"/>
-                </a:solidFill>
-                <a:latin typeface="Aptos"/>
-              </a:defRPr>
-            </a:pPr>
-            <a:r>
-              <a:rPr>
-                <a:solidFill/>
+            </a:pPr>
+            <a:r>
+              <a:rPr sz="1200" b="0">
+                <a:solidFill>
+                  <a:srgbClr val="F6F7F5"/>
+                </a:solidFill>
+                <a:latin typeface="Arial"/>
               </a:rPr>
               <a:t>Managed PostgreSQL</a:t>
             </a:r>
@@ -11261,16 +11003,13 @@
               <a:spcAft>
                 <a:spcPts val="0"/>
               </a:spcAft>
-              <a:defRPr sz="1200" b="1">
-                <a:solidFill>
-                  <a:srgbClr val="1A4C42"/>
-                </a:solidFill>
-                <a:latin typeface="Aptos"/>
-              </a:defRPr>
-            </a:pPr>
-            <a:r>
-              <a:rPr>
-                <a:solidFill/>
+            </a:pPr>
+            <a:r>
+              <a:rPr sz="1200" b="1">
+                <a:solidFill>
+                  <a:srgbClr val="96DD62"/>
+                </a:solidFill>
+                <a:latin typeface="Arial"/>
               </a:rPr>
               <a:t>KES 0–23,400</a:t>
             </a:r>
@@ -11306,16 +11045,13 @@
               <a:spcAft>
                 <a:spcPts val="0"/>
               </a:spcAft>
-              <a:defRPr sz="1200" b="1">
-                <a:solidFill>
-                  <a:srgbClr val="1A4C42"/>
-                </a:solidFill>
-                <a:latin typeface="Aptos"/>
-              </a:defRPr>
-            </a:pPr>
-            <a:r>
-              <a:rPr>
-                <a:solidFill/>
+            </a:pPr>
+            <a:r>
+              <a:rPr sz="1200" b="1">
+                <a:solidFill>
+                  <a:srgbClr val="96DD62"/>
+                </a:solidFill>
+                <a:latin typeface="Arial"/>
               </a:rPr>
               <a:t>KES 39,000</a:t>
             </a:r>
@@ -11351,16 +11087,13 @@
               <a:spcAft>
                 <a:spcPts val="0"/>
               </a:spcAft>
-              <a:defRPr sz="1200" b="1">
-                <a:solidFill>
-                  <a:srgbClr val="1A4C42"/>
-                </a:solidFill>
-                <a:latin typeface="Aptos"/>
-              </a:defRPr>
-            </a:pPr>
-            <a:r>
-              <a:rPr>
-                <a:solidFill/>
+            </a:pPr>
+            <a:r>
+              <a:rPr sz="1200" b="1">
+                <a:solidFill>
+                  <a:srgbClr val="96DD62"/>
+                </a:solidFill>
+                <a:latin typeface="Arial"/>
               </a:rPr>
               <a:t>KES 117,000–180,000</a:t>
             </a:r>
@@ -11568,16 +11301,13 @@
               <a:spcAft>
                 <a:spcPts val="0"/>
               </a:spcAft>
-              <a:defRPr sz="1200" b="0">
-                <a:solidFill>
-                  <a:srgbClr val="172A2B"/>
-                </a:solidFill>
-                <a:latin typeface="Aptos"/>
-              </a:defRPr>
-            </a:pPr>
-            <a:r>
-              <a:rPr>
-                <a:solidFill/>
+            </a:pPr>
+            <a:r>
+              <a:rPr sz="1200" b="0">
+                <a:solidFill>
+                  <a:srgbClr val="F6F7F5"/>
+                </a:solidFill>
+                <a:latin typeface="Arial"/>
               </a:rPr>
               <a:t>Staff email + alerts</a:t>
             </a:r>
@@ -11613,16 +11343,13 @@
               <a:spcAft>
                 <a:spcPts val="0"/>
               </a:spcAft>
-              <a:defRPr sz="1200" b="1">
-                <a:solidFill>
-                  <a:srgbClr val="1A4C42"/>
-                </a:solidFill>
-                <a:latin typeface="Aptos"/>
-              </a:defRPr>
-            </a:pPr>
-            <a:r>
-              <a:rPr>
-                <a:solidFill/>
+            </a:pPr>
+            <a:r>
+              <a:rPr sz="1200" b="1">
+                <a:solidFill>
+                  <a:srgbClr val="96DD62"/>
+                </a:solidFill>
+                <a:latin typeface="Arial"/>
               </a:rPr>
               <a:t>KES 12,000–18,000</a:t>
             </a:r>
@@ -11658,16 +11385,13 @@
               <a:spcAft>
                 <a:spcPts val="0"/>
               </a:spcAft>
-              <a:defRPr sz="1200" b="1">
-                <a:solidFill>
-                  <a:srgbClr val="1A4C42"/>
-                </a:solidFill>
-                <a:latin typeface="Aptos"/>
-              </a:defRPr>
-            </a:pPr>
-            <a:r>
-              <a:rPr>
-                <a:solidFill/>
+            </a:pPr>
+            <a:r>
+              <a:rPr sz="1200" b="1">
+                <a:solidFill>
+                  <a:srgbClr val="96DD62"/>
+                </a:solidFill>
+                <a:latin typeface="Arial"/>
               </a:rPr>
               <a:t>KES 30,000–54,000</a:t>
             </a:r>
@@ -11703,16 +11427,13 @@
               <a:spcAft>
                 <a:spcPts val="0"/>
               </a:spcAft>
-              <a:defRPr sz="1200" b="1">
-                <a:solidFill>
-                  <a:srgbClr val="1A4C42"/>
-                </a:solidFill>
-                <a:latin typeface="Aptos"/>
-              </a:defRPr>
-            </a:pPr>
-            <a:r>
-              <a:rPr>
-                <a:solidFill/>
+            </a:pPr>
+            <a:r>
+              <a:rPr sz="1200" b="1">
+                <a:solidFill>
+                  <a:srgbClr val="96DD62"/>
+                </a:solidFill>
+                <a:latin typeface="Arial"/>
               </a:rPr>
               <a:t>KES 72,000–108,000</a:t>
             </a:r>
@@ -11920,16 +11641,13 @@
               <a:spcAft>
                 <a:spcPts val="0"/>
               </a:spcAft>
-              <a:defRPr sz="1200" b="0">
-                <a:solidFill>
-                  <a:srgbClr val="172A2B"/>
-                </a:solidFill>
-                <a:latin typeface="Aptos"/>
-              </a:defRPr>
-            </a:pPr>
-            <a:r>
-              <a:rPr>
-                <a:solidFill/>
+            </a:pPr>
+            <a:r>
+              <a:rPr sz="1200" b="0">
+                <a:solidFill>
+                  <a:srgbClr val="F6F7F5"/>
+                </a:solidFill>
+                <a:latin typeface="Arial"/>
               </a:rPr>
               <a:t>Encrypted off-site backup</a:t>
             </a:r>
@@ -11965,16 +11683,13 @@
               <a:spcAft>
                 <a:spcPts val="0"/>
               </a:spcAft>
-              <a:defRPr sz="1200" b="1">
-                <a:solidFill>
-                  <a:srgbClr val="1A4C42"/>
-                </a:solidFill>
-                <a:latin typeface="Aptos"/>
-              </a:defRPr>
-            </a:pPr>
-            <a:r>
-              <a:rPr>
-                <a:solidFill/>
+            </a:pPr>
+            <a:r>
+              <a:rPr sz="1200" b="1">
+                <a:solidFill>
+                  <a:srgbClr val="96DD62"/>
+                </a:solidFill>
+                <a:latin typeface="Arial"/>
               </a:rPr>
               <a:t>KES 0</a:t>
             </a:r>
@@ -12010,16 +11725,13 @@
               <a:spcAft>
                 <a:spcPts val="0"/>
               </a:spcAft>
-              <a:defRPr sz="1200" b="1">
-                <a:solidFill>
-                  <a:srgbClr val="1A4C42"/>
-                </a:solidFill>
-                <a:latin typeface="Aptos"/>
-              </a:defRPr>
-            </a:pPr>
-            <a:r>
-              <a:rPr>
-                <a:solidFill/>
+            </a:pPr>
+            <a:r>
+              <a:rPr sz="1200" b="1">
+                <a:solidFill>
+                  <a:srgbClr val="96DD62"/>
+                </a:solidFill>
+                <a:latin typeface="Arial"/>
               </a:rPr>
               <a:t>KES 7,800</a:t>
             </a:r>
@@ -12055,16 +11767,13 @@
               <a:spcAft>
                 <a:spcPts val="0"/>
               </a:spcAft>
-              <a:defRPr sz="1200" b="1">
-                <a:solidFill>
-                  <a:srgbClr val="1A4C42"/>
-                </a:solidFill>
-                <a:latin typeface="Aptos"/>
-              </a:defRPr>
-            </a:pPr>
-            <a:r>
-              <a:rPr>
-                <a:solidFill/>
+            </a:pPr>
+            <a:r>
+              <a:rPr sz="1200" b="1">
+                <a:solidFill>
+                  <a:srgbClr val="96DD62"/>
+                </a:solidFill>
+                <a:latin typeface="Arial"/>
               </a:rPr>
               <a:t>KES 23,400</a:t>
             </a:r>
@@ -12143,16 +11852,13 @@
               <a:spcAft>
                 <a:spcPts val="0"/>
               </a:spcAft>
-              <a:defRPr sz="1200" b="1">
-                <a:solidFill>
-                  <a:srgbClr val="FFFFFF"/>
-                </a:solidFill>
-                <a:latin typeface="Aptos"/>
-              </a:defRPr>
-            </a:pPr>
-            <a:r>
-              <a:rPr>
-                <a:solidFill/>
+            </a:pPr>
+            <a:r>
+              <a:rPr sz="1200" b="1">
+                <a:solidFill>
+                  <a:srgbClr val="F6F7F5"/>
+                </a:solidFill>
+                <a:latin typeface="Arial"/>
               </a:rPr>
               <a:t>YEARLY TOTAL</a:t>
             </a:r>
@@ -12188,16 +11894,13 @@
               <a:spcAft>
                 <a:spcPts val="0"/>
               </a:spcAft>
-              <a:defRPr sz="1300" b="1">
-                <a:solidFill>
-                  <a:srgbClr val="C5EB68"/>
-                </a:solidFill>
-                <a:latin typeface="Aptos"/>
-              </a:defRPr>
-            </a:pPr>
-            <a:r>
-              <a:rPr>
-                <a:solidFill/>
+            </a:pPr>
+            <a:r>
+              <a:rPr sz="1300" b="1">
+                <a:solidFill>
+                  <a:srgbClr val="9AE367"/>
+                </a:solidFill>
+                <a:latin typeface="Arial"/>
               </a:rPr>
               <a:t>KES 13,800–52,200</a:t>
             </a:r>
@@ -12233,16 +11936,13 @@
               <a:spcAft>
                 <a:spcPts val="0"/>
               </a:spcAft>
-              <a:defRPr sz="1300" b="1">
-                <a:solidFill>
-                  <a:srgbClr val="C5EB68"/>
-                </a:solidFill>
-                <a:latin typeface="Aptos"/>
-              </a:defRPr>
-            </a:pPr>
-            <a:r>
-              <a:rPr>
-                <a:solidFill/>
+            </a:pPr>
+            <a:r>
+              <a:rPr sz="1300" b="1">
+                <a:solidFill>
+                  <a:srgbClr val="9AE367"/>
+                </a:solidFill>
+                <a:latin typeface="Arial"/>
               </a:rPr>
               <a:t>KES 111,600–135,600</a:t>
             </a:r>
@@ -12278,16 +11978,13 @@
               <a:spcAft>
                 <a:spcPts val="0"/>
               </a:spcAft>
-              <a:defRPr sz="1300" b="1">
-                <a:solidFill>
-                  <a:srgbClr val="C5EB68"/>
-                </a:solidFill>
-                <a:latin typeface="Aptos"/>
-              </a:defRPr>
-            </a:pPr>
-            <a:r>
-              <a:rPr>
-                <a:solidFill/>
+            </a:pPr>
+            <a:r>
+              <a:rPr sz="1300" b="1">
+                <a:solidFill>
+                  <a:srgbClr val="9AE367"/>
+                </a:solidFill>
+                <a:latin typeface="Arial"/>
               </a:rPr>
               <a:t>KES 296,400–449,400</a:t>
             </a:r>
@@ -12323,16 +12020,13 @@
               <a:spcAft>
                 <a:spcPts val="0"/>
               </a:spcAft>
-              <a:defRPr sz="1100" b="0">
-                <a:solidFill>
-                  <a:srgbClr val="667978"/>
-                </a:solidFill>
-                <a:latin typeface="Aptos"/>
-              </a:defRPr>
-            </a:pPr>
-            <a:r>
-              <a:rPr>
-                <a:solidFill/>
+            </a:pPr>
+            <a:r>
+              <a:rPr sz="1100" b="0">
+                <a:solidFill>
+                  <a:srgbClr val="B7C1B3"/>
+                </a:solidFill>
+                <a:latin typeface="Arial"/>
               </a:rPr>
               <a:t>Yearly totals use 12 months of service; Tier 3 upper bound follows the corrected monthly sum.</a:t>
             </a:r>
@@ -12499,16 +12193,13 @@
               <a:spcAft>
                 <a:spcPts val="0"/>
               </a:spcAft>
-              <a:defRPr sz="1200" b="1">
-                <a:solidFill>
-                  <a:srgbClr val="FFFFFF"/>
-                </a:solidFill>
-                <a:latin typeface="Aptos"/>
-              </a:defRPr>
-            </a:pPr>
-            <a:r>
-              <a:rPr>
-                <a:solidFill/>
+            </a:pPr>
+            <a:r>
+              <a:rPr sz="1200" b="1">
+                <a:solidFill>
+                  <a:srgbClr val="F6F7F5"/>
+                </a:solidFill>
+                <a:latin typeface="Arial"/>
               </a:rPr>
               <a:t>SHILATECH  /  AUTO SPARES</a:t>
             </a:r>
@@ -12544,16 +12235,13 @@
               <a:spcAft>
                 <a:spcPts val="0"/>
               </a:spcAft>
-              <a:defRPr sz="900" b="1">
-                <a:solidFill>
-                  <a:srgbClr val="C5EB68"/>
-                </a:solidFill>
-                <a:latin typeface="Aptos"/>
-              </a:defRPr>
-            </a:pPr>
-            <a:r>
-              <a:rPr>
-                <a:solidFill/>
+            </a:pPr>
+            <a:r>
+              <a:rPr sz="900" b="1">
+                <a:solidFill>
+                  <a:srgbClr val="9AE367"/>
+                </a:solidFill>
+                <a:latin typeface="Arial"/>
               </a:rPr>
               <a:t>ONLINE COST  /  03</a:t>
             </a:r>
@@ -12675,16 +12363,13 @@
               <a:spcAft>
                 <a:spcPts val="0"/>
               </a:spcAft>
-              <a:defRPr sz="900" b="0">
-                <a:solidFill>
-                  <a:srgbClr val="8FA39C"/>
-                </a:solidFill>
-                <a:latin typeface="Aptos"/>
-              </a:defRPr>
-            </a:pPr>
-            <a:r>
-              <a:rPr>
-                <a:solidFill/>
+            </a:pPr>
+            <a:r>
+              <a:rPr sz="900" b="0">
+                <a:solidFill>
+                  <a:srgbClr val="A6B5A7"/>
+                </a:solidFill>
+                <a:latin typeface="Arial"/>
               </a:rPr>
               <a:t>CORPORATE PLATFORM OVERVIEW  •  OCT 2026</a:t>
             </a:r>
@@ -12720,16 +12405,13 @@
               <a:spcAft>
                 <a:spcPts val="0"/>
               </a:spcAft>
-              <a:defRPr sz="900" b="1">
-                <a:solidFill>
-                  <a:srgbClr val="C5EB68"/>
-                </a:solidFill>
-                <a:latin typeface="Aptos"/>
-              </a:defRPr>
-            </a:pPr>
-            <a:r>
-              <a:rPr>
-                <a:solidFill/>
+            </a:pPr>
+            <a:r>
+              <a:rPr sz="900" b="1">
+                <a:solidFill>
+                  <a:srgbClr val="9AE367"/>
+                </a:solidFill>
+                <a:latin typeface="Arial"/>
               </a:rPr>
               <a:t>13 / 13</a:t>
             </a:r>
@@ -12765,16 +12447,13 @@
               <a:spcAft>
                 <a:spcPts val="0"/>
               </a:spcAft>
-              <a:defRPr sz="900" b="1">
-                <a:solidFill>
-                  <a:srgbClr val="C5EB68"/>
-                </a:solidFill>
-                <a:latin typeface="Aptos"/>
-              </a:defRPr>
-            </a:pPr>
-            <a:r>
-              <a:rPr>
-                <a:solidFill/>
+            </a:pPr>
+            <a:r>
+              <a:rPr sz="900" b="1">
+                <a:solidFill>
+                  <a:srgbClr val="9AE367"/>
+                </a:solidFill>
+                <a:latin typeface="Arial"/>
               </a:rPr>
               <a:t>THE RECOMMENDATION</a:t>
             </a:r>
@@ -12810,16 +12489,13 @@
               <a:spcAft>
                 <a:spcPts val="0"/>
               </a:spcAft>
-              <a:defRPr sz="3600" b="1">
-                <a:solidFill>
-                  <a:srgbClr val="FFFFFF"/>
-                </a:solidFill>
-                <a:latin typeface="Aptos"/>
-              </a:defRPr>
-            </a:pPr>
-            <a:r>
-              <a:rPr>
-                <a:solidFill/>
+            </a:pPr>
+            <a:r>
+              <a:rPr sz="3600" b="1">
+                <a:solidFill>
+                  <a:srgbClr val="F6F7F5"/>
+                </a:solidFill>
+                <a:latin typeface="Arial"/>
               </a:rPr>
               <a:t>Approve the corporate</a:t>
             </a:r>
@@ -12829,16 +12505,13 @@
               <a:spcAft>
                 <a:spcPts val="0"/>
               </a:spcAft>
-              <a:defRPr sz="3600" b="1">
-                <a:solidFill>
-                  <a:srgbClr val="FFFFFF"/>
-                </a:solidFill>
-                <a:latin typeface="Aptos"/>
-              </a:defRPr>
-            </a:pPr>
-            <a:r>
-              <a:rPr>
-                <a:solidFill/>
+            </a:pPr>
+            <a:r>
+              <a:rPr sz="3600" b="1">
+                <a:solidFill>
+                  <a:srgbClr val="F6F7F5"/>
+                </a:solidFill>
+                <a:latin typeface="Arial"/>
               </a:rPr>
               <a:t>production budget.</a:t>
             </a:r>
@@ -12921,16 +12594,13 @@
               <a:spcAft>
                 <a:spcPts val="0"/>
               </a:spcAft>
-              <a:defRPr sz="3000" b="1">
-                <a:solidFill>
-                  <a:srgbClr val="C5EB68"/>
-                </a:solidFill>
-                <a:latin typeface="Aptos"/>
-              </a:defRPr>
-            </a:pPr>
-            <a:r>
-              <a:rPr>
-                <a:solidFill/>
+            </a:pPr>
+            <a:r>
+              <a:rPr sz="3000" b="1">
+                <a:solidFill>
+                  <a:srgbClr val="9AE367"/>
+                </a:solidFill>
+                <a:latin typeface="Arial"/>
               </a:rPr>
               <a:t>KES 9,300–11,300</a:t>
             </a:r>
@@ -12966,16 +12636,13 @@
               <a:spcAft>
                 <a:spcPts val="0"/>
               </a:spcAft>
-              <a:defRPr sz="1400" b="0">
-                <a:solidFill>
-                  <a:srgbClr val="FFFFFF"/>
-                </a:solidFill>
-                <a:latin typeface="Aptos"/>
-              </a:defRPr>
-            </a:pPr>
-            <a:r>
-              <a:rPr>
-                <a:solidFill/>
+            </a:pPr>
+            <a:r>
+              <a:rPr sz="1400" b="0">
+                <a:solidFill>
+                  <a:srgbClr val="F6F7F5"/>
+                </a:solidFill>
+                <a:latin typeface="Arial"/>
               </a:rPr>
               <a:t>per month  /  ~KES 112k–136k per year</a:t>
             </a:r>
@@ -13058,16 +12725,13 @@
               <a:spcAft>
                 <a:spcPts val="0"/>
               </a:spcAft>
-              <a:defRPr sz="900" b="1">
-                <a:solidFill>
-                  <a:srgbClr val="C5EB68"/>
-                </a:solidFill>
-                <a:latin typeface="Aptos"/>
-              </a:defRPr>
-            </a:pPr>
-            <a:r>
-              <a:rPr>
-                <a:solidFill/>
+            </a:pPr>
+            <a:r>
+              <a:rPr sz="900" b="1">
+                <a:solidFill>
+                  <a:srgbClr val="9AE367"/>
+                </a:solidFill>
+                <a:latin typeface="Arial"/>
               </a:rPr>
               <a:t>NO PLATFORM LICENCE</a:t>
             </a:r>
@@ -13103,16 +12767,13 @@
               <a:spcAft>
                 <a:spcPts val="0"/>
               </a:spcAft>
-              <a:defRPr sz="2400" b="1">
-                <a:solidFill>
-                  <a:srgbClr val="FFFFFF"/>
-                </a:solidFill>
-                <a:latin typeface="Aptos"/>
-              </a:defRPr>
-            </a:pPr>
-            <a:r>
-              <a:rPr>
-                <a:solidFill/>
+            </a:pPr>
+            <a:r>
+              <a:rPr sz="2400" b="1">
+                <a:solidFill>
+                  <a:srgbClr val="F6F7F5"/>
+                </a:solidFill>
+                <a:latin typeface="Arial"/>
               </a:rPr>
               <a:t>KES 0 / mo</a:t>
             </a:r>
@@ -13191,16 +12852,13 @@
               <a:spcAft>
                 <a:spcPts val="0"/>
               </a:spcAft>
-              <a:defRPr sz="900" b="1">
-                <a:solidFill>
-                  <a:srgbClr val="C5EB68"/>
-                </a:solidFill>
-                <a:latin typeface="Aptos"/>
-              </a:defRPr>
-            </a:pPr>
-            <a:r>
-              <a:rPr>
-                <a:solidFill/>
+            </a:pPr>
+            <a:r>
+              <a:rPr sz="900" b="1">
+                <a:solidFill>
+                  <a:srgbClr val="9AE367"/>
+                </a:solidFill>
+                <a:latin typeface="Arial"/>
               </a:rPr>
               <a:t>DARAJA STK PUSH ONBOARDING</a:t>
             </a:r>
@@ -13236,16 +12894,13 @@
               <a:spcAft>
                 <a:spcPts val="0"/>
               </a:spcAft>
-              <a:defRPr sz="1700" b="1">
-                <a:solidFill>
-                  <a:srgbClr val="FFFFFF"/>
-                </a:solidFill>
-                <a:latin typeface="Aptos"/>
-              </a:defRPr>
-            </a:pPr>
-            <a:r>
-              <a:rPr>
-                <a:solidFill/>
+            </a:pPr>
+            <a:r>
+              <a:rPr sz="1700" b="1">
+                <a:solidFill>
+                  <a:srgbClr val="F6F7F5"/>
+                </a:solidFill>
+                <a:latin typeface="Arial"/>
               </a:rPr>
               <a:t>KES 0 setup  /  KES 0 monthly</a:t>
             </a:r>
@@ -13281,16 +12936,13 @@
               <a:spcAft>
                 <a:spcPts val="0"/>
               </a:spcAft>
-              <a:defRPr sz="1200" b="0">
-                <a:solidFill>
-                  <a:srgbClr val="C9D8D1"/>
-                </a:solidFill>
-                <a:latin typeface="Aptos"/>
-              </a:defRPr>
-            </a:pPr>
-            <a:r>
-              <a:rPr>
-                <a:solidFill/>
+            </a:pPr>
+            <a:r>
+              <a:rPr sz="1200" b="0">
+                <a:solidFill>
+                  <a:srgbClr val="CFDCD2"/>
+                </a:solidFill>
+                <a:latin typeface="Arial"/>
               </a:rPr>
               <a:t>Standard Paybill / Till transaction tariffs still apply.</a:t>
             </a:r>
@@ -13371,16 +13023,13 @@
               <a:spcAft>
                 <a:spcPts val="0"/>
               </a:spcAft>
-              <a:defRPr sz="1200" b="1">
-                <a:solidFill>
-                  <a:srgbClr val="FFFFFF"/>
-                </a:solidFill>
-                <a:latin typeface="Aptos"/>
-              </a:defRPr>
-            </a:pPr>
-            <a:r>
-              <a:rPr>
-                <a:solidFill/>
+            </a:pPr>
+            <a:r>
+              <a:rPr sz="1200" b="1">
+                <a:solidFill>
+                  <a:srgbClr val="F6F7F5"/>
+                </a:solidFill>
+                <a:latin typeface="Arial"/>
               </a:rPr>
               <a:t>NEXT  •  Confirm quotes  →  Validate backup restore  →  Rehearse a controlled launch</a:t>
             </a:r>
@@ -13416,16 +13065,13 @@
               <a:spcAft>
                 <a:spcPts val="0"/>
               </a:spcAft>
-              <a:defRPr sz="1000" b="0">
-                <a:solidFill>
-                  <a:srgbClr val="B5C6BF"/>
-                </a:solidFill>
-                <a:latin typeface="Aptos"/>
-              </a:defRPr>
-            </a:pPr>
-            <a:r>
-              <a:rPr>
-                <a:solidFill/>
+            </a:pPr>
+            <a:r>
+              <a:rPr sz="1000" b="0">
+                <a:solidFill>
+                  <a:srgbClr val="C3D0C2"/>
+                </a:solidFill>
+                <a:latin typeface="Arial"/>
               </a:rPr>
               <a:t>Budget assumptions, not vendor quotes. USD items use ~KES 130 / USD; confirm FX, tax, usage limits and provider terms.</a:t>
             </a:r>
@@ -13435,16 +13081,13 @@
               <a:spcAft>
                 <a:spcPts val="0"/>
               </a:spcAft>
-              <a:defRPr sz="1000" b="0">
-                <a:solidFill>
-                  <a:srgbClr val="B5C6BF"/>
-                </a:solidFill>
-                <a:latin typeface="Aptos"/>
-              </a:defRPr>
-            </a:pPr>
-            <a:r>
-              <a:rPr>
-                <a:solidFill/>
+            </a:pPr>
+            <a:r>
+              <a:rPr sz="1000" b="0">
+                <a:solidFill>
+                  <a:srgbClr val="C3D0C2"/>
+                </a:solidFill>
+                <a:latin typeface="Arial"/>
               </a:rPr>
               <a:t>Payment transaction charges and implementation work are excluded; live gateway charging is not yet enabled.</a:t>
             </a:r>
@@ -13611,16 +13254,13 @@
               <a:spcAft>
                 <a:spcPts val="0"/>
               </a:spcAft>
-              <a:defRPr sz="1200" b="1">
-                <a:solidFill>
-                  <a:srgbClr val="133B36"/>
-                </a:solidFill>
-                <a:latin typeface="Aptos"/>
-              </a:defRPr>
-            </a:pPr>
-            <a:r>
-              <a:rPr>
-                <a:solidFill/>
+            </a:pPr>
+            <a:r>
+              <a:rPr sz="1200" b="1">
+                <a:solidFill>
+                  <a:srgbClr val="9DDD71"/>
+                </a:solidFill>
+                <a:latin typeface="Arial"/>
               </a:rPr>
               <a:t>SHILATECH  /  AUTO SPARES</a:t>
             </a:r>
@@ -13656,16 +13296,13 @@
               <a:spcAft>
                 <a:spcPts val="0"/>
               </a:spcAft>
-              <a:defRPr sz="900" b="1">
-                <a:solidFill>
-                  <a:srgbClr val="1A4C42"/>
-                </a:solidFill>
-                <a:latin typeface="Aptos"/>
-              </a:defRPr>
-            </a:pPr>
-            <a:r>
-              <a:rPr>
-                <a:solidFill/>
+            </a:pPr>
+            <a:r>
+              <a:rPr sz="900" b="1">
+                <a:solidFill>
+                  <a:srgbClr val="96DD62"/>
+                </a:solidFill>
+                <a:latin typeface="Arial"/>
               </a:rPr>
               <a:t>EXECUTIVE VIEW</a:t>
             </a:r>
@@ -13787,16 +13424,13 @@
               <a:spcAft>
                 <a:spcPts val="0"/>
               </a:spcAft>
-              <a:defRPr sz="900" b="0">
-                <a:solidFill>
-                  <a:srgbClr val="667978"/>
-                </a:solidFill>
-                <a:latin typeface="Aptos"/>
-              </a:defRPr>
-            </a:pPr>
-            <a:r>
-              <a:rPr>
-                <a:solidFill/>
+            </a:pPr>
+            <a:r>
+              <a:rPr sz="900" b="0">
+                <a:solidFill>
+                  <a:srgbClr val="B7C1B3"/>
+                </a:solidFill>
+                <a:latin typeface="Arial"/>
               </a:rPr>
               <a:t>CORPORATE PLATFORM OVERVIEW  •  OCT 2026</a:t>
             </a:r>
@@ -13832,16 +13466,13 @@
               <a:spcAft>
                 <a:spcPts val="0"/>
               </a:spcAft>
-              <a:defRPr sz="900" b="1">
-                <a:solidFill>
-                  <a:srgbClr val="133B36"/>
-                </a:solidFill>
-                <a:latin typeface="Aptos"/>
-              </a:defRPr>
-            </a:pPr>
-            <a:r>
-              <a:rPr>
-                <a:solidFill/>
+            </a:pPr>
+            <a:r>
+              <a:rPr sz="900" b="1">
+                <a:solidFill>
+                  <a:srgbClr val="9DDD71"/>
+                </a:solidFill>
+                <a:latin typeface="Arial"/>
               </a:rPr>
               <a:t>02 / 13</a:t>
             </a:r>
@@ -13877,16 +13508,13 @@
               <a:spcAft>
                 <a:spcPts val="0"/>
               </a:spcAft>
-              <a:defRPr sz="900" b="1">
-                <a:solidFill>
-                  <a:srgbClr val="1A4C42"/>
-                </a:solidFill>
-                <a:latin typeface="Aptos"/>
-              </a:defRPr>
-            </a:pPr>
-            <a:r>
-              <a:rPr>
-                <a:solidFill/>
+            </a:pPr>
+            <a:r>
+              <a:rPr sz="900" b="1">
+                <a:solidFill>
+                  <a:srgbClr val="96DD62"/>
+                </a:solidFill>
+                <a:latin typeface="Arial"/>
               </a:rPr>
               <a:t>THE OPPORTUNITY</a:t>
             </a:r>
@@ -13922,18 +13550,15 @@
               <a:spcAft>
                 <a:spcPts val="0"/>
               </a:spcAft>
-              <a:defRPr sz="2900" b="1">
-                <a:solidFill>
-                  <a:srgbClr val="172A2B"/>
-                </a:solidFill>
-                <a:latin typeface="Aptos"/>
-              </a:defRPr>
-            </a:pPr>
-            <a:r>
-              <a:rPr>
-                <a:solidFill/>
-              </a:rPr>
-              <a:t>Move from separate tasks to one connected workflow</a:t>
+            </a:pPr>
+            <a:r>
+              <a:rPr sz="2900" b="1">
+                <a:solidFill>
+                  <a:srgbClr val="F6F7F5"/>
+                </a:solidFill>
+                <a:latin typeface="Arial"/>
+              </a:rPr>
+              <a:t>Move from separate tasks to one workflow</a:t>
             </a:r>
           </a:p>
         </p:txBody>
@@ -13967,16 +13592,13 @@
               <a:spcAft>
                 <a:spcPts val="0"/>
               </a:spcAft>
-              <a:defRPr sz="1300" b="0">
-                <a:solidFill>
-                  <a:srgbClr val="667978"/>
-                </a:solidFill>
-                <a:latin typeface="Aptos"/>
-              </a:defRPr>
-            </a:pPr>
-            <a:r>
-              <a:rPr>
-                <a:solidFill/>
+            </a:pPr>
+            <a:r>
+              <a:rPr sz="1300" b="0">
+                <a:solidFill>
+                  <a:srgbClr val="B7C1B3"/>
+                </a:solidFill>
+                <a:latin typeface="Arial"/>
               </a:rPr>
               <a:t>Make it easier to find parts, transact safely and coordinate the team behind every order.</a:t>
             </a:r>
@@ -14102,16 +13724,13 @@
               <a:spcAft>
                 <a:spcPts val="0"/>
               </a:spcAft>
-              <a:defRPr sz="2100" b="1">
-                <a:solidFill>
-                  <a:srgbClr val="1A4C42"/>
-                </a:solidFill>
-                <a:latin typeface="Aptos"/>
-              </a:defRPr>
-            </a:pPr>
-            <a:r>
-              <a:rPr>
-                <a:solidFill/>
+            </a:pPr>
+            <a:r>
+              <a:rPr sz="2100" b="1">
+                <a:solidFill>
+                  <a:srgbClr val="96DD62"/>
+                </a:solidFill>
+                <a:latin typeface="Arial"/>
               </a:rPr>
               <a:t>01</a:t>
             </a:r>
@@ -14147,16 +13766,13 @@
               <a:spcAft>
                 <a:spcPts val="0"/>
               </a:spcAft>
-              <a:defRPr sz="1800" b="1">
-                <a:solidFill>
-                  <a:srgbClr val="172A2B"/>
-                </a:solidFill>
-                <a:latin typeface="Aptos"/>
-              </a:defRPr>
-            </a:pPr>
-            <a:r>
-              <a:rPr>
-                <a:solidFill/>
+            </a:pPr>
+            <a:r>
+              <a:rPr sz="1800" b="1">
+                <a:solidFill>
+                  <a:srgbClr val="F6F7F5"/>
+                </a:solidFill>
+                <a:latin typeface="Arial"/>
               </a:rPr>
               <a:t>Find the right part</a:t>
             </a:r>
@@ -14192,16 +13808,13 @@
               <a:spcAft>
                 <a:spcPts val="0"/>
               </a:spcAft>
-              <a:defRPr sz="1200" b="0">
-                <a:solidFill>
-                  <a:srgbClr val="667978"/>
-                </a:solidFill>
-                <a:latin typeface="Aptos"/>
-              </a:defRPr>
-            </a:pPr>
-            <a:r>
-              <a:rPr>
-                <a:solidFill/>
+            </a:pPr>
+            <a:r>
+              <a:rPr sz="1200" b="0">
+                <a:solidFill>
+                  <a:srgbClr val="B7C1B3"/>
+                </a:solidFill>
+                <a:latin typeface="Arial"/>
               </a:rPr>
               <a:t>Catalogue search, vehicle brands, VIN lookup foundation and customer accounts give buyers a clearer path to purchase.</a:t>
             </a:r>
@@ -14284,16 +13897,13 @@
               <a:spcAft>
                 <a:spcPts val="0"/>
               </a:spcAft>
-              <a:defRPr sz="2100" b="1">
-                <a:solidFill>
-                  <a:srgbClr val="1A4C42"/>
-                </a:solidFill>
-                <a:latin typeface="Aptos"/>
-              </a:defRPr>
-            </a:pPr>
-            <a:r>
-              <a:rPr>
-                <a:solidFill/>
+            </a:pPr>
+            <a:r>
+              <a:rPr sz="2100" b="1">
+                <a:solidFill>
+                  <a:srgbClr val="96DD62"/>
+                </a:solidFill>
+                <a:latin typeface="Arial"/>
               </a:rPr>
               <a:t>02</a:t>
             </a:r>
@@ -14329,16 +13939,13 @@
               <a:spcAft>
                 <a:spcPts val="0"/>
               </a:spcAft>
-              <a:defRPr sz="1800" b="1">
-                <a:solidFill>
-                  <a:srgbClr val="172A2B"/>
-                </a:solidFill>
-                <a:latin typeface="Aptos"/>
-              </a:defRPr>
-            </a:pPr>
-            <a:r>
-              <a:rPr>
-                <a:solidFill/>
+            </a:pPr>
+            <a:r>
+              <a:rPr sz="1800" b="1">
+                <a:solidFill>
+                  <a:srgbClr val="F6F7F5"/>
+                </a:solidFill>
+                <a:latin typeface="Arial"/>
               </a:rPr>
               <a:t>Sell with stock visibility</a:t>
             </a:r>
@@ -14374,16 +13981,13 @@
               <a:spcAft>
                 <a:spcPts val="0"/>
               </a:spcAft>
-              <a:defRPr sz="1200" b="0">
-                <a:solidFill>
-                  <a:srgbClr val="667978"/>
-                </a:solidFill>
-                <a:latin typeface="Aptos"/>
-              </a:defRPr>
-            </a:pPr>
-            <a:r>
-              <a:rPr>
-                <a:solidFill/>
+            </a:pPr>
+            <a:r>
+              <a:rPr sz="1200" b="0">
+                <a:solidFill>
+                  <a:srgbClr val="B7C1B3"/>
+                </a:solidFill>
+                <a:latin typeface="Arial"/>
               </a:rPr>
               <a:t>Online checkout and the staff sales counter use shared inventory controls, reducing avoidable overselling.</a:t>
             </a:r>
@@ -14466,16 +14070,13 @@
               <a:spcAft>
                 <a:spcPts val="0"/>
               </a:spcAft>
-              <a:defRPr sz="2100" b="1">
-                <a:solidFill>
-                  <a:srgbClr val="1A4C42"/>
-                </a:solidFill>
-                <a:latin typeface="Aptos"/>
-              </a:defRPr>
-            </a:pPr>
-            <a:r>
-              <a:rPr>
-                <a:solidFill/>
+            </a:pPr>
+            <a:r>
+              <a:rPr sz="2100" b="1">
+                <a:solidFill>
+                  <a:srgbClr val="96DD62"/>
+                </a:solidFill>
+                <a:latin typeface="Arial"/>
               </a:rPr>
               <a:t>03</a:t>
             </a:r>
@@ -14511,16 +14112,13 @@
               <a:spcAft>
                 <a:spcPts val="0"/>
               </a:spcAft>
-              <a:defRPr sz="1800" b="1">
-                <a:solidFill>
-                  <a:srgbClr val="172A2B"/>
-                </a:solidFill>
-                <a:latin typeface="Aptos"/>
-              </a:defRPr>
-            </a:pPr>
-            <a:r>
-              <a:rPr>
-                <a:solidFill/>
+            </a:pPr>
+            <a:r>
+              <a:rPr sz="1800" b="1">
+                <a:solidFill>
+                  <a:srgbClr val="F6F7F5"/>
+                </a:solidFill>
+                <a:latin typeface="Arial"/>
               </a:rPr>
               <a:t>Run the operation</a:t>
             </a:r>
@@ -14556,16 +14154,13 @@
               <a:spcAft>
                 <a:spcPts val="0"/>
               </a:spcAft>
-              <a:defRPr sz="1200" b="0">
-                <a:solidFill>
-                  <a:srgbClr val="667978"/>
-                </a:solidFill>
-                <a:latin typeface="Aptos"/>
-              </a:defRPr>
-            </a:pPr>
-            <a:r>
-              <a:rPr>
-                <a:solidFill/>
+            </a:pPr>
+            <a:r>
+              <a:rPr sz="1200" b="0">
+                <a:solidFill>
+                  <a:srgbClr val="B7C1B3"/>
+                </a:solidFill>
+                <a:latin typeface="Arial"/>
               </a:rPr>
               <a:t>Warehouse, delivery, staff, finance and management views bring the day-to-day workflow into one system.</a:t>
             </a:r>
@@ -14646,16 +14241,13 @@
               <a:spcAft>
                 <a:spcPts val="0"/>
               </a:spcAft>
-              <a:defRPr sz="1000" b="1">
-                <a:solidFill>
-                  <a:srgbClr val="133B36"/>
-                </a:solidFill>
-                <a:latin typeface="Aptos"/>
-              </a:defRPr>
-            </a:pPr>
-            <a:r>
-              <a:rPr>
-                <a:solidFill/>
+            </a:pPr>
+            <a:r>
+              <a:rPr sz="1000" b="1">
+                <a:solidFill>
+                  <a:srgbClr val="9DDD71"/>
+                </a:solidFill>
+                <a:latin typeface="Arial"/>
               </a:rPr>
               <a:t>POSITIONING</a:t>
             </a:r>
@@ -14691,16 +14283,13 @@
               <a:spcAft>
                 <a:spcPts val="0"/>
               </a:spcAft>
-              <a:defRPr sz="1300" b="0">
-                <a:solidFill>
-                  <a:srgbClr val="172A2B"/>
-                </a:solidFill>
-                <a:latin typeface="Aptos"/>
-              </a:defRPr>
-            </a:pPr>
-            <a:r>
-              <a:rPr>
-                <a:solidFill/>
+            </a:pPr>
+            <a:r>
+              <a:rPr sz="1300" b="0">
+                <a:solidFill>
+                  <a:srgbClr val="F6F7F5"/>
+                </a:solidFill>
+                <a:latin typeface="Arial"/>
               </a:rPr>
               <a:t>Custom-owned software  •  modular rollout  •  no recurring software licence</a:t>
             </a:r>
@@ -14867,16 +14456,13 @@
               <a:spcAft>
                 <a:spcPts val="0"/>
               </a:spcAft>
-              <a:defRPr sz="1200" b="1">
-                <a:solidFill>
-                  <a:srgbClr val="133B36"/>
-                </a:solidFill>
-                <a:latin typeface="Aptos"/>
-              </a:defRPr>
-            </a:pPr>
-            <a:r>
-              <a:rPr>
-                <a:solidFill/>
+            </a:pPr>
+            <a:r>
+              <a:rPr sz="1200" b="1">
+                <a:solidFill>
+                  <a:srgbClr val="9DDD71"/>
+                </a:solidFill>
+                <a:latin typeface="Arial"/>
               </a:rPr>
               <a:t>SHILATECH  /  AUTO SPARES</a:t>
             </a:r>
@@ -14912,16 +14498,13 @@
               <a:spcAft>
                 <a:spcPts val="0"/>
               </a:spcAft>
-              <a:defRPr sz="900" b="1">
-                <a:solidFill>
-                  <a:srgbClr val="1A4C42"/>
-                </a:solidFill>
-                <a:latin typeface="Aptos"/>
-              </a:defRPr>
-            </a:pPr>
-            <a:r>
-              <a:rPr>
-                <a:solidFill/>
+            </a:pPr>
+            <a:r>
+              <a:rPr sz="900" b="1">
+                <a:solidFill>
+                  <a:srgbClr val="96DD62"/>
+                </a:solidFill>
+                <a:latin typeface="Arial"/>
               </a:rPr>
               <a:t>CUSTOMER EXPERIENCE</a:t>
             </a:r>
@@ -15043,16 +14626,13 @@
               <a:spcAft>
                 <a:spcPts val="0"/>
               </a:spcAft>
-              <a:defRPr sz="900" b="0">
-                <a:solidFill>
-                  <a:srgbClr val="667978"/>
-                </a:solidFill>
-                <a:latin typeface="Aptos"/>
-              </a:defRPr>
-            </a:pPr>
-            <a:r>
-              <a:rPr>
-                <a:solidFill/>
+            </a:pPr>
+            <a:r>
+              <a:rPr sz="900" b="0">
+                <a:solidFill>
+                  <a:srgbClr val="B7C1B3"/>
+                </a:solidFill>
+                <a:latin typeface="Arial"/>
               </a:rPr>
               <a:t>CORPORATE PLATFORM OVERVIEW  •  OCT 2026</a:t>
             </a:r>
@@ -15088,16 +14668,13 @@
               <a:spcAft>
                 <a:spcPts val="0"/>
               </a:spcAft>
-              <a:defRPr sz="900" b="1">
-                <a:solidFill>
-                  <a:srgbClr val="133B36"/>
-                </a:solidFill>
-                <a:latin typeface="Aptos"/>
-              </a:defRPr>
-            </a:pPr>
-            <a:r>
-              <a:rPr>
-                <a:solidFill/>
+            </a:pPr>
+            <a:r>
+              <a:rPr sz="900" b="1">
+                <a:solidFill>
+                  <a:srgbClr val="9DDD71"/>
+                </a:solidFill>
+                <a:latin typeface="Arial"/>
               </a:rPr>
               <a:t>03 / 13</a:t>
             </a:r>
@@ -15133,16 +14710,13 @@
               <a:spcAft>
                 <a:spcPts val="0"/>
               </a:spcAft>
-              <a:defRPr sz="900" b="1">
-                <a:solidFill>
-                  <a:srgbClr val="1A4C42"/>
-                </a:solidFill>
-                <a:latin typeface="Aptos"/>
-              </a:defRPr>
-            </a:pPr>
-            <a:r>
-              <a:rPr>
-                <a:solidFill/>
+            </a:pPr>
+            <a:r>
+              <a:rPr sz="900" b="1">
+                <a:solidFill>
+                  <a:srgbClr val="96DD62"/>
+                </a:solidFill>
+                <a:latin typeface="Arial"/>
               </a:rPr>
               <a:t>FROM SEARCH TO SERVICE</a:t>
             </a:r>
@@ -15178,16 +14752,13 @@
               <a:spcAft>
                 <a:spcPts val="0"/>
               </a:spcAft>
-              <a:defRPr sz="2900" b="1">
-                <a:solidFill>
-                  <a:srgbClr val="172A2B"/>
-                </a:solidFill>
-                <a:latin typeface="Aptos"/>
-              </a:defRPr>
-            </a:pPr>
-            <a:r>
-              <a:rPr>
-                <a:solidFill/>
+            </a:pPr>
+            <a:r>
+              <a:rPr sz="2900" b="1">
+                <a:solidFill>
+                  <a:srgbClr val="F6F7F5"/>
+                </a:solidFill>
+                <a:latin typeface="Arial"/>
               </a:rPr>
               <a:t>A simpler path from vehicle to part</a:t>
             </a:r>
@@ -15223,16 +14794,13 @@
               <a:spcAft>
                 <a:spcPts val="0"/>
               </a:spcAft>
-              <a:defRPr sz="1300" b="0">
-                <a:solidFill>
-                  <a:srgbClr val="667978"/>
-                </a:solidFill>
-                <a:latin typeface="Aptos"/>
-              </a:defRPr>
-            </a:pPr>
-            <a:r>
-              <a:rPr>
-                <a:solidFill/>
+            </a:pPr>
+            <a:r>
+              <a:rPr sz="1300" b="0">
+                <a:solidFill>
+                  <a:srgbClr val="B7C1B3"/>
+                </a:solidFill>
+                <a:latin typeface="Arial"/>
               </a:rPr>
               <a:t>The public website is designed around the questions a customer asks before and after checkout.</a:t>
             </a:r>
@@ -15401,16 +14969,13 @@
               <a:spcAft>
                 <a:spcPts val="0"/>
               </a:spcAft>
-              <a:defRPr sz="2400" b="1">
-                <a:solidFill>
-                  <a:srgbClr val="1A4C42"/>
-                </a:solidFill>
-                <a:latin typeface="Aptos"/>
-              </a:defRPr>
-            </a:pPr>
-            <a:r>
-              <a:rPr>
-                <a:solidFill/>
+            </a:pPr>
+            <a:r>
+              <a:rPr sz="2400" b="1">
+                <a:solidFill>
+                  <a:srgbClr val="96DD62"/>
+                </a:solidFill>
+                <a:latin typeface="Arial"/>
               </a:rPr>
               <a:t>01</a:t>
             </a:r>
@@ -15446,16 +15011,13 @@
               <a:spcAft>
                 <a:spcPts val="0"/>
               </a:spcAft>
-              <a:defRPr sz="900" b="1">
-                <a:solidFill>
-                  <a:srgbClr val="1A4C42"/>
-                </a:solidFill>
-                <a:latin typeface="Aptos"/>
-              </a:defRPr>
-            </a:pPr>
-            <a:r>
-              <a:rPr>
-                <a:solidFill/>
+            </a:pPr>
+            <a:r>
+              <a:rPr sz="900" b="1">
+                <a:solidFill>
+                  <a:srgbClr val="96DD62"/>
+                </a:solidFill>
+                <a:latin typeface="Arial"/>
               </a:rPr>
               <a:t>DISCOVER</a:t>
             </a:r>
@@ -15491,16 +15053,13 @@
               <a:spcAft>
                 <a:spcPts val="0"/>
               </a:spcAft>
-              <a:defRPr sz="1200" b="0">
-                <a:solidFill>
-                  <a:srgbClr val="667978"/>
-                </a:solidFill>
-                <a:latin typeface="Aptos"/>
-              </a:defRPr>
-            </a:pPr>
-            <a:r>
-              <a:rPr>
-                <a:solidFill/>
+            </a:pPr>
+            <a:r>
+              <a:rPr sz="1200" b="0">
+                <a:solidFill>
+                  <a:srgbClr val="B7C1B3"/>
+                </a:solidFill>
+                <a:latin typeface="Arial"/>
               </a:rPr>
               <a:t>Browse brands, categories and featured parts.</a:t>
             </a:r>
@@ -15536,16 +15095,13 @@
               <a:spcAft>
                 <a:spcPts val="0"/>
               </a:spcAft>
-              <a:defRPr sz="1800" b="1">
-                <a:solidFill>
-                  <a:srgbClr val="1A4C42"/>
-                </a:solidFill>
-                <a:latin typeface="Aptos"/>
-              </a:defRPr>
-            </a:pPr>
-            <a:r>
-              <a:rPr>
-                <a:solidFill/>
+            </a:pPr>
+            <a:r>
+              <a:rPr sz="1800" b="1">
+                <a:solidFill>
+                  <a:srgbClr val="96DD62"/>
+                </a:solidFill>
+                <a:latin typeface="Arial"/>
               </a:rPr>
               <a:t>→</a:t>
             </a:r>
@@ -15671,16 +15227,13 @@
               <a:spcAft>
                 <a:spcPts val="0"/>
               </a:spcAft>
-              <a:defRPr sz="2400" b="1">
-                <a:solidFill>
-                  <a:srgbClr val="1A4C42"/>
-                </a:solidFill>
-                <a:latin typeface="Aptos"/>
-              </a:defRPr>
-            </a:pPr>
-            <a:r>
-              <a:rPr>
-                <a:solidFill/>
+            </a:pPr>
+            <a:r>
+              <a:rPr sz="2400" b="1">
+                <a:solidFill>
+                  <a:srgbClr val="96DD62"/>
+                </a:solidFill>
+                <a:latin typeface="Arial"/>
               </a:rPr>
               <a:t>02</a:t>
             </a:r>
@@ -15716,16 +15269,13 @@
               <a:spcAft>
                 <a:spcPts val="0"/>
               </a:spcAft>
-              <a:defRPr sz="900" b="1">
-                <a:solidFill>
-                  <a:srgbClr val="1A4C42"/>
-                </a:solidFill>
-                <a:latin typeface="Aptos"/>
-              </a:defRPr>
-            </a:pPr>
-            <a:r>
-              <a:rPr>
-                <a:solidFill/>
+            </a:pPr>
+            <a:r>
+              <a:rPr sz="900" b="1">
+                <a:solidFill>
+                  <a:srgbClr val="96DD62"/>
+                </a:solidFill>
+                <a:latin typeface="Arial"/>
               </a:rPr>
               <a:t>CHECK</a:t>
             </a:r>
@@ -15761,16 +15311,13 @@
               <a:spcAft>
                 <a:spcPts val="0"/>
               </a:spcAft>
-              <a:defRPr sz="1200" b="0">
-                <a:solidFill>
-                  <a:srgbClr val="667978"/>
-                </a:solidFill>
-                <a:latin typeface="Aptos"/>
-              </a:defRPr>
-            </a:pPr>
-            <a:r>
-              <a:rPr>
-                <a:solidFill/>
+            </a:pPr>
+            <a:r>
+              <a:rPr sz="1200" b="0">
+                <a:solidFill>
+                  <a:srgbClr val="B7C1B3"/>
+                </a:solidFill>
+                <a:latin typeface="Arial"/>
               </a:rPr>
               <a:t>Search by part or use VIN lookup as a fitment aid.</a:t>
             </a:r>
@@ -15806,16 +15353,13 @@
               <a:spcAft>
                 <a:spcPts val="0"/>
               </a:spcAft>
-              <a:defRPr sz="1800" b="1">
-                <a:solidFill>
-                  <a:srgbClr val="1A4C42"/>
-                </a:solidFill>
-                <a:latin typeface="Aptos"/>
-              </a:defRPr>
-            </a:pPr>
-            <a:r>
-              <a:rPr>
-                <a:solidFill/>
+            </a:pPr>
+            <a:r>
+              <a:rPr sz="1800" b="1">
+                <a:solidFill>
+                  <a:srgbClr val="96DD62"/>
+                </a:solidFill>
+                <a:latin typeface="Arial"/>
               </a:rPr>
               <a:t>→</a:t>
             </a:r>
@@ -15941,16 +15485,13 @@
               <a:spcAft>
                 <a:spcPts val="0"/>
               </a:spcAft>
-              <a:defRPr sz="2400" b="1">
-                <a:solidFill>
-                  <a:srgbClr val="1A4C42"/>
-                </a:solidFill>
-                <a:latin typeface="Aptos"/>
-              </a:defRPr>
-            </a:pPr>
-            <a:r>
-              <a:rPr>
-                <a:solidFill/>
+            </a:pPr>
+            <a:r>
+              <a:rPr sz="2400" b="1">
+                <a:solidFill>
+                  <a:srgbClr val="96DD62"/>
+                </a:solidFill>
+                <a:latin typeface="Arial"/>
               </a:rPr>
               <a:t>03</a:t>
             </a:r>
@@ -15986,16 +15527,13 @@
               <a:spcAft>
                 <a:spcPts val="0"/>
               </a:spcAft>
-              <a:defRPr sz="900" b="1">
-                <a:solidFill>
-                  <a:srgbClr val="1A4C42"/>
-                </a:solidFill>
-                <a:latin typeface="Aptos"/>
-              </a:defRPr>
-            </a:pPr>
-            <a:r>
-              <a:rPr>
-                <a:solidFill/>
+            </a:pPr>
+            <a:r>
+              <a:rPr sz="900" b="1">
+                <a:solidFill>
+                  <a:srgbClr val="96DD62"/>
+                </a:solidFill>
+                <a:latin typeface="Arial"/>
               </a:rPr>
               <a:t>CHOOSE</a:t>
             </a:r>
@@ -16031,16 +15569,13 @@
               <a:spcAft>
                 <a:spcPts val="0"/>
               </a:spcAft>
-              <a:defRPr sz="1200" b="0">
-                <a:solidFill>
-                  <a:srgbClr val="667978"/>
-                </a:solidFill>
-                <a:latin typeface="Aptos"/>
-              </a:defRPr>
-            </a:pPr>
-            <a:r>
-              <a:rPr>
-                <a:solidFill/>
+            </a:pPr>
+            <a:r>
+              <a:rPr sz="1200" b="0">
+                <a:solidFill>
+                  <a:srgbClr val="B7C1B3"/>
+                </a:solidFill>
+                <a:latin typeface="Arial"/>
               </a:rPr>
               <a:t>Review product details, cart and delivery options.</a:t>
             </a:r>
@@ -16076,16 +15611,13 @@
               <a:spcAft>
                 <a:spcPts val="0"/>
               </a:spcAft>
-              <a:defRPr sz="1800" b="1">
-                <a:solidFill>
-                  <a:srgbClr val="1A4C42"/>
-                </a:solidFill>
-                <a:latin typeface="Aptos"/>
-              </a:defRPr>
-            </a:pPr>
-            <a:r>
-              <a:rPr>
-                <a:solidFill/>
+            </a:pPr>
+            <a:r>
+              <a:rPr sz="1800" b="1">
+                <a:solidFill>
+                  <a:srgbClr val="96DD62"/>
+                </a:solidFill>
+                <a:latin typeface="Arial"/>
               </a:rPr>
               <a:t>→</a:t>
             </a:r>
@@ -16211,16 +15743,13 @@
               <a:spcAft>
                 <a:spcPts val="0"/>
               </a:spcAft>
-              <a:defRPr sz="2400" b="1">
-                <a:solidFill>
-                  <a:srgbClr val="1A4C42"/>
-                </a:solidFill>
-                <a:latin typeface="Aptos"/>
-              </a:defRPr>
-            </a:pPr>
-            <a:r>
-              <a:rPr>
-                <a:solidFill/>
+            </a:pPr>
+            <a:r>
+              <a:rPr sz="2400" b="1">
+                <a:solidFill>
+                  <a:srgbClr val="96DD62"/>
+                </a:solidFill>
+                <a:latin typeface="Arial"/>
               </a:rPr>
               <a:t>04</a:t>
             </a:r>
@@ -16256,16 +15785,13 @@
               <a:spcAft>
                 <a:spcPts val="0"/>
               </a:spcAft>
-              <a:defRPr sz="900" b="1">
-                <a:solidFill>
-                  <a:srgbClr val="1A4C42"/>
-                </a:solidFill>
-                <a:latin typeface="Aptos"/>
-              </a:defRPr>
-            </a:pPr>
-            <a:r>
-              <a:rPr>
-                <a:solidFill/>
+            </a:pPr>
+            <a:r>
+              <a:rPr sz="900" b="1">
+                <a:solidFill>
+                  <a:srgbClr val="96DD62"/>
+                </a:solidFill>
+                <a:latin typeface="Arial"/>
               </a:rPr>
               <a:t>ORDER</a:t>
             </a:r>
@@ -16301,16 +15827,13 @@
               <a:spcAft>
                 <a:spcPts val="0"/>
               </a:spcAft>
-              <a:defRPr sz="1200" b="0">
-                <a:solidFill>
-                  <a:srgbClr val="667978"/>
-                </a:solidFill>
-                <a:latin typeface="Aptos"/>
-              </a:defRPr>
-            </a:pPr>
-            <a:r>
-              <a:rPr>
-                <a:solidFill/>
+            </a:pPr>
+            <a:r>
+              <a:rPr sz="1200" b="0">
+                <a:solidFill>
+                  <a:srgbClr val="B7C1B3"/>
+                </a:solidFill>
+                <a:latin typeface="Arial"/>
               </a:rPr>
               <a:t>Submit checkout with the selected payment method.</a:t>
             </a:r>
@@ -16346,16 +15869,13 @@
               <a:spcAft>
                 <a:spcPts val="0"/>
               </a:spcAft>
-              <a:defRPr sz="1800" b="1">
-                <a:solidFill>
-                  <a:srgbClr val="1A4C42"/>
-                </a:solidFill>
-                <a:latin typeface="Aptos"/>
-              </a:defRPr>
-            </a:pPr>
-            <a:r>
-              <a:rPr>
-                <a:solidFill/>
+            </a:pPr>
+            <a:r>
+              <a:rPr sz="1800" b="1">
+                <a:solidFill>
+                  <a:srgbClr val="96DD62"/>
+                </a:solidFill>
+                <a:latin typeface="Arial"/>
               </a:rPr>
               <a:t>→</a:t>
             </a:r>
@@ -16481,16 +16001,13 @@
               <a:spcAft>
                 <a:spcPts val="0"/>
               </a:spcAft>
-              <a:defRPr sz="2400" b="1">
-                <a:solidFill>
-                  <a:srgbClr val="1A4C42"/>
-                </a:solidFill>
-                <a:latin typeface="Aptos"/>
-              </a:defRPr>
-            </a:pPr>
-            <a:r>
-              <a:rPr>
-                <a:solidFill/>
+            </a:pPr>
+            <a:r>
+              <a:rPr sz="2400" b="1">
+                <a:solidFill>
+                  <a:srgbClr val="96DD62"/>
+                </a:solidFill>
+                <a:latin typeface="Arial"/>
               </a:rPr>
               <a:t>05</a:t>
             </a:r>
@@ -16526,16 +16043,13 @@
               <a:spcAft>
                 <a:spcPts val="0"/>
               </a:spcAft>
-              <a:defRPr sz="900" b="1">
-                <a:solidFill>
-                  <a:srgbClr val="1A4C42"/>
-                </a:solidFill>
-                <a:latin typeface="Aptos"/>
-              </a:defRPr>
-            </a:pPr>
-            <a:r>
-              <a:rPr>
-                <a:solidFill/>
+            </a:pPr>
+            <a:r>
+              <a:rPr sz="900" b="1">
+                <a:solidFill>
+                  <a:srgbClr val="96DD62"/>
+                </a:solidFill>
+                <a:latin typeface="Arial"/>
               </a:rPr>
               <a:t>RETURN</a:t>
             </a:r>
@@ -16571,16 +16085,13 @@
               <a:spcAft>
                 <a:spcPts val="0"/>
               </a:spcAft>
-              <a:defRPr sz="1200" b="0">
-                <a:solidFill>
-                  <a:srgbClr val="667978"/>
-                </a:solidFill>
-                <a:latin typeface="Aptos"/>
-              </a:defRPr>
-            </a:pPr>
-            <a:r>
-              <a:rPr>
-                <a:solidFill/>
+            </a:pPr>
+            <a:r>
+              <a:rPr sz="1200" b="0">
+                <a:solidFill>
+                  <a:srgbClr val="B7C1B3"/>
+                </a:solidFill>
+                <a:latin typeface="Arial"/>
               </a:rPr>
               <a:t>Use account, workshop and support journeys.</a:t>
             </a:r>
@@ -16661,16 +16172,13 @@
               <a:spcAft>
                 <a:spcPts val="0"/>
               </a:spcAft>
-              <a:defRPr sz="1100" b="1">
-                <a:solidFill>
-                  <a:srgbClr val="133B36"/>
-                </a:solidFill>
-                <a:latin typeface="Aptos"/>
-              </a:defRPr>
-            </a:pPr>
-            <a:r>
-              <a:rPr>
-                <a:solidFill/>
+            </a:pPr>
+            <a:r>
+              <a:rPr sz="1100" b="1">
+                <a:solidFill>
+                  <a:srgbClr val="9DDD71"/>
+                </a:solidFill>
+                <a:latin typeface="Arial"/>
               </a:rPr>
               <a:t>PAYMENT STATUS  •  Checkout methods are selectable; live gateway charging needs provider credentials and integration.</a:t>
             </a:r>
@@ -16837,16 +16345,13 @@
               <a:spcAft>
                 <a:spcPts val="0"/>
               </a:spcAft>
-              <a:defRPr sz="1200" b="1">
-                <a:solidFill>
-                  <a:srgbClr val="133B36"/>
-                </a:solidFill>
-                <a:latin typeface="Aptos"/>
-              </a:defRPr>
-            </a:pPr>
-            <a:r>
-              <a:rPr>
-                <a:solidFill/>
+            </a:pPr>
+            <a:r>
+              <a:rPr sz="1200" b="1">
+                <a:solidFill>
+                  <a:srgbClr val="9DDD71"/>
+                </a:solidFill>
+                <a:latin typeface="Arial"/>
               </a:rPr>
               <a:t>SHILATECH  /  AUTO SPARES</a:t>
             </a:r>
@@ -16882,16 +16387,13 @@
               <a:spcAft>
                 <a:spcPts val="0"/>
               </a:spcAft>
-              <a:defRPr sz="900" b="1">
-                <a:solidFill>
-                  <a:srgbClr val="1A4C42"/>
-                </a:solidFill>
-                <a:latin typeface="Aptos"/>
-              </a:defRPr>
-            </a:pPr>
-            <a:r>
-              <a:rPr>
-                <a:solidFill/>
+            </a:pPr>
+            <a:r>
+              <a:rPr sz="900" b="1">
+                <a:solidFill>
+                  <a:srgbClr val="96DD62"/>
+                </a:solidFill>
+                <a:latin typeface="Arial"/>
               </a:rPr>
               <a:t>PLATFORM MAP</a:t>
             </a:r>
@@ -17013,16 +16515,13 @@
               <a:spcAft>
                 <a:spcPts val="0"/>
               </a:spcAft>
-              <a:defRPr sz="900" b="0">
-                <a:solidFill>
-                  <a:srgbClr val="667978"/>
-                </a:solidFill>
-                <a:latin typeface="Aptos"/>
-              </a:defRPr>
-            </a:pPr>
-            <a:r>
-              <a:rPr>
-                <a:solidFill/>
+            </a:pPr>
+            <a:r>
+              <a:rPr sz="900" b="0">
+                <a:solidFill>
+                  <a:srgbClr val="B7C1B3"/>
+                </a:solidFill>
+                <a:latin typeface="Arial"/>
               </a:rPr>
               <a:t>CORPORATE PLATFORM OVERVIEW  •  OCT 2026</a:t>
             </a:r>
@@ -17058,16 +16557,13 @@
               <a:spcAft>
                 <a:spcPts val="0"/>
               </a:spcAft>
-              <a:defRPr sz="900" b="1">
-                <a:solidFill>
-                  <a:srgbClr val="133B36"/>
-                </a:solidFill>
-                <a:latin typeface="Aptos"/>
-              </a:defRPr>
-            </a:pPr>
-            <a:r>
-              <a:rPr>
-                <a:solidFill/>
+            </a:pPr>
+            <a:r>
+              <a:rPr sz="900" b="1">
+                <a:solidFill>
+                  <a:srgbClr val="9DDD71"/>
+                </a:solidFill>
+                <a:latin typeface="Arial"/>
               </a:rPr>
               <a:t>04 / 13</a:t>
             </a:r>
@@ -17103,16 +16599,13 @@
               <a:spcAft>
                 <a:spcPts val="0"/>
               </a:spcAft>
-              <a:defRPr sz="900" b="1">
-                <a:solidFill>
-                  <a:srgbClr val="1A4C42"/>
-                </a:solidFill>
-                <a:latin typeface="Aptos"/>
-              </a:defRPr>
-            </a:pPr>
-            <a:r>
-              <a:rPr>
-                <a:solidFill/>
+            </a:pPr>
+            <a:r>
+              <a:rPr sz="900" b="1">
+                <a:solidFill>
+                  <a:srgbClr val="96DD62"/>
+                </a:solidFill>
+                <a:latin typeface="Arial"/>
               </a:rPr>
               <a:t>ONE CONNECTED SYSTEM</a:t>
             </a:r>
@@ -17148,16 +16641,13 @@
               <a:spcAft>
                 <a:spcPts val="0"/>
               </a:spcAft>
-              <a:defRPr sz="2900" b="1">
-                <a:solidFill>
-                  <a:srgbClr val="172A2B"/>
-                </a:solidFill>
-                <a:latin typeface="Aptos"/>
-              </a:defRPr>
-            </a:pPr>
-            <a:r>
-              <a:rPr>
-                <a:solidFill/>
+            </a:pPr>
+            <a:r>
+              <a:rPr sz="2900" b="1">
+                <a:solidFill>
+                  <a:srgbClr val="F6F7F5"/>
+                </a:solidFill>
+                <a:latin typeface="Arial"/>
               </a:rPr>
               <a:t>Two experiences. One operational backbone.</a:t>
             </a:r>
@@ -17193,16 +16683,13 @@
               <a:spcAft>
                 <a:spcPts val="0"/>
               </a:spcAft>
-              <a:defRPr sz="1300" b="0">
-                <a:solidFill>
-                  <a:srgbClr val="667978"/>
-                </a:solidFill>
-                <a:latin typeface="Aptos"/>
-              </a:defRPr>
-            </a:pPr>
-            <a:r>
-              <a:rPr>
-                <a:solidFill/>
+            </a:pPr>
+            <a:r>
+              <a:rPr sz="1300" b="0">
+                <a:solidFill>
+                  <a:srgbClr val="B7C1B3"/>
+                </a:solidFill>
+                <a:latin typeface="Arial"/>
               </a:rPr>
               <a:t>Customers see a focused storefront; staff see role-specific workspaces connected to the same data.</a:t>
             </a:r>
@@ -17371,16 +16858,13 @@
               <a:spcAft>
                 <a:spcPts val="0"/>
               </a:spcAft>
-              <a:defRPr sz="900" b="1">
-                <a:solidFill>
-                  <a:srgbClr val="1A4C42"/>
-                </a:solidFill>
-                <a:latin typeface="Aptos"/>
-              </a:defRPr>
-            </a:pPr>
-            <a:r>
-              <a:rPr>
-                <a:solidFill/>
+            </a:pPr>
+            <a:r>
+              <a:rPr sz="900" b="1">
+                <a:solidFill>
+                  <a:srgbClr val="96DD62"/>
+                </a:solidFill>
+                <a:latin typeface="Arial"/>
               </a:rPr>
               <a:t>CUSTOMER SIDE</a:t>
             </a:r>
@@ -17416,16 +16900,13 @@
               <a:spcAft>
                 <a:spcPts val="0"/>
               </a:spcAft>
-              <a:defRPr sz="1800" b="1">
-                <a:solidFill>
-                  <a:srgbClr val="172A2B"/>
-                </a:solidFill>
-                <a:latin typeface="Aptos"/>
-              </a:defRPr>
-            </a:pPr>
-            <a:r>
-              <a:rPr>
-                <a:solidFill/>
+            </a:pPr>
+            <a:r>
+              <a:rPr sz="1800" b="1">
+                <a:solidFill>
+                  <a:srgbClr val="F6F7F5"/>
+                </a:solidFill>
+                <a:latin typeface="Arial"/>
               </a:rPr>
               <a:t>Find, decide and request service</a:t>
             </a:r>
@@ -17504,16 +16985,13 @@
               <a:spcAft>
                 <a:spcPts val="0"/>
               </a:spcAft>
-              <a:defRPr sz="1400" b="0">
-                <a:solidFill>
-                  <a:srgbClr val="172A2B"/>
-                </a:solidFill>
-                <a:latin typeface="Aptos"/>
-              </a:defRPr>
-            </a:pPr>
-            <a:r>
-              <a:rPr>
-                <a:solidFill/>
+            </a:pPr>
+            <a:r>
+              <a:rPr sz="1400" b="0">
+                <a:solidFill>
+                  <a:srgbClr val="F6F7F5"/>
+                </a:solidFill>
+                <a:latin typeface="Arial"/>
               </a:rPr>
               <a:t>Product catalogue &amp; brand filters</a:t>
             </a:r>
@@ -17592,16 +17070,13 @@
               <a:spcAft>
                 <a:spcPts val="0"/>
               </a:spcAft>
-              <a:defRPr sz="1400" b="0">
-                <a:solidFill>
-                  <a:srgbClr val="172A2B"/>
-                </a:solidFill>
-                <a:latin typeface="Aptos"/>
-              </a:defRPr>
-            </a:pPr>
-            <a:r>
-              <a:rPr>
-                <a:solidFill/>
+            </a:pPr>
+            <a:r>
+              <a:rPr sz="1400" b="0">
+                <a:solidFill>
+                  <a:srgbClr val="F6F7F5"/>
+                </a:solidFill>
+                <a:latin typeface="Arial"/>
               </a:rPr>
               <a:t>VIN lookup &amp; My Garage</a:t>
             </a:r>
@@ -17680,16 +17155,13 @@
               <a:spcAft>
                 <a:spcPts val="0"/>
               </a:spcAft>
-              <a:defRPr sz="1400" b="0">
-                <a:solidFill>
-                  <a:srgbClr val="172A2B"/>
-                </a:solidFill>
-                <a:latin typeface="Aptos"/>
-              </a:defRPr>
-            </a:pPr>
-            <a:r>
-              <a:rPr>
-                <a:solidFill/>
+            </a:pPr>
+            <a:r>
+              <a:rPr sz="1400" b="0">
+                <a:solidFill>
+                  <a:srgbClr val="F6F7F5"/>
+                </a:solidFill>
+                <a:latin typeface="Arial"/>
               </a:rPr>
               <a:t>Cart, checkout &amp; account</a:t>
             </a:r>
@@ -17768,16 +17240,13 @@
               <a:spcAft>
                 <a:spcPts val="0"/>
               </a:spcAft>
-              <a:defRPr sz="1400" b="0">
-                <a:solidFill>
-                  <a:srgbClr val="172A2B"/>
-                </a:solidFill>
-                <a:latin typeface="Aptos"/>
-              </a:defRPr>
-            </a:pPr>
-            <a:r>
-              <a:rPr>
-                <a:solidFill/>
+            </a:pPr>
+            <a:r>
+              <a:rPr sz="1400" b="0">
+                <a:solidFill>
+                  <a:srgbClr val="F6F7F5"/>
+                </a:solidFill>
+                <a:latin typeface="Arial"/>
               </a:rPr>
               <a:t>Workshop, contact &amp; support</a:t>
             </a:r>
@@ -17903,16 +17372,13 @@
               <a:spcAft>
                 <a:spcPts val="0"/>
               </a:spcAft>
-              <a:defRPr sz="900" b="1">
-                <a:solidFill>
-                  <a:srgbClr val="1A4C42"/>
-                </a:solidFill>
-                <a:latin typeface="Aptos"/>
-              </a:defRPr>
-            </a:pPr>
-            <a:r>
-              <a:rPr>
-                <a:solidFill/>
+            </a:pPr>
+            <a:r>
+              <a:rPr sz="900" b="1">
+                <a:solidFill>
+                  <a:srgbClr val="96DD62"/>
+                </a:solidFill>
+                <a:latin typeface="Arial"/>
               </a:rPr>
               <a:t>STAFF SIDE</a:t>
             </a:r>
@@ -17948,16 +17414,13 @@
               <a:spcAft>
                 <a:spcPts val="0"/>
               </a:spcAft>
-              <a:defRPr sz="1800" b="1">
-                <a:solidFill>
-                  <a:srgbClr val="172A2B"/>
-                </a:solidFill>
-                <a:latin typeface="Aptos"/>
-              </a:defRPr>
-            </a:pPr>
-            <a:r>
-              <a:rPr>
-                <a:solidFill/>
+            </a:pPr>
+            <a:r>
+              <a:rPr sz="1800" b="1">
+                <a:solidFill>
+                  <a:srgbClr val="F6F7F5"/>
+                </a:solidFill>
+                <a:latin typeface="Arial"/>
               </a:rPr>
               <a:t>Receive, sell and fulfil</a:t>
             </a:r>
@@ -18036,16 +17499,13 @@
               <a:spcAft>
                 <a:spcPts val="0"/>
               </a:spcAft>
-              <a:defRPr sz="1400" b="0">
-                <a:solidFill>
-                  <a:srgbClr val="172A2B"/>
-                </a:solidFill>
-                <a:latin typeface="Aptos"/>
-              </a:defRPr>
-            </a:pPr>
-            <a:r>
-              <a:rPr>
-                <a:solidFill/>
+            </a:pPr>
+            <a:r>
+              <a:rPr sz="1400" b="0">
+                <a:solidFill>
+                  <a:srgbClr val="F6F7F5"/>
+                </a:solidFill>
+                <a:latin typeface="Arial"/>
               </a:rPr>
               <a:t>Warehouse &amp; barcode workflows</a:t>
             </a:r>
@@ -18124,16 +17584,13 @@
               <a:spcAft>
                 <a:spcPts val="0"/>
               </a:spcAft>
-              <a:defRPr sz="1400" b="0">
-                <a:solidFill>
-                  <a:srgbClr val="172A2B"/>
-                </a:solidFill>
-                <a:latin typeface="Aptos"/>
-              </a:defRPr>
-            </a:pPr>
-            <a:r>
-              <a:rPr>
-                <a:solidFill/>
+            </a:pPr>
+            <a:r>
+              <a:rPr sz="1400" b="0">
+                <a:solidFill>
+                  <a:srgbClr val="F6F7F5"/>
+                </a:solidFill>
+                <a:latin typeface="Arial"/>
               </a:rPr>
               <a:t>Counter POS &amp; order handling</a:t>
             </a:r>
@@ -18212,16 +17669,13 @@
               <a:spcAft>
                 <a:spcPts val="0"/>
               </a:spcAft>
-              <a:defRPr sz="1400" b="0">
-                <a:solidFill>
-                  <a:srgbClr val="172A2B"/>
-                </a:solidFill>
-                <a:latin typeface="Aptos"/>
-              </a:defRPr>
-            </a:pPr>
-            <a:r>
-              <a:rPr>
-                <a:solidFill/>
+            </a:pPr>
+            <a:r>
+              <a:rPr sz="1400" b="0">
+                <a:solidFill>
+                  <a:srgbClr val="F6F7F5"/>
+                </a:solidFill>
+                <a:latin typeface="Arial"/>
               </a:rPr>
               <a:t>Delivery, garage &amp; approvals</a:t>
             </a:r>
@@ -18300,16 +17754,13 @@
               <a:spcAft>
                 <a:spcPts val="0"/>
               </a:spcAft>
-              <a:defRPr sz="1400" b="0">
-                <a:solidFill>
-                  <a:srgbClr val="172A2B"/>
-                </a:solidFill>
-                <a:latin typeface="Aptos"/>
-              </a:defRPr>
-            </a:pPr>
-            <a:r>
-              <a:rPr>
-                <a:solidFill/>
+            </a:pPr>
+            <a:r>
+              <a:rPr sz="1400" b="0">
+                <a:solidFill>
+                  <a:srgbClr val="F6F7F5"/>
+                </a:solidFill>
+                <a:latin typeface="Arial"/>
               </a:rPr>
               <a:t>Finance, HR &amp; management</a:t>
             </a:r>
@@ -18390,16 +17841,13 @@
               <a:spcAft>
                 <a:spcPts val="0"/>
               </a:spcAft>
-              <a:defRPr sz="1600" b="1">
-                <a:solidFill>
-                  <a:srgbClr val="133B36"/>
-                </a:solidFill>
-                <a:latin typeface="Aptos"/>
-              </a:defRPr>
-            </a:pPr>
-            <a:r>
-              <a:rPr>
-                <a:solidFill/>
+            </a:pPr>
+            <a:r>
+              <a:rPr sz="1600" b="1">
+                <a:solidFill>
+                  <a:srgbClr val="080A09"/>
+                </a:solidFill>
+                <a:latin typeface="Arial"/>
               </a:rPr>
               <a:t>↔</a:t>
             </a:r>
@@ -18566,16 +18014,13 @@
               <a:spcAft>
                 <a:spcPts val="0"/>
               </a:spcAft>
-              <a:defRPr sz="1200" b="1">
-                <a:solidFill>
-                  <a:srgbClr val="FFFFFF"/>
-                </a:solidFill>
-                <a:latin typeface="Aptos"/>
-              </a:defRPr>
-            </a:pPr>
-            <a:r>
-              <a:rPr>
-                <a:solidFill/>
+            </a:pPr>
+            <a:r>
+              <a:rPr sz="1200" b="1">
+                <a:solidFill>
+                  <a:srgbClr val="F6F7F5"/>
+                </a:solidFill>
+                <a:latin typeface="Arial"/>
               </a:rPr>
               <a:t>SHILATECH  /  AUTO SPARES</a:t>
             </a:r>
@@ -18611,16 +18056,13 @@
               <a:spcAft>
                 <a:spcPts val="0"/>
               </a:spcAft>
-              <a:defRPr sz="900" b="1">
-                <a:solidFill>
-                  <a:srgbClr val="C5EB68"/>
-                </a:solidFill>
-                <a:latin typeface="Aptos"/>
-              </a:defRPr>
-            </a:pPr>
-            <a:r>
-              <a:rPr>
-                <a:solidFill/>
+            </a:pPr>
+            <a:r>
+              <a:rPr sz="900" b="1">
+                <a:solidFill>
+                  <a:srgbClr val="9AE367"/>
+                </a:solidFill>
+                <a:latin typeface="Arial"/>
               </a:rPr>
               <a:t>INVENTORY &amp; SALES</a:t>
             </a:r>
@@ -18742,16 +18184,13 @@
               <a:spcAft>
                 <a:spcPts val="0"/>
               </a:spcAft>
-              <a:defRPr sz="900" b="0">
-                <a:solidFill>
-                  <a:srgbClr val="8FA39C"/>
-                </a:solidFill>
-                <a:latin typeface="Aptos"/>
-              </a:defRPr>
-            </a:pPr>
-            <a:r>
-              <a:rPr>
-                <a:solidFill/>
+            </a:pPr>
+            <a:r>
+              <a:rPr sz="900" b="0">
+                <a:solidFill>
+                  <a:srgbClr val="A6B5A7"/>
+                </a:solidFill>
+                <a:latin typeface="Arial"/>
               </a:rPr>
               <a:t>CORPORATE PLATFORM OVERVIEW  •  OCT 2026</a:t>
             </a:r>
@@ -18787,16 +18226,13 @@
               <a:spcAft>
                 <a:spcPts val="0"/>
               </a:spcAft>
-              <a:defRPr sz="900" b="1">
-                <a:solidFill>
-                  <a:srgbClr val="C5EB68"/>
-                </a:solidFill>
-                <a:latin typeface="Aptos"/>
-              </a:defRPr>
-            </a:pPr>
-            <a:r>
-              <a:rPr>
-                <a:solidFill/>
+            </a:pPr>
+            <a:r>
+              <a:rPr sz="900" b="1">
+                <a:solidFill>
+                  <a:srgbClr val="9AE367"/>
+                </a:solidFill>
+                <a:latin typeface="Arial"/>
               </a:rPr>
               <a:t>05 / 13</a:t>
             </a:r>
@@ -18832,16 +18268,13 @@
               <a:spcAft>
                 <a:spcPts val="0"/>
               </a:spcAft>
-              <a:defRPr sz="900" b="1">
-                <a:solidFill>
-                  <a:srgbClr val="C5EB68"/>
-                </a:solidFill>
-                <a:latin typeface="Aptos"/>
-              </a:defRPr>
-            </a:pPr>
-            <a:r>
-              <a:rPr>
-                <a:solidFill/>
+            </a:pPr>
+            <a:r>
+              <a:rPr sz="900" b="1">
+                <a:solidFill>
+                  <a:srgbClr val="9AE367"/>
+                </a:solidFill>
+                <a:latin typeface="Arial"/>
               </a:rPr>
               <a:t>THE OPERATIONAL CORE</a:t>
             </a:r>
@@ -18877,16 +18310,13 @@
               <a:spcAft>
                 <a:spcPts val="0"/>
               </a:spcAft>
-              <a:defRPr sz="2900" b="1">
-                <a:solidFill>
-                  <a:srgbClr val="FFFFFF"/>
-                </a:solidFill>
-                <a:latin typeface="Aptos"/>
-              </a:defRPr>
-            </a:pPr>
-            <a:r>
-              <a:rPr>
-                <a:solidFill/>
+            </a:pPr>
+            <a:r>
+              <a:rPr sz="2900" b="1">
+                <a:solidFill>
+                  <a:srgbClr val="F6F7F5"/>
+                </a:solidFill>
+                <a:latin typeface="Arial"/>
               </a:rPr>
               <a:t>Stock discipline across two sales channels</a:t>
             </a:r>
@@ -18922,16 +18352,13 @@
               <a:spcAft>
                 <a:spcPts val="0"/>
               </a:spcAft>
-              <a:defRPr sz="1300" b="0">
-                <a:solidFill>
-                  <a:srgbClr val="B5C6BF"/>
-                </a:solidFill>
-                <a:latin typeface="Aptos"/>
-              </a:defRPr>
-            </a:pPr>
-            <a:r>
-              <a:rPr>
-                <a:solidFill/>
+            </a:pPr>
+            <a:r>
+              <a:rPr sz="1300" b="0">
+                <a:solidFill>
+                  <a:srgbClr val="C3D0C2"/>
+                </a:solidFill>
+                <a:latin typeface="Arial"/>
               </a:rPr>
               <a:t>Batch-based receiving and shared availability connect warehouse activity to online and counter sales.</a:t>
             </a:r>
@@ -19057,16 +18484,13 @@
               <a:spcAft>
                 <a:spcPts val="0"/>
               </a:spcAft>
-              <a:defRPr sz="2200" b="1">
-                <a:solidFill>
-                  <a:srgbClr val="C5EB68"/>
-                </a:solidFill>
-                <a:latin typeface="Aptos"/>
-              </a:defRPr>
-            </a:pPr>
-            <a:r>
-              <a:rPr>
-                <a:solidFill/>
+            </a:pPr>
+            <a:r>
+              <a:rPr sz="2200" b="1">
+                <a:solidFill>
+                  <a:srgbClr val="9AE367"/>
+                </a:solidFill>
+                <a:latin typeface="Arial"/>
               </a:rPr>
               <a:t>01</a:t>
             </a:r>
@@ -19102,16 +18526,13 @@
               <a:spcAft>
                 <a:spcPts val="0"/>
               </a:spcAft>
-              <a:defRPr sz="900" b="1">
-                <a:solidFill>
-                  <a:srgbClr val="C5EB68"/>
-                </a:solidFill>
-                <a:latin typeface="Aptos"/>
-              </a:defRPr>
-            </a:pPr>
-            <a:r>
-              <a:rPr>
-                <a:solidFill/>
+            </a:pPr>
+            <a:r>
+              <a:rPr sz="900" b="1">
+                <a:solidFill>
+                  <a:srgbClr val="9AE367"/>
+                </a:solidFill>
+                <a:latin typeface="Arial"/>
               </a:rPr>
               <a:t>RECEIVE</a:t>
             </a:r>
@@ -19147,16 +18568,13 @@
               <a:spcAft>
                 <a:spcPts val="0"/>
               </a:spcAft>
-              <a:defRPr sz="1300" b="0">
-                <a:solidFill>
-                  <a:srgbClr val="FFFFFF"/>
-                </a:solidFill>
-                <a:latin typeface="Aptos"/>
-              </a:defRPr>
-            </a:pPr>
-            <a:r>
-              <a:rPr>
-                <a:solidFill/>
+            </a:pPr>
+            <a:r>
+              <a:rPr sz="1300" b="0">
+                <a:solidFill>
+                  <a:srgbClr val="F6F7F5"/>
+                </a:solidFill>
+                <a:latin typeface="Arial"/>
               </a:rPr>
               <a:t>Log inbound batches</a:t>
             </a:r>
@@ -19166,16 +18584,13 @@
               <a:spcAft>
                 <a:spcPts val="0"/>
               </a:spcAft>
-              <a:defRPr sz="1300" b="0">
-                <a:solidFill>
-                  <a:srgbClr val="FFFFFF"/>
-                </a:solidFill>
-                <a:latin typeface="Aptos"/>
-              </a:defRPr>
-            </a:pPr>
-            <a:r>
-              <a:rPr>
-                <a:solidFill/>
+            </a:pPr>
+            <a:r>
+              <a:rPr sz="1300" b="0">
+                <a:solidFill>
+                  <a:srgbClr val="F6F7F5"/>
+                </a:solidFill>
+                <a:latin typeface="Arial"/>
               </a:rPr>
               <a:t>and purchase costs</a:t>
             </a:r>
@@ -19211,16 +18626,13 @@
               <a:spcAft>
                 <a:spcPts val="0"/>
               </a:spcAft>
-              <a:defRPr sz="1700" b="1">
-                <a:solidFill>
-                  <a:srgbClr val="C5EB68"/>
-                </a:solidFill>
-                <a:latin typeface="Aptos"/>
-              </a:defRPr>
-            </a:pPr>
-            <a:r>
-              <a:rPr>
-                <a:solidFill/>
+            </a:pPr>
+            <a:r>
+              <a:rPr sz="1700" b="1">
+                <a:solidFill>
+                  <a:srgbClr val="9AE367"/>
+                </a:solidFill>
+                <a:latin typeface="Arial"/>
               </a:rPr>
               <a:t>→</a:t>
             </a:r>
@@ -19303,16 +18715,13 @@
               <a:spcAft>
                 <a:spcPts val="0"/>
               </a:spcAft>
-              <a:defRPr sz="2200" b="1">
-                <a:solidFill>
-                  <a:srgbClr val="C5EB68"/>
-                </a:solidFill>
-                <a:latin typeface="Aptos"/>
-              </a:defRPr>
-            </a:pPr>
-            <a:r>
-              <a:rPr>
-                <a:solidFill/>
+            </a:pPr>
+            <a:r>
+              <a:rPr sz="2200" b="1">
+                <a:solidFill>
+                  <a:srgbClr val="9AE367"/>
+                </a:solidFill>
+                <a:latin typeface="Arial"/>
               </a:rPr>
               <a:t>02</a:t>
             </a:r>
@@ -19348,16 +18757,13 @@
               <a:spcAft>
                 <a:spcPts val="0"/>
               </a:spcAft>
-              <a:defRPr sz="900" b="1">
-                <a:solidFill>
-                  <a:srgbClr val="C5EB68"/>
-                </a:solidFill>
-                <a:latin typeface="Aptos"/>
-              </a:defRPr>
-            </a:pPr>
-            <a:r>
-              <a:rPr>
-                <a:solidFill/>
+            </a:pPr>
+            <a:r>
+              <a:rPr sz="900" b="1">
+                <a:solidFill>
+                  <a:srgbClr val="9AE367"/>
+                </a:solidFill>
+                <a:latin typeface="Arial"/>
               </a:rPr>
               <a:t>CHECK</a:t>
             </a:r>
@@ -19393,16 +18799,13 @@
               <a:spcAft>
                 <a:spcPts val="0"/>
               </a:spcAft>
-              <a:defRPr sz="1300" b="0">
-                <a:solidFill>
-                  <a:srgbClr val="FFFFFF"/>
-                </a:solidFill>
-                <a:latin typeface="Aptos"/>
-              </a:defRPr>
-            </a:pPr>
-            <a:r>
-              <a:rPr>
-                <a:solidFill/>
+            </a:pPr>
+            <a:r>
+              <a:rPr sz="1300" b="0">
+                <a:solidFill>
+                  <a:srgbClr val="F6F7F5"/>
+                </a:solidFill>
+                <a:latin typeface="Arial"/>
               </a:rPr>
               <a:t>Reconcile sellable stock</a:t>
             </a:r>
@@ -19412,16 +18815,13 @@
               <a:spcAft>
                 <a:spcPts val="0"/>
               </a:spcAft>
-              <a:defRPr sz="1300" b="0">
-                <a:solidFill>
-                  <a:srgbClr val="FFFFFF"/>
-                </a:solidFill>
-                <a:latin typeface="Aptos"/>
-              </a:defRPr>
-            </a:pPr>
-            <a:r>
-              <a:rPr>
-                <a:solidFill/>
+            </a:pPr>
+            <a:r>
+              <a:rPr sz="1300" b="0">
+                <a:solidFill>
+                  <a:srgbClr val="F6F7F5"/>
+                </a:solidFill>
+                <a:latin typeface="Arial"/>
               </a:rPr>
               <a:t>and online reservations</a:t>
             </a:r>
@@ -19457,16 +18857,13 @@
               <a:spcAft>
                 <a:spcPts val="0"/>
               </a:spcAft>
-              <a:defRPr sz="1700" b="1">
-                <a:solidFill>
-                  <a:srgbClr val="C5EB68"/>
-                </a:solidFill>
-                <a:latin typeface="Aptos"/>
-              </a:defRPr>
-            </a:pPr>
-            <a:r>
-              <a:rPr>
-                <a:solidFill/>
+            </a:pPr>
+            <a:r>
+              <a:rPr sz="1700" b="1">
+                <a:solidFill>
+                  <a:srgbClr val="9AE367"/>
+                </a:solidFill>
+                <a:latin typeface="Arial"/>
               </a:rPr>
               <a:t>→</a:t>
             </a:r>
@@ -19549,16 +18946,13 @@
               <a:spcAft>
                 <a:spcPts val="0"/>
               </a:spcAft>
-              <a:defRPr sz="2200" b="1">
-                <a:solidFill>
-                  <a:srgbClr val="C5EB68"/>
-                </a:solidFill>
-                <a:latin typeface="Aptos"/>
-              </a:defRPr>
-            </a:pPr>
-            <a:r>
-              <a:rPr>
-                <a:solidFill/>
+            </a:pPr>
+            <a:r>
+              <a:rPr sz="2200" b="1">
+                <a:solidFill>
+                  <a:srgbClr val="9AE367"/>
+                </a:solidFill>
+                <a:latin typeface="Arial"/>
               </a:rPr>
               <a:t>03</a:t>
             </a:r>
@@ -19594,16 +18988,13 @@
               <a:spcAft>
                 <a:spcPts val="0"/>
               </a:spcAft>
-              <a:defRPr sz="900" b="1">
-                <a:solidFill>
-                  <a:srgbClr val="C5EB68"/>
-                </a:solidFill>
-                <a:latin typeface="Aptos"/>
-              </a:defRPr>
-            </a:pPr>
-            <a:r>
-              <a:rPr>
-                <a:solidFill/>
+            </a:pPr>
+            <a:r>
+              <a:rPr sz="900" b="1">
+                <a:solidFill>
+                  <a:srgbClr val="9AE367"/>
+                </a:solidFill>
+                <a:latin typeface="Arial"/>
               </a:rPr>
               <a:t>SELL</a:t>
             </a:r>
@@ -19639,16 +19030,13 @@
               <a:spcAft>
                 <a:spcPts val="0"/>
               </a:spcAft>
-              <a:defRPr sz="1300" b="0">
-                <a:solidFill>
-                  <a:srgbClr val="FFFFFF"/>
-                </a:solidFill>
-                <a:latin typeface="Aptos"/>
-              </a:defRPr>
-            </a:pPr>
-            <a:r>
-              <a:rPr>
-                <a:solidFill/>
+            </a:pPr>
+            <a:r>
+              <a:rPr sz="1300" b="0">
+                <a:solidFill>
+                  <a:srgbClr val="F6F7F5"/>
+                </a:solidFill>
+                <a:latin typeface="Arial"/>
               </a:rPr>
               <a:t>Online order or</a:t>
             </a:r>
@@ -19658,16 +19046,13 @@
               <a:spcAft>
                 <a:spcPts val="0"/>
               </a:spcAft>
-              <a:defRPr sz="1300" b="0">
-                <a:solidFill>
-                  <a:srgbClr val="FFFFFF"/>
-                </a:solidFill>
-                <a:latin typeface="Aptos"/>
-              </a:defRPr>
-            </a:pPr>
-            <a:r>
-              <a:rPr>
-                <a:solidFill/>
+            </a:pPr>
+            <a:r>
+              <a:rPr sz="1300" b="0">
+                <a:solidFill>
+                  <a:srgbClr val="F6F7F5"/>
+                </a:solidFill>
+                <a:latin typeface="Arial"/>
               </a:rPr>
               <a:t>counter POS sale</a:t>
             </a:r>
@@ -19703,16 +19088,13 @@
               <a:spcAft>
                 <a:spcPts val="0"/>
               </a:spcAft>
-              <a:defRPr sz="1700" b="1">
-                <a:solidFill>
-                  <a:srgbClr val="C5EB68"/>
-                </a:solidFill>
-                <a:latin typeface="Aptos"/>
-              </a:defRPr>
-            </a:pPr>
-            <a:r>
-              <a:rPr>
-                <a:solidFill/>
+            </a:pPr>
+            <a:r>
+              <a:rPr sz="1700" b="1">
+                <a:solidFill>
+                  <a:srgbClr val="9AE367"/>
+                </a:solidFill>
+                <a:latin typeface="Arial"/>
               </a:rPr>
               <a:t>→</a:t>
             </a:r>
@@ -19795,16 +19177,13 @@
               <a:spcAft>
                 <a:spcPts val="0"/>
               </a:spcAft>
-              <a:defRPr sz="2200" b="1">
-                <a:solidFill>
-                  <a:srgbClr val="C5EB68"/>
-                </a:solidFill>
-                <a:latin typeface="Aptos"/>
-              </a:defRPr>
-            </a:pPr>
-            <a:r>
-              <a:rPr>
-                <a:solidFill/>
+            </a:pPr>
+            <a:r>
+              <a:rPr sz="2200" b="1">
+                <a:solidFill>
+                  <a:srgbClr val="9AE367"/>
+                </a:solidFill>
+                <a:latin typeface="Arial"/>
               </a:rPr>
               <a:t>04</a:t>
             </a:r>
@@ -19840,16 +19219,13 @@
               <a:spcAft>
                 <a:spcPts val="0"/>
               </a:spcAft>
-              <a:defRPr sz="900" b="1">
-                <a:solidFill>
-                  <a:srgbClr val="C5EB68"/>
-                </a:solidFill>
-                <a:latin typeface="Aptos"/>
-              </a:defRPr>
-            </a:pPr>
-            <a:r>
-              <a:rPr>
-                <a:solidFill/>
+            </a:pPr>
+            <a:r>
+              <a:rPr sz="900" b="1">
+                <a:solidFill>
+                  <a:srgbClr val="9AE367"/>
+                </a:solidFill>
+                <a:latin typeface="Arial"/>
               </a:rPr>
               <a:t>TRACE</a:t>
             </a:r>
@@ -19885,16 +19261,13 @@
               <a:spcAft>
                 <a:spcPts val="0"/>
               </a:spcAft>
-              <a:defRPr sz="1300" b="0">
-                <a:solidFill>
-                  <a:srgbClr val="FFFFFF"/>
-                </a:solidFill>
-                <a:latin typeface="Aptos"/>
-              </a:defRPr>
-            </a:pPr>
-            <a:r>
-              <a:rPr>
-                <a:solidFill/>
+            </a:pPr>
+            <a:r>
+              <a:rPr sz="1300" b="0">
+                <a:solidFill>
+                  <a:srgbClr val="F6F7F5"/>
+                </a:solidFill>
+                <a:latin typeface="Arial"/>
               </a:rPr>
               <a:t>Record movement,</a:t>
             </a:r>
@@ -19904,16 +19277,13 @@
               <a:spcAft>
                 <a:spcPts val="0"/>
               </a:spcAft>
-              <a:defRPr sz="1300" b="0">
-                <a:solidFill>
-                  <a:srgbClr val="FFFFFF"/>
-                </a:solidFill>
-                <a:latin typeface="Aptos"/>
-              </a:defRPr>
-            </a:pPr>
-            <a:r>
-              <a:rPr>
-                <a:solidFill/>
+            </a:pPr>
+            <a:r>
+              <a:rPr sz="1300" b="0">
+                <a:solidFill>
+                  <a:srgbClr val="F6F7F5"/>
+                </a:solidFill>
+                <a:latin typeface="Arial"/>
               </a:rPr>
               <a:t>receipt and audit trail</a:t>
             </a:r>
@@ -19996,16 +19366,13 @@
               <a:spcAft>
                 <a:spcPts val="0"/>
               </a:spcAft>
-              <a:defRPr sz="1100" b="1">
-                <a:solidFill>
-                  <a:srgbClr val="C5EB68"/>
-                </a:solidFill>
-                <a:latin typeface="Aptos"/>
-              </a:defRPr>
-            </a:pPr>
-            <a:r>
-              <a:rPr>
-                <a:solidFill/>
+            </a:pPr>
+            <a:r>
+              <a:rPr sz="1100" b="1">
+                <a:solidFill>
+                  <a:srgbClr val="9AE367"/>
+                </a:solidFill>
+                <a:latin typeface="Arial"/>
               </a:rPr>
               <a:t>CURRENT BOUNDARY</a:t>
             </a:r>
@@ -20041,16 +19408,13 @@
               <a:spcAft>
                 <a:spcPts val="0"/>
               </a:spcAft>
-              <a:defRPr sz="1400" b="0">
-                <a:solidFill>
-                  <a:srgbClr val="FFFFFF"/>
-                </a:solidFill>
-                <a:latin typeface="Aptos"/>
-              </a:defRPr>
-            </a:pPr>
-            <a:r>
-              <a:rPr>
-                <a:solidFill/>
+            </a:pPr>
+            <a:r>
+              <a:rPr sz="1400" b="0">
+                <a:solidFill>
+                  <a:srgbClr val="F6F7F5"/>
+                </a:solidFill>
+                <a:latin typeface="Arial"/>
               </a:rPr>
               <a:t>MAIN location is the active sales location; multi-branch transfers are a future phase, not a current capability.</a:t>
             </a:r>
@@ -20217,16 +19581,13 @@
               <a:spcAft>
                 <a:spcPts val="0"/>
               </a:spcAft>
-              <a:defRPr sz="1200" b="1">
-                <a:solidFill>
-                  <a:srgbClr val="133B36"/>
-                </a:solidFill>
-                <a:latin typeface="Aptos"/>
-              </a:defRPr>
-            </a:pPr>
-            <a:r>
-              <a:rPr>
-                <a:solidFill/>
+            </a:pPr>
+            <a:r>
+              <a:rPr sz="1200" b="1">
+                <a:solidFill>
+                  <a:srgbClr val="9DDD71"/>
+                </a:solidFill>
+                <a:latin typeface="Arial"/>
               </a:rPr>
               <a:t>SHILATECH  /  AUTO SPARES</a:t>
             </a:r>
@@ -20262,16 +19623,13 @@
               <a:spcAft>
                 <a:spcPts val="0"/>
               </a:spcAft>
-              <a:defRPr sz="900" b="1">
-                <a:solidFill>
-                  <a:srgbClr val="1A4C42"/>
-                </a:solidFill>
-                <a:latin typeface="Aptos"/>
-              </a:defRPr>
-            </a:pPr>
-            <a:r>
-              <a:rPr>
-                <a:solidFill/>
+            </a:pPr>
+            <a:r>
+              <a:rPr sz="900" b="1">
+                <a:solidFill>
+                  <a:srgbClr val="96DD62"/>
+                </a:solidFill>
+                <a:latin typeface="Arial"/>
               </a:rPr>
               <a:t>SERVICE OPERATIONS</a:t>
             </a:r>
@@ -20393,16 +19751,13 @@
               <a:spcAft>
                 <a:spcPts val="0"/>
               </a:spcAft>
-              <a:defRPr sz="900" b="0">
-                <a:solidFill>
-                  <a:srgbClr val="667978"/>
-                </a:solidFill>
-                <a:latin typeface="Aptos"/>
-              </a:defRPr>
-            </a:pPr>
-            <a:r>
-              <a:rPr>
-                <a:solidFill/>
+            </a:pPr>
+            <a:r>
+              <a:rPr sz="900" b="0">
+                <a:solidFill>
+                  <a:srgbClr val="B7C1B3"/>
+                </a:solidFill>
+                <a:latin typeface="Arial"/>
               </a:rPr>
               <a:t>CORPORATE PLATFORM OVERVIEW  •  OCT 2026</a:t>
             </a:r>
@@ -20438,16 +19793,13 @@
               <a:spcAft>
                 <a:spcPts val="0"/>
               </a:spcAft>
-              <a:defRPr sz="900" b="1">
-                <a:solidFill>
-                  <a:srgbClr val="133B36"/>
-                </a:solidFill>
-                <a:latin typeface="Aptos"/>
-              </a:defRPr>
-            </a:pPr>
-            <a:r>
-              <a:rPr>
-                <a:solidFill/>
+            </a:pPr>
+            <a:r>
+              <a:rPr sz="900" b="1">
+                <a:solidFill>
+                  <a:srgbClr val="9DDD71"/>
+                </a:solidFill>
+                <a:latin typeface="Arial"/>
               </a:rPr>
               <a:t>06 / 13</a:t>
             </a:r>
@@ -20483,16 +19835,13 @@
               <a:spcAft>
                 <a:spcPts val="0"/>
               </a:spcAft>
-              <a:defRPr sz="900" b="1">
-                <a:solidFill>
-                  <a:srgbClr val="1A4C42"/>
-                </a:solidFill>
-                <a:latin typeface="Aptos"/>
-              </a:defRPr>
-            </a:pPr>
-            <a:r>
-              <a:rPr>
-                <a:solidFill/>
+            </a:pPr>
+            <a:r>
+              <a:rPr sz="900" b="1">
+                <a:solidFill>
+                  <a:srgbClr val="96DD62"/>
+                </a:solidFill>
+                <a:latin typeface="Arial"/>
               </a:rPr>
               <a:t>AFTER THE SALE</a:t>
             </a:r>
@@ -20528,16 +19877,13 @@
               <a:spcAft>
                 <a:spcPts val="0"/>
               </a:spcAft>
-              <a:defRPr sz="2900" b="1">
-                <a:solidFill>
-                  <a:srgbClr val="172A2B"/>
-                </a:solidFill>
-                <a:latin typeface="Aptos"/>
-              </a:defRPr>
-            </a:pPr>
-            <a:r>
-              <a:rPr>
-                <a:solidFill/>
+            </a:pPr>
+            <a:r>
+              <a:rPr sz="2900" b="1">
+                <a:solidFill>
+                  <a:srgbClr val="F6F7F5"/>
+                </a:solidFill>
+                <a:latin typeface="Arial"/>
               </a:rPr>
               <a:t>Turn an order into a coordinated handoff</a:t>
             </a:r>
@@ -20573,16 +19919,13 @@
               <a:spcAft>
                 <a:spcPts val="0"/>
               </a:spcAft>
-              <a:defRPr sz="1300" b="0">
-                <a:solidFill>
-                  <a:srgbClr val="667978"/>
-                </a:solidFill>
-                <a:latin typeface="Aptos"/>
-              </a:defRPr>
-            </a:pPr>
-            <a:r>
-              <a:rPr>
-                <a:solidFill/>
+            </a:pPr>
+            <a:r>
+              <a:rPr sz="1300" b="0">
+                <a:solidFill>
+                  <a:srgbClr val="B7C1B3"/>
+                </a:solidFill>
+                <a:latin typeface="Arial"/>
               </a:rPr>
               <a:t>Operational workspaces give teams a place to track the next action—not only the initial transaction.</a:t>
             </a:r>
@@ -20753,16 +20096,13 @@
               <a:spcAft>
                 <a:spcPts val="0"/>
               </a:spcAft>
-              <a:defRPr sz="1300" b="1">
-                <a:solidFill>
-                  <a:srgbClr val="C5EB68"/>
-                </a:solidFill>
-                <a:latin typeface="Aptos"/>
-              </a:defRPr>
-            </a:pPr>
-            <a:r>
-              <a:rPr>
-                <a:solidFill/>
+            </a:pPr>
+            <a:r>
+              <a:rPr sz="1300" b="1">
+                <a:solidFill>
+                  <a:srgbClr val="9AE367"/>
+                </a:solidFill>
+                <a:latin typeface="Arial"/>
               </a:rPr>
               <a:t>01</a:t>
             </a:r>
@@ -20798,16 +20138,13 @@
               <a:spcAft>
                 <a:spcPts val="0"/>
               </a:spcAft>
-              <a:defRPr sz="1800" b="1">
-                <a:solidFill>
-                  <a:srgbClr val="172A2B"/>
-                </a:solidFill>
-                <a:latin typeface="Aptos"/>
-              </a:defRPr>
-            </a:pPr>
-            <a:r>
-              <a:rPr>
-                <a:solidFill/>
+            </a:pPr>
+            <a:r>
+              <a:rPr sz="1800" b="1">
+                <a:solidFill>
+                  <a:srgbClr val="F6F7F5"/>
+                </a:solidFill>
+                <a:latin typeface="Arial"/>
               </a:rPr>
               <a:t>Order handling</a:t>
             </a:r>
@@ -20843,16 +20180,13 @@
               <a:spcAft>
                 <a:spcPts val="0"/>
               </a:spcAft>
-              <a:defRPr sz="1200" b="0">
-                <a:solidFill>
-                  <a:srgbClr val="667978"/>
-                </a:solidFill>
-                <a:latin typeface="Aptos"/>
-              </a:defRPr>
-            </a:pPr>
-            <a:r>
-              <a:rPr>
-                <a:solidFill/>
+            </a:pPr>
+            <a:r>
+              <a:rPr sz="1200" b="0">
+                <a:solidFill>
+                  <a:srgbClr val="B7C1B3"/>
+                </a:solidFill>
+                <a:latin typeface="Arial"/>
               </a:rPr>
               <a:t>Staff review order details and progress warehouse picking.</a:t>
             </a:r>
@@ -20980,16 +20314,13 @@
               <a:spcAft>
                 <a:spcPts val="0"/>
               </a:spcAft>
-              <a:defRPr sz="1300" b="1">
-                <a:solidFill>
-                  <a:srgbClr val="C5EB68"/>
-                </a:solidFill>
-                <a:latin typeface="Aptos"/>
-              </a:defRPr>
-            </a:pPr>
-            <a:r>
-              <a:rPr>
-                <a:solidFill/>
+            </a:pPr>
+            <a:r>
+              <a:rPr sz="1300" b="1">
+                <a:solidFill>
+                  <a:srgbClr val="9AE367"/>
+                </a:solidFill>
+                <a:latin typeface="Arial"/>
               </a:rPr>
               <a:t>02</a:t>
             </a:r>
@@ -21025,16 +20356,13 @@
               <a:spcAft>
                 <a:spcPts val="0"/>
               </a:spcAft>
-              <a:defRPr sz="1800" b="1">
-                <a:solidFill>
-                  <a:srgbClr val="172A2B"/>
-                </a:solidFill>
-                <a:latin typeface="Aptos"/>
-              </a:defRPr>
-            </a:pPr>
-            <a:r>
-              <a:rPr>
-                <a:solidFill/>
+            </a:pPr>
+            <a:r>
+              <a:rPr sz="1800" b="1">
+                <a:solidFill>
+                  <a:srgbClr val="F6F7F5"/>
+                </a:solidFill>
+                <a:latin typeface="Arial"/>
               </a:rPr>
               <a:t>Delivery</a:t>
             </a:r>
@@ -21070,16 +20398,13 @@
               <a:spcAft>
                 <a:spcPts val="0"/>
               </a:spcAft>
-              <a:defRPr sz="1200" b="0">
-                <a:solidFill>
-                  <a:srgbClr val="667978"/>
-                </a:solidFill>
-                <a:latin typeface="Aptos"/>
-              </a:defRPr>
-            </a:pPr>
-            <a:r>
-              <a:rPr>
-                <a:solidFill/>
+            </a:pPr>
+            <a:r>
+              <a:rPr sz="1200" b="0">
+                <a:solidFill>
+                  <a:srgbClr val="B7C1B3"/>
+                </a:solidFill>
+                <a:latin typeface="Arial"/>
               </a:rPr>
               <a:t>Delivery views help manage fulfilment and completion.</a:t>
             </a:r>
@@ -21207,16 +20532,13 @@
               <a:spcAft>
                 <a:spcPts val="0"/>
               </a:spcAft>
-              <a:defRPr sz="1300" b="1">
-                <a:solidFill>
-                  <a:srgbClr val="C5EB68"/>
-                </a:solidFill>
-                <a:latin typeface="Aptos"/>
-              </a:defRPr>
-            </a:pPr>
-            <a:r>
-              <a:rPr>
-                <a:solidFill/>
+            </a:pPr>
+            <a:r>
+              <a:rPr sz="1300" b="1">
+                <a:solidFill>
+                  <a:srgbClr val="9AE367"/>
+                </a:solidFill>
+                <a:latin typeface="Arial"/>
               </a:rPr>
               <a:t>03</a:t>
             </a:r>
@@ -21252,16 +20574,13 @@
               <a:spcAft>
                 <a:spcPts val="0"/>
               </a:spcAft>
-              <a:defRPr sz="1800" b="1">
-                <a:solidFill>
-                  <a:srgbClr val="172A2B"/>
-                </a:solidFill>
-                <a:latin typeface="Aptos"/>
-              </a:defRPr>
-            </a:pPr>
-            <a:r>
-              <a:rPr>
-                <a:solidFill/>
+            </a:pPr>
+            <a:r>
+              <a:rPr sz="1800" b="1">
+                <a:solidFill>
+                  <a:srgbClr val="F6F7F5"/>
+                </a:solidFill>
+                <a:latin typeface="Arial"/>
               </a:rPr>
               <a:t>Garage &amp; workshop</a:t>
             </a:r>
@@ -21297,16 +20616,13 @@
               <a:spcAft>
                 <a:spcPts val="0"/>
               </a:spcAft>
-              <a:defRPr sz="1200" b="0">
-                <a:solidFill>
-                  <a:srgbClr val="667978"/>
-                </a:solidFill>
-                <a:latin typeface="Aptos"/>
-              </a:defRPr>
-            </a:pPr>
-            <a:r>
-              <a:rPr>
-                <a:solidFill/>
+            </a:pPr>
+            <a:r>
+              <a:rPr sz="1200" b="0">
+                <a:solidFill>
+                  <a:srgbClr val="B7C1B3"/>
+                </a:solidFill>
+                <a:latin typeface="Arial"/>
               </a:rPr>
               <a:t>Service requests and garage jobs sit alongside parts activity.</a:t>
             </a:r>
@@ -21434,16 +20750,13 @@
               <a:spcAft>
                 <a:spcPts val="0"/>
               </a:spcAft>
-              <a:defRPr sz="1300" b="1">
-                <a:solidFill>
-                  <a:srgbClr val="C5EB68"/>
-                </a:solidFill>
-                <a:latin typeface="Aptos"/>
-              </a:defRPr>
-            </a:pPr>
-            <a:r>
-              <a:rPr>
-                <a:solidFill/>
+            </a:pPr>
+            <a:r>
+              <a:rPr sz="1300" b="1">
+                <a:solidFill>
+                  <a:srgbClr val="9AE367"/>
+                </a:solidFill>
+                <a:latin typeface="Arial"/>
               </a:rPr>
               <a:t>04</a:t>
             </a:r>
@@ -21479,16 +20792,13 @@
               <a:spcAft>
                 <a:spcPts val="0"/>
               </a:spcAft>
-              <a:defRPr sz="1800" b="1">
-                <a:solidFill>
-                  <a:srgbClr val="172A2B"/>
-                </a:solidFill>
-                <a:latin typeface="Aptos"/>
-              </a:defRPr>
-            </a:pPr>
-            <a:r>
-              <a:rPr>
-                <a:solidFill/>
+            </a:pPr>
+            <a:r>
+              <a:rPr sz="1800" b="1">
+                <a:solidFill>
+                  <a:srgbClr val="F6F7F5"/>
+                </a:solidFill>
+                <a:latin typeface="Arial"/>
               </a:rPr>
               <a:t>Returns &amp; exceptions</a:t>
             </a:r>
@@ -21524,16 +20834,13 @@
               <a:spcAft>
                 <a:spcPts val="0"/>
               </a:spcAft>
-              <a:defRPr sz="1200" b="0">
-                <a:solidFill>
-                  <a:srgbClr val="667978"/>
-                </a:solidFill>
-                <a:latin typeface="Aptos"/>
-              </a:defRPr>
-            </a:pPr>
-            <a:r>
-              <a:rPr>
-                <a:solidFill/>
+            </a:pPr>
+            <a:r>
+              <a:rPr sz="1200" b="0">
+                <a:solidFill>
+                  <a:srgbClr val="B7C1B3"/>
+                </a:solidFill>
+                <a:latin typeface="Arial"/>
               </a:rPr>
               <a:t>Returns and approvals create visible review points for exceptions.</a:t>
             </a:r>
@@ -21700,16 +21007,13 @@
               <a:spcAft>
                 <a:spcPts val="0"/>
               </a:spcAft>
-              <a:defRPr sz="1200" b="1">
-                <a:solidFill>
-                  <a:srgbClr val="133B36"/>
-                </a:solidFill>
-                <a:latin typeface="Aptos"/>
-              </a:defRPr>
-            </a:pPr>
-            <a:r>
-              <a:rPr>
-                <a:solidFill/>
+            </a:pPr>
+            <a:r>
+              <a:rPr sz="1200" b="1">
+                <a:solidFill>
+                  <a:srgbClr val="9DDD71"/>
+                </a:solidFill>
+                <a:latin typeface="Arial"/>
               </a:rPr>
               <a:t>SHILATECH  /  AUTO SPARES</a:t>
             </a:r>
@@ -21745,16 +21049,13 @@
               <a:spcAft>
                 <a:spcPts val="0"/>
               </a:spcAft>
-              <a:defRPr sz="900" b="1">
-                <a:solidFill>
-                  <a:srgbClr val="1A4C42"/>
-                </a:solidFill>
-                <a:latin typeface="Aptos"/>
-              </a:defRPr>
-            </a:pPr>
-            <a:r>
-              <a:rPr>
-                <a:solidFill/>
+            </a:pPr>
+            <a:r>
+              <a:rPr sz="900" b="1">
+                <a:solidFill>
+                  <a:srgbClr val="96DD62"/>
+                </a:solidFill>
+                <a:latin typeface="Arial"/>
               </a:rPr>
               <a:t>BUSINESS MANAGEMENT</a:t>
             </a:r>
@@ -21876,16 +21177,13 @@
               <a:spcAft>
                 <a:spcPts val="0"/>
               </a:spcAft>
-              <a:defRPr sz="900" b="0">
-                <a:solidFill>
-                  <a:srgbClr val="667978"/>
-                </a:solidFill>
-                <a:latin typeface="Aptos"/>
-              </a:defRPr>
-            </a:pPr>
-            <a:r>
-              <a:rPr>
-                <a:solidFill/>
+            </a:pPr>
+            <a:r>
+              <a:rPr sz="900" b="0">
+                <a:solidFill>
+                  <a:srgbClr val="B7C1B3"/>
+                </a:solidFill>
+                <a:latin typeface="Arial"/>
               </a:rPr>
               <a:t>CORPORATE PLATFORM OVERVIEW  •  OCT 2026</a:t>
             </a:r>
@@ -21921,16 +21219,13 @@
               <a:spcAft>
                 <a:spcPts val="0"/>
               </a:spcAft>
-              <a:defRPr sz="900" b="1">
-                <a:solidFill>
-                  <a:srgbClr val="133B36"/>
-                </a:solidFill>
-                <a:latin typeface="Aptos"/>
-              </a:defRPr>
-            </a:pPr>
-            <a:r>
-              <a:rPr>
-                <a:solidFill/>
+            </a:pPr>
+            <a:r>
+              <a:rPr sz="900" b="1">
+                <a:solidFill>
+                  <a:srgbClr val="9DDD71"/>
+                </a:solidFill>
+                <a:latin typeface="Arial"/>
               </a:rPr>
               <a:t>07 / 13</a:t>
             </a:r>
@@ -21966,16 +21261,13 @@
               <a:spcAft>
                 <a:spcPts val="0"/>
               </a:spcAft>
-              <a:defRPr sz="900" b="1">
-                <a:solidFill>
-                  <a:srgbClr val="1A4C42"/>
-                </a:solidFill>
-                <a:latin typeface="Aptos"/>
-              </a:defRPr>
-            </a:pPr>
-            <a:r>
-              <a:rPr>
-                <a:solidFill/>
+            </a:pPr>
+            <a:r>
+              <a:rPr sz="900" b="1">
+                <a:solidFill>
+                  <a:srgbClr val="96DD62"/>
+                </a:solidFill>
+                <a:latin typeface="Arial"/>
               </a:rPr>
               <a:t>MANAGEMENT VIEW</a:t>
             </a:r>
@@ -22011,16 +21303,13 @@
               <a:spcAft>
                 <a:spcPts val="0"/>
               </a:spcAft>
-              <a:defRPr sz="2900" b="1">
-                <a:solidFill>
-                  <a:srgbClr val="172A2B"/>
-                </a:solidFill>
-                <a:latin typeface="Aptos"/>
-              </a:defRPr>
-            </a:pPr>
-            <a:r>
-              <a:rPr>
-                <a:solidFill/>
+            </a:pPr>
+            <a:r>
+              <a:rPr sz="2900" b="1">
+                <a:solidFill>
+                  <a:srgbClr val="F6F7F5"/>
+                </a:solidFill>
+                <a:latin typeface="Arial"/>
               </a:rPr>
               <a:t>Finance, people and approvals in one place</a:t>
             </a:r>
@@ -22056,16 +21345,13 @@
               <a:spcAft>
                 <a:spcPts val="0"/>
               </a:spcAft>
-              <a:defRPr sz="1300" b="0">
-                <a:solidFill>
-                  <a:srgbClr val="667978"/>
-                </a:solidFill>
-                <a:latin typeface="Aptos"/>
-              </a:defRPr>
-            </a:pPr>
-            <a:r>
-              <a:rPr>
-                <a:solidFill/>
+            </a:pPr>
+            <a:r>
+              <a:rPr sz="1300" b="0">
+                <a:solidFill>
+                  <a:srgbClr val="B7C1B3"/>
+                </a:solidFill>
+                <a:latin typeface="Arial"/>
               </a:rPr>
               <a:t>Role-specific workspaces help managers follow the numbers and the decisions behind them.</a:t>
             </a:r>
@@ -22191,16 +21477,13 @@
               <a:spcAft>
                 <a:spcPts val="0"/>
               </a:spcAft>
-              <a:defRPr sz="2100" b="1">
-                <a:solidFill>
-                  <a:srgbClr val="1A4C42"/>
-                </a:solidFill>
-                <a:latin typeface="Aptos"/>
-              </a:defRPr>
-            </a:pPr>
-            <a:r>
-              <a:rPr>
-                <a:solidFill/>
+            </a:pPr>
+            <a:r>
+              <a:rPr sz="2100" b="1">
+                <a:solidFill>
+                  <a:srgbClr val="96DD62"/>
+                </a:solidFill>
+                <a:latin typeface="Arial"/>
               </a:rPr>
               <a:t>01</a:t>
             </a:r>
@@ -22236,16 +21519,13 @@
               <a:spcAft>
                 <a:spcPts val="0"/>
               </a:spcAft>
-              <a:defRPr sz="1800" b="1">
-                <a:solidFill>
-                  <a:srgbClr val="172A2B"/>
-                </a:solidFill>
-                <a:latin typeface="Aptos"/>
-              </a:defRPr>
-            </a:pPr>
-            <a:r>
-              <a:rPr>
-                <a:solidFill/>
+            </a:pPr>
+            <a:r>
+              <a:rPr sz="1800" b="1">
+                <a:solidFill>
+                  <a:srgbClr val="F6F7F5"/>
+                </a:solidFill>
+                <a:latin typeface="Arial"/>
               </a:rPr>
               <a:t>Finance</a:t>
             </a:r>
@@ -22281,16 +21561,13 @@
               <a:spcAft>
                 <a:spcPts val="0"/>
               </a:spcAft>
-              <a:defRPr sz="1200" b="0">
-                <a:solidFill>
-                  <a:srgbClr val="667978"/>
-                </a:solidFill>
-                <a:latin typeface="Aptos"/>
-              </a:defRPr>
-            </a:pPr>
-            <a:r>
-              <a:rPr>
-                <a:solidFill/>
+            </a:pPr>
+            <a:r>
+              <a:rPr sz="1200" b="0">
+                <a:solidFill>
+                  <a:srgbClr val="B7C1B3"/>
+                </a:solidFill>
+                <a:latin typeface="Arial"/>
               </a:rPr>
               <a:t>Receivables, recorded POS and invoice activity, and analysis of recorded costs and approved liabilities.</a:t>
             </a:r>
@@ -22373,16 +21650,13 @@
               <a:spcAft>
                 <a:spcPts val="0"/>
               </a:spcAft>
-              <a:defRPr sz="2100" b="1">
-                <a:solidFill>
-                  <a:srgbClr val="1A4C42"/>
-                </a:solidFill>
-                <a:latin typeface="Aptos"/>
-              </a:defRPr>
-            </a:pPr>
-            <a:r>
-              <a:rPr>
-                <a:solidFill/>
+            </a:pPr>
+            <a:r>
+              <a:rPr sz="2100" b="1">
+                <a:solidFill>
+                  <a:srgbClr val="96DD62"/>
+                </a:solidFill>
+                <a:latin typeface="Arial"/>
               </a:rPr>
               <a:t>02</a:t>
             </a:r>
@@ -22418,16 +21692,13 @@
               <a:spcAft>
                 <a:spcPts val="0"/>
               </a:spcAft>
-              <a:defRPr sz="1800" b="1">
-                <a:solidFill>
-                  <a:srgbClr val="172A2B"/>
-                </a:solidFill>
-                <a:latin typeface="Aptos"/>
-              </a:defRPr>
-            </a:pPr>
-            <a:r>
-              <a:rPr>
-                <a:solidFill/>
+            </a:pPr>
+            <a:r>
+              <a:rPr sz="1800" b="1">
+                <a:solidFill>
+                  <a:srgbClr val="F6F7F5"/>
+                </a:solidFill>
+                <a:latin typeface="Arial"/>
               </a:rPr>
               <a:t>People</a:t>
             </a:r>
@@ -22463,16 +21734,13 @@
               <a:spcAft>
                 <a:spcPts val="0"/>
               </a:spcAft>
-              <a:defRPr sz="1200" b="0">
-                <a:solidFill>
-                  <a:srgbClr val="667978"/>
-                </a:solidFill>
-                <a:latin typeface="Aptos"/>
-              </a:defRPr>
-            </a:pPr>
-            <a:r>
-              <a:rPr>
-                <a:solidFill/>
+            </a:pPr>
+            <a:r>
+              <a:rPr sz="1200" b="0">
+                <a:solidFill>
+                  <a:srgbClr val="B7C1B3"/>
+                </a:solidFill>
+                <a:latin typeface="Arial"/>
               </a:rPr>
               <a:t>HR records and a Kenya payroll preparation module with review and approval steps.</a:t>
             </a:r>
@@ -22555,16 +21823,13 @@
               <a:spcAft>
                 <a:spcPts val="0"/>
               </a:spcAft>
-              <a:defRPr sz="2100" b="1">
-                <a:solidFill>
-                  <a:srgbClr val="1A4C42"/>
-                </a:solidFill>
-                <a:latin typeface="Aptos"/>
-              </a:defRPr>
-            </a:pPr>
-            <a:r>
-              <a:rPr>
-                <a:solidFill/>
+            </a:pPr>
+            <a:r>
+              <a:rPr sz="2100" b="1">
+                <a:solidFill>
+                  <a:srgbClr val="96DD62"/>
+                </a:solidFill>
+                <a:latin typeface="Arial"/>
               </a:rPr>
               <a:t>03</a:t>
             </a:r>
@@ -22600,16 +21865,13 @@
               <a:spcAft>
                 <a:spcPts val="0"/>
               </a:spcAft>
-              <a:defRPr sz="1800" b="1">
-                <a:solidFill>
-                  <a:srgbClr val="172A2B"/>
-                </a:solidFill>
-                <a:latin typeface="Aptos"/>
-              </a:defRPr>
-            </a:pPr>
-            <a:r>
-              <a:rPr>
-                <a:solidFill/>
+            </a:pPr>
+            <a:r>
+              <a:rPr sz="1800" b="1">
+                <a:solidFill>
+                  <a:srgbClr val="F6F7F5"/>
+                </a:solidFill>
+                <a:latin typeface="Arial"/>
               </a:rPr>
               <a:t>Governance</a:t>
             </a:r>
@@ -22645,16 +21907,13 @@
               <a:spcAft>
                 <a:spcPts val="0"/>
               </a:spcAft>
-              <a:defRPr sz="1200" b="0">
-                <a:solidFill>
-                  <a:srgbClr val="667978"/>
-                </a:solidFill>
-                <a:latin typeface="Aptos"/>
-              </a:defRPr>
-            </a:pPr>
-            <a:r>
-              <a:rPr>
-                <a:solidFill/>
+            </a:pPr>
+            <a:r>
+              <a:rPr sz="1200" b="0">
+                <a:solidFill>
+                  <a:srgbClr val="B7C1B3"/>
+                </a:solidFill>
+                <a:latin typeface="Arial"/>
               </a:rPr>
               <a:t>Manager and administrator views, staff roles and approval checkpoints for controlled operations.</a:t>
             </a:r>
@@ -22735,16 +21994,13 @@
               <a:spcAft>
                 <a:spcPts val="0"/>
               </a:spcAft>
-              <a:defRPr sz="1100" b="1">
-                <a:solidFill>
-                  <a:srgbClr val="133B36"/>
-                </a:solidFill>
-                <a:latin typeface="Aptos"/>
-              </a:defRPr>
-            </a:pPr>
-            <a:r>
-              <a:rPr>
-                <a:solidFill/>
+            </a:pPr>
+            <a:r>
+              <a:rPr sz="1100" b="1">
+                <a:solidFill>
+                  <a:srgbClr val="9DDD71"/>
+                </a:solidFill>
+                <a:latin typeface="Arial"/>
               </a:rPr>
               <a:t>BOUNDARY  •  Payroll is calculation and approval preparation; it does not send salaries or file statutory returns.</a:t>
             </a:r>
@@ -22911,16 +22167,13 @@
               <a:spcAft>
                 <a:spcPts val="0"/>
               </a:spcAft>
-              <a:defRPr sz="1200" b="1">
-                <a:solidFill>
-                  <a:srgbClr val="FFFFFF"/>
-                </a:solidFill>
-                <a:latin typeface="Aptos"/>
-              </a:defRPr>
-            </a:pPr>
-            <a:r>
-              <a:rPr>
-                <a:solidFill/>
+            </a:pPr>
+            <a:r>
+              <a:rPr sz="1200" b="1">
+                <a:solidFill>
+                  <a:srgbClr val="F6F7F5"/>
+                </a:solidFill>
+                <a:latin typeface="Arial"/>
               </a:rPr>
               <a:t>SHILATECH  /  AUTO SPARES</a:t>
             </a:r>
@@ -22956,16 +22209,13 @@
               <a:spcAft>
                 <a:spcPts val="0"/>
               </a:spcAft>
-              <a:defRPr sz="900" b="1">
-                <a:solidFill>
-                  <a:srgbClr val="C5EB68"/>
-                </a:solidFill>
-                <a:latin typeface="Aptos"/>
-              </a:defRPr>
-            </a:pPr>
-            <a:r>
-              <a:rPr>
-                <a:solidFill/>
+            </a:pPr>
+            <a:r>
+              <a:rPr sz="900" b="1">
+                <a:solidFill>
+                  <a:srgbClr val="9AE367"/>
+                </a:solidFill>
+                <a:latin typeface="Arial"/>
               </a:rPr>
               <a:t>CONTROLS</a:t>
             </a:r>
@@ -23087,16 +22337,13 @@
               <a:spcAft>
                 <a:spcPts val="0"/>
               </a:spcAft>
-              <a:defRPr sz="900" b="0">
-                <a:solidFill>
-                  <a:srgbClr val="8FA39C"/>
-                </a:solidFill>
-                <a:latin typeface="Aptos"/>
-              </a:defRPr>
-            </a:pPr>
-            <a:r>
-              <a:rPr>
-                <a:solidFill/>
+            </a:pPr>
+            <a:r>
+              <a:rPr sz="900" b="0">
+                <a:solidFill>
+                  <a:srgbClr val="A6B5A7"/>
+                </a:solidFill>
+                <a:latin typeface="Arial"/>
               </a:rPr>
               <a:t>CORPORATE PLATFORM OVERVIEW  •  OCT 2026</a:t>
             </a:r>
@@ -23132,16 +22379,13 @@
               <a:spcAft>
                 <a:spcPts val="0"/>
               </a:spcAft>
-              <a:defRPr sz="900" b="1">
-                <a:solidFill>
-                  <a:srgbClr val="C5EB68"/>
-                </a:solidFill>
-                <a:latin typeface="Aptos"/>
-              </a:defRPr>
-            </a:pPr>
-            <a:r>
-              <a:rPr>
-                <a:solidFill/>
+            </a:pPr>
+            <a:r>
+              <a:rPr sz="900" b="1">
+                <a:solidFill>
+                  <a:srgbClr val="9AE367"/>
+                </a:solidFill>
+                <a:latin typeface="Arial"/>
               </a:rPr>
               <a:t>08 / 13</a:t>
             </a:r>
@@ -23177,16 +22421,13 @@
               <a:spcAft>
                 <a:spcPts val="0"/>
               </a:spcAft>
-              <a:defRPr sz="900" b="1">
-                <a:solidFill>
-                  <a:srgbClr val="C5EB68"/>
-                </a:solidFill>
-                <a:latin typeface="Aptos"/>
-              </a:defRPr>
-            </a:pPr>
-            <a:r>
-              <a:rPr>
-                <a:solidFill/>
+            </a:pPr>
+            <a:r>
+              <a:rPr sz="900" b="1">
+                <a:solidFill>
+                  <a:srgbClr val="9AE367"/>
+                </a:solidFill>
+                <a:latin typeface="Arial"/>
               </a:rPr>
               <a:t>BUILT FOR CONTROL</a:t>
             </a:r>
@@ -23222,18 +22463,15 @@
               <a:spcAft>
                 <a:spcPts val="0"/>
               </a:spcAft>
-              <a:defRPr sz="2900" b="1">
-                <a:solidFill>
-                  <a:srgbClr val="FFFFFF"/>
-                </a:solidFill>
-                <a:latin typeface="Aptos"/>
-              </a:defRPr>
-            </a:pPr>
-            <a:r>
-              <a:rPr>
-                <a:solidFill/>
-              </a:rPr>
-              <a:t>Operational safeguards worth preserving at launch</a:t>
+            </a:pPr>
+            <a:r>
+              <a:rPr sz="2900" b="1">
+                <a:solidFill>
+                  <a:srgbClr val="F6F7F5"/>
+                </a:solidFill>
+                <a:latin typeface="Arial"/>
+              </a:rPr>
+              <a:t>Operational safeguards to preserve at launch</a:t>
             </a:r>
           </a:p>
         </p:txBody>
@@ -23267,16 +22505,13 @@
               <a:spcAft>
                 <a:spcPts val="0"/>
               </a:spcAft>
-              <a:defRPr sz="1300" b="0">
-                <a:solidFill>
-                  <a:srgbClr val="B5C6BF"/>
-                </a:solidFill>
-                <a:latin typeface="Aptos"/>
-              </a:defRPr>
-            </a:pPr>
-            <a:r>
-              <a:rPr>
-                <a:solidFill/>
+            </a:pPr>
+            <a:r>
+              <a:rPr sz="1300" b="0">
+                <a:solidFill>
+                  <a:srgbClr val="C3D0C2"/>
+                </a:solidFill>
+                <a:latin typeface="Arial"/>
               </a:rPr>
               <a:t>A controlled go-live is as important as the software itself.</a:t>
             </a:r>
@@ -23402,16 +22637,13 @@
               <a:spcAft>
                 <a:spcPts val="0"/>
               </a:spcAft>
-              <a:defRPr sz="1700" b="1">
-                <a:solidFill>
-                  <a:srgbClr val="C5EB68"/>
-                </a:solidFill>
-                <a:latin typeface="Aptos"/>
-              </a:defRPr>
-            </a:pPr>
-            <a:r>
-              <a:rPr>
-                <a:solidFill/>
+            </a:pPr>
+            <a:r>
+              <a:rPr sz="1700" b="1">
+                <a:solidFill>
+                  <a:srgbClr val="9AE367"/>
+                </a:solidFill>
+                <a:latin typeface="Arial"/>
               </a:rPr>
               <a:t>01</a:t>
             </a:r>
@@ -23447,16 +22679,13 @@
               <a:spcAft>
                 <a:spcPts val="0"/>
               </a:spcAft>
-              <a:defRPr sz="1800" b="1">
-                <a:solidFill>
-                  <a:srgbClr val="FFFFFF"/>
-                </a:solidFill>
-                <a:latin typeface="Aptos"/>
-              </a:defRPr>
-            </a:pPr>
-            <a:r>
-              <a:rPr>
-                <a:solidFill/>
+            </a:pPr>
+            <a:r>
+              <a:rPr sz="1800" b="1">
+                <a:solidFill>
+                  <a:srgbClr val="F6F7F5"/>
+                </a:solidFill>
+                <a:latin typeface="Arial"/>
               </a:rPr>
               <a:t>Access by role</a:t>
             </a:r>
@@ -23492,16 +22721,13 @@
               <a:spcAft>
                 <a:spcPts val="0"/>
               </a:spcAft>
-              <a:defRPr sz="1200" b="0">
-                <a:solidFill>
-                  <a:srgbClr val="CEDBD4"/>
-                </a:solidFill>
-                <a:latin typeface="Aptos"/>
-              </a:defRPr>
-            </a:pPr>
-            <a:r>
-              <a:rPr>
-                <a:solidFill/>
+            </a:pPr>
+            <a:r>
+              <a:rPr sz="1200" b="0">
+                <a:solidFill>
+                  <a:srgbClr val="D8DDD7"/>
+                </a:solidFill>
+                <a:latin typeface="Arial"/>
               </a:rPr>
               <a:t>Staff routes and actions check the signed-in user and permissions.</a:t>
             </a:r>
@@ -23584,16 +22810,13 @@
               <a:spcAft>
                 <a:spcPts val="0"/>
               </a:spcAft>
-              <a:defRPr sz="1700" b="1">
-                <a:solidFill>
-                  <a:srgbClr val="C5EB68"/>
-                </a:solidFill>
-                <a:latin typeface="Aptos"/>
-              </a:defRPr>
-            </a:pPr>
-            <a:r>
-              <a:rPr>
-                <a:solidFill/>
+            </a:pPr>
+            <a:r>
+              <a:rPr sz="1700" b="1">
+                <a:solidFill>
+                  <a:srgbClr val="9AE367"/>
+                </a:solidFill>
+                <a:latin typeface="Arial"/>
               </a:rPr>
               <a:t>02</a:t>
             </a:r>
@@ -23629,16 +22852,13 @@
               <a:spcAft>
                 <a:spcPts val="0"/>
               </a:spcAft>
-              <a:defRPr sz="1800" b="1">
-                <a:solidFill>
-                  <a:srgbClr val="FFFFFF"/>
-                </a:solidFill>
-                <a:latin typeface="Aptos"/>
-              </a:defRPr>
-            </a:pPr>
-            <a:r>
-              <a:rPr>
-                <a:solidFill/>
+            </a:pPr>
+            <a:r>
+              <a:rPr sz="1800" b="1">
+                <a:solidFill>
+                  <a:srgbClr val="F6F7F5"/>
+                </a:solidFill>
+                <a:latin typeface="Arial"/>
               </a:rPr>
               <a:t>Stock integrity</a:t>
             </a:r>
@@ -23674,16 +22894,13 @@
               <a:spcAft>
                 <a:spcPts val="0"/>
               </a:spcAft>
-              <a:defRPr sz="1200" b="0">
-                <a:solidFill>
-                  <a:srgbClr val="CEDBD4"/>
-                </a:solidFill>
-                <a:latin typeface="Aptos"/>
-              </a:defRPr>
-            </a:pPr>
-            <a:r>
-              <a:rPr>
-                <a:solidFill/>
+            </a:pPr>
+            <a:r>
+              <a:rPr sz="1200" b="0">
+                <a:solidFill>
+                  <a:srgbClr val="D8DDD7"/>
+                </a:solidFill>
+                <a:latin typeface="Arial"/>
               </a:rPr>
               <a:t>Batch movement, reservations and discrepancy checks protect availability.</a:t>
             </a:r>
@@ -23766,16 +22983,13 @@
               <a:spcAft>
                 <a:spcPts val="0"/>
               </a:spcAft>
-              <a:defRPr sz="1700" b="1">
-                <a:solidFill>
-                  <a:srgbClr val="C5EB68"/>
-                </a:solidFill>
-                <a:latin typeface="Aptos"/>
-              </a:defRPr>
-            </a:pPr>
-            <a:r>
-              <a:rPr>
-                <a:solidFill/>
+            </a:pPr>
+            <a:r>
+              <a:rPr sz="1700" b="1">
+                <a:solidFill>
+                  <a:srgbClr val="9AE367"/>
+                </a:solidFill>
+                <a:latin typeface="Arial"/>
               </a:rPr>
               <a:t>03</a:t>
             </a:r>
@@ -23811,16 +23025,13 @@
               <a:spcAft>
                 <a:spcPts val="0"/>
               </a:spcAft>
-              <a:defRPr sz="1800" b="1">
-                <a:solidFill>
-                  <a:srgbClr val="FFFFFF"/>
-                </a:solidFill>
-                <a:latin typeface="Aptos"/>
-              </a:defRPr>
-            </a:pPr>
-            <a:r>
-              <a:rPr>
-                <a:solidFill/>
+            </a:pPr>
+            <a:r>
+              <a:rPr sz="1800" b="1">
+                <a:solidFill>
+                  <a:srgbClr val="F6F7F5"/>
+                </a:solidFill>
+                <a:latin typeface="Arial"/>
               </a:rPr>
               <a:t>Repeat-safe sales</a:t>
             </a:r>
@@ -23856,16 +23067,13 @@
               <a:spcAft>
                 <a:spcPts val="0"/>
               </a:spcAft>
-              <a:defRPr sz="1200" b="0">
-                <a:solidFill>
-                  <a:srgbClr val="CEDBD4"/>
-                </a:solidFill>
-                <a:latin typeface="Aptos"/>
-              </a:defRPr>
-            </a:pPr>
-            <a:r>
-              <a:rPr>
-                <a:solidFill/>
+            </a:pPr>
+            <a:r>
+              <a:rPr sz="1200" b="0">
+                <a:solidFill>
+                  <a:srgbClr val="D8DDD7"/>
+                </a:solidFill>
+                <a:latin typeface="Arial"/>
               </a:rPr>
               <a:t>Counter retries use request keys to avoid duplicate committed sales.</a:t>
             </a:r>
@@ -23948,16 +23156,13 @@
               <a:spcAft>
                 <a:spcPts val="0"/>
               </a:spcAft>
-              <a:defRPr sz="1700" b="1">
-                <a:solidFill>
-                  <a:srgbClr val="C5EB68"/>
-                </a:solidFill>
-                <a:latin typeface="Aptos"/>
-              </a:defRPr>
-            </a:pPr>
-            <a:r>
-              <a:rPr>
-                <a:solidFill/>
+            </a:pPr>
+            <a:r>
+              <a:rPr sz="1700" b="1">
+                <a:solidFill>
+                  <a:srgbClr val="9AE367"/>
+                </a:solidFill>
+                <a:latin typeface="Arial"/>
               </a:rPr>
               <a:t>04</a:t>
             </a:r>
@@ -23993,16 +23198,13 @@
               <a:spcAft>
                 <a:spcPts val="0"/>
               </a:spcAft>
-              <a:defRPr sz="1800" b="1">
-                <a:solidFill>
-                  <a:srgbClr val="FFFFFF"/>
-                </a:solidFill>
-                <a:latin typeface="Aptos"/>
-              </a:defRPr>
-            </a:pPr>
-            <a:r>
-              <a:rPr>
-                <a:solidFill/>
+            </a:pPr>
+            <a:r>
+              <a:rPr sz="1800" b="1">
+                <a:solidFill>
+                  <a:srgbClr val="F6F7F5"/>
+                </a:solidFill>
+                <a:latin typeface="Arial"/>
               </a:rPr>
               <a:t>Reviewable actions</a:t>
             </a:r>
@@ -24038,16 +23240,13 @@
               <a:spcAft>
                 <a:spcPts val="0"/>
               </a:spcAft>
-              <a:defRPr sz="1200" b="0">
-                <a:solidFill>
-                  <a:srgbClr val="CEDBD4"/>
-                </a:solidFill>
-                <a:latin typeface="Aptos"/>
-              </a:defRPr>
-            </a:pPr>
-            <a:r>
-              <a:rPr>
-                <a:solidFill/>
+            </a:pPr>
+            <a:r>
+              <a:rPr sz="1200" b="0">
+                <a:solidFill>
+                  <a:srgbClr val="D8DDD7"/>
+                </a:solidFill>
+                <a:latin typeface="Arial"/>
               </a:rPr>
               <a:t>Approval steps and audit records make important changes traceable.</a:t>
             </a:r>
@@ -24128,16 +23327,13 @@
               <a:spcAft>
                 <a:spcPts val="0"/>
               </a:spcAft>
-              <a:defRPr sz="1100" b="1">
-                <a:solidFill>
-                  <a:srgbClr val="C5EB68"/>
-                </a:solidFill>
-                <a:latin typeface="Aptos"/>
-              </a:defRPr>
-            </a:pPr>
-            <a:r>
-              <a:rPr>
-                <a:solidFill/>
+            </a:pPr>
+            <a:r>
+              <a:rPr sz="1100" b="1">
+                <a:solidFill>
+                  <a:srgbClr val="9AE367"/>
+                </a:solidFill>
+                <a:latin typeface="Arial"/>
               </a:rPr>
               <a:t>GO-LIVE REQUIREMENT  •  Verify backup restore, payment handling and simultaneous sales on staging before opening.</a:t>
             </a:r>
@@ -24304,16 +23500,13 @@
               <a:spcAft>
                 <a:spcPts val="0"/>
               </a:spcAft>
-              <a:defRPr sz="1200" b="1">
-                <a:solidFill>
-                  <a:srgbClr val="133B36"/>
-                </a:solidFill>
-                <a:latin typeface="Aptos"/>
-              </a:defRPr>
-            </a:pPr>
-            <a:r>
-              <a:rPr>
-                <a:solidFill/>
+            </a:pPr>
+            <a:r>
+              <a:rPr sz="1200" b="1">
+                <a:solidFill>
+                  <a:srgbClr val="9DDD71"/>
+                </a:solidFill>
+                <a:latin typeface="Arial"/>
               </a:rPr>
               <a:t>SHILATECH  /  AUTO SPARES</a:t>
             </a:r>
@@ -24349,16 +23542,13 @@
               <a:spcAft>
                 <a:spcPts val="0"/>
               </a:spcAft>
-              <a:defRPr sz="900" b="1">
-                <a:solidFill>
-                  <a:srgbClr val="1A4C42"/>
-                </a:solidFill>
-                <a:latin typeface="Aptos"/>
-              </a:defRPr>
-            </a:pPr>
-            <a:r>
-              <a:rPr>
-                <a:solidFill/>
+            </a:pPr>
+            <a:r>
+              <a:rPr sz="900" b="1">
+                <a:solidFill>
+                  <a:srgbClr val="96DD62"/>
+                </a:solidFill>
+                <a:latin typeface="Arial"/>
               </a:rPr>
               <a:t>DEPLOYMENT BLUEPRINT</a:t>
             </a:r>
@@ -24480,16 +23670,13 @@
               <a:spcAft>
                 <a:spcPts val="0"/>
               </a:spcAft>
-              <a:defRPr sz="900" b="0">
-                <a:solidFill>
-                  <a:srgbClr val="667978"/>
-                </a:solidFill>
-                <a:latin typeface="Aptos"/>
-              </a:defRPr>
-            </a:pPr>
-            <a:r>
-              <a:rPr>
-                <a:solidFill/>
+            </a:pPr>
+            <a:r>
+              <a:rPr sz="900" b="0">
+                <a:solidFill>
+                  <a:srgbClr val="B7C1B3"/>
+                </a:solidFill>
+                <a:latin typeface="Arial"/>
               </a:rPr>
               <a:t>CORPORATE PLATFORM OVERVIEW  •  OCT 2026</a:t>
             </a:r>
@@ -24525,16 +23712,13 @@
               <a:spcAft>
                 <a:spcPts val="0"/>
               </a:spcAft>
-              <a:defRPr sz="900" b="1">
-                <a:solidFill>
-                  <a:srgbClr val="133B36"/>
-                </a:solidFill>
-                <a:latin typeface="Aptos"/>
-              </a:defRPr>
-            </a:pPr>
-            <a:r>
-              <a:rPr>
-                <a:solidFill/>
+            </a:pPr>
+            <a:r>
+              <a:rPr sz="900" b="1">
+                <a:solidFill>
+                  <a:srgbClr val="9DDD71"/>
+                </a:solidFill>
+                <a:latin typeface="Arial"/>
               </a:rPr>
               <a:t>09 / 13</a:t>
             </a:r>
@@ -24570,16 +23754,13 @@
               <a:spcAft>
                 <a:spcPts val="0"/>
               </a:spcAft>
-              <a:defRPr sz="900" b="1">
-                <a:solidFill>
-                  <a:srgbClr val="1A4C42"/>
-                </a:solidFill>
-                <a:latin typeface="Aptos"/>
-              </a:defRPr>
-            </a:pPr>
-            <a:r>
-              <a:rPr>
-                <a:solidFill/>
+            </a:pPr>
+            <a:r>
+              <a:rPr sz="900" b="1">
+                <a:solidFill>
+                  <a:srgbClr val="96DD62"/>
+                </a:solidFill>
+                <a:latin typeface="Arial"/>
               </a:rPr>
               <a:t>PUTTING IT ONLINE</a:t>
             </a:r>
@@ -24615,16 +23796,13 @@
               <a:spcAft>
                 <a:spcPts val="0"/>
               </a:spcAft>
-              <a:defRPr sz="2900" b="1">
-                <a:solidFill>
-                  <a:srgbClr val="172A2B"/>
-                </a:solidFill>
-                <a:latin typeface="Aptos"/>
-              </a:defRPr>
-            </a:pPr>
-            <a:r>
-              <a:rPr>
-                <a:solidFill/>
+            </a:pPr>
+            <a:r>
+              <a:rPr sz="2900" b="1">
+                <a:solidFill>
+                  <a:srgbClr val="F6F7F5"/>
+                </a:solidFill>
+                <a:latin typeface="Arial"/>
               </a:rPr>
               <a:t>A practical production architecture</a:t>
             </a:r>
@@ -24660,16 +23838,13 @@
               <a:spcAft>
                 <a:spcPts val="0"/>
               </a:spcAft>
-              <a:defRPr sz="1300" b="0">
-                <a:solidFill>
-                  <a:srgbClr val="667978"/>
-                </a:solidFill>
-                <a:latin typeface="Aptos"/>
-              </a:defRPr>
-            </a:pPr>
-            <a:r>
-              <a:rPr>
-                <a:solidFill/>
+            </a:pPr>
+            <a:r>
+              <a:rPr sz="1300" b="0">
+                <a:solidFill>
+                  <a:srgbClr val="B7C1B3"/>
+                </a:solidFill>
+                <a:latin typeface="Arial"/>
               </a:rPr>
               <a:t>Proposed service layout for a managed, browser-accessible launch.</a:t>
             </a:r>
@@ -24838,16 +24013,13 @@
               <a:spcAft>
                 <a:spcPts val="0"/>
               </a:spcAft>
-              <a:defRPr sz="1600" b="1">
-                <a:solidFill>
-                  <a:srgbClr val="1A4C42"/>
-                </a:solidFill>
-                <a:latin typeface="Aptos"/>
-              </a:defRPr>
-            </a:pPr>
-            <a:r>
-              <a:rPr>
-                <a:solidFill/>
+            </a:pPr>
+            <a:r>
+              <a:rPr sz="1600" b="1">
+                <a:solidFill>
+                  <a:srgbClr val="96DD62"/>
+                </a:solidFill>
+                <a:latin typeface="Arial"/>
               </a:rPr>
               <a:t>01</a:t>
             </a:r>
@@ -24883,16 +24055,13 @@
               <a:spcAft>
                 <a:spcPts val="0"/>
               </a:spcAft>
-              <a:defRPr sz="1400" b="1">
-                <a:solidFill>
-                  <a:srgbClr val="172A2B"/>
-                </a:solidFill>
-                <a:latin typeface="Aptos"/>
-              </a:defRPr>
-            </a:pPr>
-            <a:r>
-              <a:rPr>
-                <a:solidFill/>
+            </a:pPr>
+            <a:r>
+              <a:rPr sz="1400" b="1">
+                <a:solidFill>
+                  <a:srgbClr val="F6F7F5"/>
+                </a:solidFill>
+                <a:latin typeface="Arial"/>
               </a:rPr>
               <a:t>CUSTOMER &amp; STAFF</a:t>
             </a:r>
@@ -24928,16 +24097,13 @@
               <a:spcAft>
                 <a:spcPts val="0"/>
               </a:spcAft>
-              <a:defRPr sz="1300" b="0">
-                <a:solidFill>
-                  <a:srgbClr val="667978"/>
-                </a:solidFill>
-                <a:latin typeface="Aptos"/>
-              </a:defRPr>
-            </a:pPr>
-            <a:r>
-              <a:rPr>
-                <a:solidFill/>
+            </a:pPr>
+            <a:r>
+              <a:rPr sz="1300" b="0">
+                <a:solidFill>
+                  <a:srgbClr val="B7C1B3"/>
+                </a:solidFill>
+                <a:latin typeface="Arial"/>
               </a:rPr>
               <a:t>Web browsers  •  domain  •  free SSL</a:t>
             </a:r>
@@ -25063,16 +24229,13 @@
               <a:spcAft>
                 <a:spcPts val="0"/>
               </a:spcAft>
-              <a:defRPr sz="1600" b="1">
-                <a:solidFill>
-                  <a:srgbClr val="1A4C42"/>
-                </a:solidFill>
-                <a:latin typeface="Aptos"/>
-              </a:defRPr>
-            </a:pPr>
-            <a:r>
-              <a:rPr>
-                <a:solidFill/>
+            </a:pPr>
+            <a:r>
+              <a:rPr sz="1600" b="1">
+                <a:solidFill>
+                  <a:srgbClr val="96DD62"/>
+                </a:solidFill>
+                <a:latin typeface="Arial"/>
               </a:rPr>
               <a:t>02</a:t>
             </a:r>
@@ -25108,16 +24271,13 @@
               <a:spcAft>
                 <a:spcPts val="0"/>
               </a:spcAft>
-              <a:defRPr sz="1400" b="1">
-                <a:solidFill>
-                  <a:srgbClr val="172A2B"/>
-                </a:solidFill>
-                <a:latin typeface="Aptos"/>
-              </a:defRPr>
-            </a:pPr>
-            <a:r>
-              <a:rPr>
-                <a:solidFill/>
+            </a:pPr>
+            <a:r>
+              <a:rPr sz="1400" b="1">
+                <a:solidFill>
+                  <a:srgbClr val="F6F7F5"/>
+                </a:solidFill>
+                <a:latin typeface="Arial"/>
               </a:rPr>
               <a:t>APPLICATION</a:t>
             </a:r>
@@ -25153,16 +24313,13 @@
               <a:spcAft>
                 <a:spcPts val="0"/>
               </a:spcAft>
-              <a:defRPr sz="1300" b="0">
-                <a:solidFill>
-                  <a:srgbClr val="667978"/>
-                </a:solidFill>
-                <a:latin typeface="Aptos"/>
-              </a:defRPr>
-            </a:pPr>
-            <a:r>
-              <a:rPr>
-                <a:solidFill/>
+            </a:pPr>
+            <a:r>
+              <a:rPr sz="1300" b="0">
+                <a:solidFill>
+                  <a:srgbClr val="B7C1B3"/>
+                </a:solidFill>
+                <a:latin typeface="Arial"/>
               </a:rPr>
               <a:t>Next.js app  •  Vercel or Railway hosting</a:t>
             </a:r>
@@ -25288,16 +24445,13 @@
               <a:spcAft>
                 <a:spcPts val="0"/>
               </a:spcAft>
-              <a:defRPr sz="1600" b="1">
-                <a:solidFill>
-                  <a:srgbClr val="1A4C42"/>
-                </a:solidFill>
-                <a:latin typeface="Aptos"/>
-              </a:defRPr>
-            </a:pPr>
-            <a:r>
-              <a:rPr>
-                <a:solidFill/>
+            </a:pPr>
+            <a:r>
+              <a:rPr sz="1600" b="1">
+                <a:solidFill>
+                  <a:srgbClr val="96DD62"/>
+                </a:solidFill>
+                <a:latin typeface="Arial"/>
               </a:rPr>
               <a:t>03</a:t>
             </a:r>
@@ -25333,16 +24487,13 @@
               <a:spcAft>
                 <a:spcPts val="0"/>
               </a:spcAft>
-              <a:defRPr sz="1400" b="1">
-                <a:solidFill>
-                  <a:srgbClr val="172A2B"/>
-                </a:solidFill>
-                <a:latin typeface="Aptos"/>
-              </a:defRPr>
-            </a:pPr>
-            <a:r>
-              <a:rPr>
-                <a:solidFill/>
+            </a:pPr>
+            <a:r>
+              <a:rPr sz="1400" b="1">
+                <a:solidFill>
+                  <a:srgbClr val="F6F7F5"/>
+                </a:solidFill>
+                <a:latin typeface="Arial"/>
               </a:rPr>
               <a:t>DATA</a:t>
             </a:r>
@@ -25378,16 +24529,13 @@
               <a:spcAft>
                 <a:spcPts val="0"/>
               </a:spcAft>
-              <a:defRPr sz="1300" b="0">
-                <a:solidFill>
-                  <a:srgbClr val="667978"/>
-                </a:solidFill>
-                <a:latin typeface="Aptos"/>
-              </a:defRPr>
-            </a:pPr>
-            <a:r>
-              <a:rPr>
-                <a:solidFill/>
+            </a:pPr>
+            <a:r>
+              <a:rPr sz="1300" b="0">
+                <a:solidFill>
+                  <a:srgbClr val="B7C1B3"/>
+                </a:solidFill>
+                <a:latin typeface="Arial"/>
               </a:rPr>
               <a:t>Managed PostgreSQL  •  Supabase</a:t>
             </a:r>
@@ -25513,16 +24661,13 @@
               <a:spcAft>
                 <a:spcPts val="0"/>
               </a:spcAft>
-              <a:defRPr sz="1600" b="1">
-                <a:solidFill>
-                  <a:srgbClr val="1A4C42"/>
-                </a:solidFill>
-                <a:latin typeface="Aptos"/>
-              </a:defRPr>
-            </a:pPr>
-            <a:r>
-              <a:rPr>
-                <a:solidFill/>
+            </a:pPr>
+            <a:r>
+              <a:rPr sz="1600" b="1">
+                <a:solidFill>
+                  <a:srgbClr val="96DD62"/>
+                </a:solidFill>
+                <a:latin typeface="Arial"/>
               </a:rPr>
               <a:t>04</a:t>
             </a:r>
@@ -25558,16 +24703,13 @@
               <a:spcAft>
                 <a:spcPts val="0"/>
               </a:spcAft>
-              <a:defRPr sz="1400" b="1">
-                <a:solidFill>
-                  <a:srgbClr val="172A2B"/>
-                </a:solidFill>
-                <a:latin typeface="Aptos"/>
-              </a:defRPr>
-            </a:pPr>
-            <a:r>
-              <a:rPr>
-                <a:solidFill/>
+            </a:pPr>
+            <a:r>
+              <a:rPr sz="1400" b="1">
+                <a:solidFill>
+                  <a:srgbClr val="F6F7F5"/>
+                </a:solidFill>
+                <a:latin typeface="Arial"/>
               </a:rPr>
               <a:t>RESILIENCE</a:t>
             </a:r>
@@ -25603,16 +24745,13 @@
               <a:spcAft>
                 <a:spcPts val="0"/>
               </a:spcAft>
-              <a:defRPr sz="1300" b="0">
-                <a:solidFill>
-                  <a:srgbClr val="667978"/>
-                </a:solidFill>
-                <a:latin typeface="Aptos"/>
-              </a:defRPr>
-            </a:pPr>
-            <a:r>
-              <a:rPr>
-                <a:solidFill/>
+            </a:pPr>
+            <a:r>
+              <a:rPr sz="1300" b="0">
+                <a:solidFill>
+                  <a:srgbClr val="B7C1B3"/>
+                </a:solidFill>
+                <a:latin typeface="Arial"/>
               </a:rPr>
               <a:t>Email / alerts  •  encrypted off-site backup</a:t>
             </a:r>
